--- a/docs/presentations/Smart_Snake_Robot_SURGE090_Progress_Review  -  Repaired.pptx
+++ b/docs/presentations/Smart_Snake_Robot_SURGE090_Progress_Review  -  Repaired.pptx
@@ -2650,9 +2650,6 @@
           </a:bodyPr>
           <a:lstStyle/>
           <a:p>
-            <a:pPr marL="0" indent="0">
-              <a:buNone/>
-            </a:pPr>
             <a:r>
               <a:rPr lang="en-US" sz="1000" u="sng" dirty="0">
                 <a:solidFill>
@@ -2660,7 +2657,7 @@
                 </a:solidFill>
                 <a:latin typeface="Calibri" pitchFamily="34" charset="0"/>
               </a:rPr>
-              <a:t>github.com/bhaveshbanshiwal/Snake_SURGE</a:t>
+              <a:t>https://github.com/shashankjangir/surge090</a:t>
             </a:r>
           </a:p>
         </p:txBody>

--- a/docs/presentations/Smart_Snake_Robot_SURGE090_Progress_Review  -  Repaired.pptx
+++ b/docs/presentations/Smart_Snake_Robot_SURGE090_Progress_Review  -  Repaired.pptx
@@ -5,7 +5,7 @@
     <p:sldMasterId id="2147483648" r:id="rId1"/>
   </p:sldMasterIdLst>
   <p:notesMasterIdLst>
-    <p:notesMasterId r:id="rId15"/>
+    <p:notesMasterId r:id="rId17"/>
   </p:notesMasterIdLst>
   <p:sldIdLst>
     <p:sldId id="287" r:id="rId2"/>
@@ -21,6 +21,8 @@
     <p:sldId id="285" r:id="rId12"/>
     <p:sldId id="268" r:id="rId13"/>
     <p:sldId id="269" r:id="rId14"/>
+    <p:sldId id="308" r:id="rId15"/>
+    <p:sldId id="306" r:id="rId16"/>
   </p:sldIdLst>
   <p:sldSz cx="12192000" cy="6858000"/>
   <p:notesSz cx="6858000" cy="12192000"/>
@@ -1695,7 +1697,7 @@
                   </a:schemeClr>
                 </a:solidFill>
               </a:rPr>
-              <a:t>First Progress Review (Design &amp; Development Phase)</a:t>
+              <a:t>Progress Review (Design &amp; Development)</a:t>
             </a:r>
             <a:endParaRPr lang="en-US" dirty="0">
               <a:solidFill>
@@ -10071,6 +10073,1714 @@
         </p:txBody>
       </p:sp>
     </p:spTree>
+  </p:cSld>
+  <p:clrMapOvr>
+    <a:masterClrMapping/>
+  </p:clrMapOvr>
+</p:sld>
+</file>
+
+<file path=ppt/slides/slide14.xml><?xml version="1.0" encoding="utf-8"?>
+<p:sld xmlns:a="http://schemas.openxmlformats.org/drawingml/2006/main" xmlns:r="http://schemas.openxmlformats.org/officeDocument/2006/relationships" xmlns:p="http://schemas.openxmlformats.org/presentationml/2006/main">
+  <p:cSld>
+    <p:bg>
+      <p:bgPr>
+        <a:solidFill>
+          <a:srgbClr val="F4F6F9"/>
+        </a:solidFill>
+        <a:effectLst/>
+      </p:bgPr>
+    </p:bg>
+    <p:spTree>
+      <p:nvGrpSpPr>
+        <p:cNvPr id="1" name=""/>
+        <p:cNvGrpSpPr/>
+        <p:nvPr/>
+      </p:nvGrpSpPr>
+      <p:grpSpPr>
+        <a:xfrm>
+          <a:off x="0" y="0"/>
+          <a:ext cx="0" cy="0"/>
+          <a:chOff x="0" y="0"/>
+          <a:chExt cx="0" cy="0"/>
+        </a:xfrm>
+      </p:grpSpPr>
+      <p:sp>
+        <p:nvSpPr>
+          <p:cNvPr id="10" name="TopBar"/>
+          <p:cNvSpPr>
+            <a:spLocks noGrp="1"/>
+          </p:cNvSpPr>
+          <p:nvPr/>
+        </p:nvSpPr>
+        <p:spPr>
+          <a:xfrm>
+            <a:off x="0" y="0"/>
+            <a:ext cx="12192000" cy="76200"/>
+          </a:xfrm>
+          <a:prstGeom prst="rect">
+            <a:avLst/>
+          </a:prstGeom>
+          <a:solidFill>
+            <a:srgbClr val="0E96AC"/>
+          </a:solidFill>
+          <a:ln>
+            <a:noFill/>
+          </a:ln>
+        </p:spPr>
+        <p:txBody>
+          <a:bodyPr/>
+          <a:lstStyle/>
+          <a:p>
+            <a:endParaRPr/>
+          </a:p>
+        </p:txBody>
+      </p:sp>
+      <p:sp>
+        <p:nvSpPr>
+          <p:cNvPr id="11" name="Eyebrow"/>
+          <p:cNvSpPr>
+            <a:spLocks noGrp="1"/>
+          </p:cNvSpPr>
+          <p:nvPr/>
+        </p:nvSpPr>
+        <p:spPr>
+          <a:xfrm>
+            <a:off x="533400" y="177800"/>
+            <a:ext cx="8890000" cy="228600"/>
+          </a:xfrm>
+          <a:prstGeom prst="rect">
+            <a:avLst/>
+          </a:prstGeom>
+          <a:noFill/>
+          <a:ln>
+            <a:noFill/>
+          </a:ln>
+        </p:spPr>
+        <p:txBody>
+          <a:bodyPr/>
+          <a:lstStyle/>
+          <a:p>
+            <a:pPr marL="0" indent="0" algn="l">
+              <a:buNone/>
+            </a:pPr>
+            <a:r>
+              <a:rPr lang="en-IN" sz="1100" b="1" dirty="0">
+                <a:solidFill>
+                  <a:srgbClr val="0E96AC"/>
+                </a:solidFill>
+                <a:latin typeface="Calibri" pitchFamily="34" charset="0"/>
+              </a:rPr>
+              <a:t>SIMULATION &amp; VALIDATION</a:t>
+            </a:r>
+          </a:p>
+        </p:txBody>
+      </p:sp>
+      <p:sp>
+        <p:nvSpPr>
+          <p:cNvPr id="12" name="AccentLine"/>
+          <p:cNvSpPr>
+            <a:spLocks noGrp="1"/>
+          </p:cNvSpPr>
+          <p:nvPr/>
+        </p:nvSpPr>
+        <p:spPr>
+          <a:xfrm>
+            <a:off x="533400" y="431800"/>
+            <a:ext cx="11125200" cy="12700"/>
+          </a:xfrm>
+          <a:prstGeom prst="rect">
+            <a:avLst/>
+          </a:prstGeom>
+          <a:solidFill>
+            <a:srgbClr val="0E96AC"/>
+          </a:solidFill>
+          <a:ln>
+            <a:noFill/>
+          </a:ln>
+        </p:spPr>
+        <p:txBody>
+          <a:bodyPr/>
+          <a:lstStyle/>
+          <a:p>
+            <a:endParaRPr/>
+          </a:p>
+        </p:txBody>
+      </p:sp>
+      <p:sp>
+        <p:nvSpPr>
+          <p:cNvPr id="13" name="MainTitle"/>
+          <p:cNvSpPr>
+            <a:spLocks noGrp="1"/>
+          </p:cNvSpPr>
+          <p:nvPr/>
+        </p:nvSpPr>
+        <p:spPr>
+          <a:xfrm>
+            <a:off x="533400" y="508000"/>
+            <a:ext cx="10160000" cy="508000"/>
+          </a:xfrm>
+          <a:prstGeom prst="rect">
+            <a:avLst/>
+          </a:prstGeom>
+          <a:noFill/>
+          <a:ln>
+            <a:noFill/>
+          </a:ln>
+        </p:spPr>
+        <p:txBody>
+          <a:bodyPr/>
+          <a:lstStyle/>
+          <a:p>
+            <a:pPr marL="0" indent="0" algn="l">
+              <a:buNone/>
+            </a:pPr>
+            <a:r>
+              <a:rPr lang="en-IN" sz="2400" b="1" dirty="0">
+                <a:solidFill>
+                  <a:srgbClr val="16223A"/>
+                </a:solidFill>
+                <a:latin typeface="Calibri" pitchFamily="34" charset="0"/>
+              </a:rPr>
+              <a:t>Simulation-Based Validation of Control Architecture</a:t>
+            </a:r>
+          </a:p>
+        </p:txBody>
+      </p:sp>
+      <p:sp>
+        <p:nvSpPr>
+          <p:cNvPr id="20" name="LeftHeader"/>
+          <p:cNvSpPr>
+            <a:spLocks noGrp="1"/>
+          </p:cNvSpPr>
+          <p:nvPr/>
+        </p:nvSpPr>
+        <p:spPr>
+          <a:xfrm>
+            <a:off x="533400" y="1143000"/>
+            <a:ext cx="4191000" cy="279400"/>
+          </a:xfrm>
+          <a:prstGeom prst="rect">
+            <a:avLst/>
+          </a:prstGeom>
+          <a:solidFill>
+            <a:srgbClr val="16223A"/>
+          </a:solidFill>
+          <a:ln>
+            <a:noFill/>
+          </a:ln>
+        </p:spPr>
+        <p:txBody>
+          <a:bodyPr/>
+          <a:lstStyle/>
+          <a:p>
+            <a:pPr marL="0" indent="0" algn="l">
+              <a:buNone/>
+            </a:pPr>
+            <a:r>
+              <a:rPr lang="en-IN" sz="1200" b="1" dirty="0">
+                <a:solidFill>
+                  <a:srgbClr val="FFFFFF"/>
+                </a:solidFill>
+                <a:latin typeface="Calibri" pitchFamily="34" charset="0"/>
+              </a:rPr>
+              <a:t>SYSTEM OVERVIEW</a:t>
+            </a:r>
+          </a:p>
+        </p:txBody>
+      </p:sp>
+      <p:sp>
+        <p:nvSpPr>
+          <p:cNvPr id="21" name="ESP32Block"/>
+          <p:cNvSpPr>
+            <a:spLocks noGrp="1"/>
+          </p:cNvSpPr>
+          <p:nvPr/>
+        </p:nvSpPr>
+        <p:spPr>
+          <a:xfrm>
+            <a:off x="1168400" y="1574800"/>
+            <a:ext cx="2921000" cy="457200"/>
+          </a:xfrm>
+          <a:prstGeom prst="roundRect">
+            <a:avLst>
+              <a:gd name="adj" fmla="val 20000"/>
+            </a:avLst>
+          </a:prstGeom>
+          <a:solidFill>
+            <a:srgbClr val="0E96AC"/>
+          </a:solidFill>
+          <a:ln>
+            <a:noFill/>
+          </a:ln>
+        </p:spPr>
+        <p:txBody>
+          <a:bodyPr/>
+          <a:lstStyle/>
+          <a:p>
+            <a:pPr marL="0" indent="0" algn="ctr">
+              <a:buNone/>
+            </a:pPr>
+            <a:r>
+              <a:rPr lang="en-IN" sz="1400" b="1" dirty="0">
+                <a:solidFill>
+                  <a:srgbClr val="FFFFFF"/>
+                </a:solidFill>
+                <a:latin typeface="Calibri" pitchFamily="34" charset="0"/>
+              </a:rPr>
+              <a:t>ESP32 Controller</a:t>
+            </a:r>
+          </a:p>
+        </p:txBody>
+      </p:sp>
+      <p:sp>
+        <p:nvSpPr>
+          <p:cNvPr id="22" name="Arr1Line"/>
+          <p:cNvSpPr>
+            <a:spLocks noGrp="1"/>
+          </p:cNvSpPr>
+          <p:nvPr/>
+        </p:nvSpPr>
+        <p:spPr>
+          <a:xfrm>
+            <a:off x="2603500" y="2032000"/>
+            <a:ext cx="25400" cy="228600"/>
+          </a:xfrm>
+          <a:prstGeom prst="rect">
+            <a:avLst/>
+          </a:prstGeom>
+          <a:solidFill>
+            <a:srgbClr val="16223A"/>
+          </a:solidFill>
+          <a:ln>
+            <a:noFill/>
+          </a:ln>
+        </p:spPr>
+        <p:txBody>
+          <a:bodyPr/>
+          <a:lstStyle/>
+          <a:p>
+            <a:endParaRPr/>
+          </a:p>
+        </p:txBody>
+      </p:sp>
+      <p:sp>
+        <p:nvSpPr>
+          <p:cNvPr id="23" name="Arr1Head"/>
+          <p:cNvSpPr/>
+          <p:nvPr/>
+        </p:nvSpPr>
+        <p:spPr>
+          <a:xfrm>
+            <a:off x="2540000" y="2235200"/>
+            <a:ext cx="152400" cy="101600"/>
+          </a:xfrm>
+          <a:prstGeom prst="downArrow">
+            <a:avLst>
+              <a:gd name="adj1" fmla="val 50000"/>
+              <a:gd name="adj2" fmla="val 50000"/>
+            </a:avLst>
+          </a:prstGeom>
+          <a:solidFill>
+            <a:srgbClr val="16223A"/>
+          </a:solidFill>
+          <a:ln>
+            <a:noFill/>
+          </a:ln>
+        </p:spPr>
+        <p:txBody>
+          <a:bodyPr/>
+          <a:lstStyle/>
+          <a:p>
+            <a:endParaRPr/>
+          </a:p>
+        </p:txBody>
+      </p:sp>
+      <p:sp>
+        <p:nvSpPr>
+          <p:cNvPr id="24" name="ServoBlock"/>
+          <p:cNvSpPr>
+            <a:spLocks noGrp="1"/>
+          </p:cNvSpPr>
+          <p:nvPr/>
+        </p:nvSpPr>
+        <p:spPr>
+          <a:xfrm>
+            <a:off x="914400" y="2362200"/>
+            <a:ext cx="3429000" cy="457200"/>
+          </a:xfrm>
+          <a:prstGeom prst="roundRect">
+            <a:avLst>
+              <a:gd name="adj" fmla="val 20000"/>
+            </a:avLst>
+          </a:prstGeom>
+          <a:solidFill>
+            <a:srgbClr val="1A3460"/>
+          </a:solidFill>
+          <a:ln>
+            <a:noFill/>
+          </a:ln>
+        </p:spPr>
+        <p:txBody>
+          <a:bodyPr/>
+          <a:lstStyle/>
+          <a:p>
+            <a:pPr marL="0" indent="0" algn="ctr">
+              <a:buNone/>
+            </a:pPr>
+            <a:r>
+              <a:rPr lang="en-IN" sz="1400" b="1" dirty="0">
+                <a:solidFill>
+                  <a:srgbClr val="FFFFFF"/>
+                </a:solidFill>
+                <a:latin typeface="Calibri" pitchFamily="34" charset="0"/>
+              </a:rPr>
+              <a:t>5 Servo Motor Network</a:t>
+            </a:r>
+          </a:p>
+        </p:txBody>
+      </p:sp>
+      <p:sp>
+        <p:nvSpPr>
+          <p:cNvPr id="25" name="ServoSub"/>
+          <p:cNvSpPr>
+            <a:spLocks noGrp="1"/>
+          </p:cNvSpPr>
+          <p:nvPr/>
+        </p:nvSpPr>
+        <p:spPr>
+          <a:xfrm>
+            <a:off x="914400" y="2844800"/>
+            <a:ext cx="3429000" cy="203200"/>
+          </a:xfrm>
+          <a:prstGeom prst="rect">
+            <a:avLst/>
+          </a:prstGeom>
+          <a:noFill/>
+          <a:ln>
+            <a:noFill/>
+          </a:ln>
+        </p:spPr>
+        <p:txBody>
+          <a:bodyPr/>
+          <a:lstStyle/>
+          <a:p>
+            <a:pPr marL="0" indent="0" algn="ctr">
+              <a:buNone/>
+            </a:pPr>
+            <a:r>
+              <a:rPr lang="en-IN" sz="1100" dirty="0">
+                <a:solidFill>
+                  <a:srgbClr val="555E6F"/>
+                </a:solidFill>
+                <a:latin typeface="Calibri" pitchFamily="34" charset="0"/>
+              </a:rPr>
+              <a:t>Joints: S1 – S5 (SG90)</a:t>
+            </a:r>
+          </a:p>
+        </p:txBody>
+      </p:sp>
+      <p:sp>
+        <p:nvSpPr>
+          <p:cNvPr id="26" name="Arr2Line"/>
+          <p:cNvSpPr>
+            <a:spLocks noGrp="1"/>
+          </p:cNvSpPr>
+          <p:nvPr/>
+        </p:nvSpPr>
+        <p:spPr>
+          <a:xfrm>
+            <a:off x="2603500" y="3048000"/>
+            <a:ext cx="25400" cy="228600"/>
+          </a:xfrm>
+          <a:prstGeom prst="rect">
+            <a:avLst/>
+          </a:prstGeom>
+          <a:solidFill>
+            <a:srgbClr val="16223A"/>
+          </a:solidFill>
+          <a:ln>
+            <a:noFill/>
+          </a:ln>
+        </p:spPr>
+        <p:txBody>
+          <a:bodyPr/>
+          <a:lstStyle/>
+          <a:p>
+            <a:endParaRPr/>
+          </a:p>
+        </p:txBody>
+      </p:sp>
+      <p:sp>
+        <p:nvSpPr>
+          <p:cNvPr id="27" name="Arr2Head"/>
+          <p:cNvSpPr/>
+          <p:nvPr/>
+        </p:nvSpPr>
+        <p:spPr>
+          <a:xfrm>
+            <a:off x="2540000" y="3251200"/>
+            <a:ext cx="152400" cy="101600"/>
+          </a:xfrm>
+          <a:prstGeom prst="downArrow">
+            <a:avLst>
+              <a:gd name="adj1" fmla="val 50000"/>
+              <a:gd name="adj2" fmla="val 50000"/>
+            </a:avLst>
+          </a:prstGeom>
+          <a:solidFill>
+            <a:srgbClr val="16223A"/>
+          </a:solidFill>
+          <a:ln>
+            <a:noFill/>
+          </a:ln>
+        </p:spPr>
+        <p:txBody>
+          <a:bodyPr/>
+          <a:lstStyle/>
+          <a:p>
+            <a:endParaRPr/>
+          </a:p>
+        </p:txBody>
+      </p:sp>
+      <p:sp>
+        <p:nvSpPr>
+          <p:cNvPr id="28" name="AlgoBlock"/>
+          <p:cNvSpPr>
+            <a:spLocks noGrp="1"/>
+          </p:cNvSpPr>
+          <p:nvPr/>
+        </p:nvSpPr>
+        <p:spPr>
+          <a:xfrm>
+            <a:off x="914400" y="3378200"/>
+            <a:ext cx="3429000" cy="457200"/>
+          </a:xfrm>
+          <a:prstGeom prst="roundRect">
+            <a:avLst>
+              <a:gd name="adj" fmla="val 20000"/>
+            </a:avLst>
+          </a:prstGeom>
+          <a:solidFill>
+            <a:srgbClr val="0A7A8E"/>
+          </a:solidFill>
+          <a:ln>
+            <a:noFill/>
+          </a:ln>
+        </p:spPr>
+        <p:txBody>
+          <a:bodyPr/>
+          <a:lstStyle/>
+          <a:p>
+            <a:pPr marL="0" indent="0" algn="ctr">
+              <a:buNone/>
+            </a:pPr>
+            <a:r>
+              <a:rPr lang="en-IN" sz="1300" b="1" dirty="0">
+                <a:solidFill>
+                  <a:srgbClr val="FFFFFF"/>
+                </a:solidFill>
+                <a:latin typeface="Calibri" pitchFamily="34" charset="0"/>
+              </a:rPr>
+              <a:t>Serpentine Locomotion Algorithm</a:t>
+            </a:r>
+          </a:p>
+        </p:txBody>
+      </p:sp>
+      <p:sp>
+        <p:nvSpPr>
+          <p:cNvPr id="30" name="SensorHeader"/>
+          <p:cNvSpPr>
+            <a:spLocks noGrp="1"/>
+          </p:cNvSpPr>
+          <p:nvPr/>
+        </p:nvSpPr>
+        <p:spPr>
+          <a:xfrm>
+            <a:off x="533400" y="4064000"/>
+            <a:ext cx="4191000" cy="228600"/>
+          </a:xfrm>
+          <a:prstGeom prst="rect">
+            <a:avLst/>
+          </a:prstGeom>
+          <a:noFill/>
+          <a:ln>
+            <a:noFill/>
+          </a:ln>
+        </p:spPr>
+        <p:txBody>
+          <a:bodyPr/>
+          <a:lstStyle/>
+          <a:p>
+            <a:pPr marL="0" indent="0" algn="l">
+              <a:buNone/>
+            </a:pPr>
+            <a:r>
+              <a:rPr lang="en-IN" sz="1100" b="1" dirty="0">
+                <a:solidFill>
+                  <a:srgbClr val="16223A"/>
+                </a:solidFill>
+                <a:latin typeface="Calibri" pitchFamily="34" charset="0"/>
+              </a:rPr>
+              <a:t>SENSOR MODULES</a:t>
+            </a:r>
+          </a:p>
+        </p:txBody>
+      </p:sp>
+      <p:sp>
+        <p:nvSpPr>
+          <p:cNvPr id="31" name="SensDivider"/>
+          <p:cNvSpPr>
+            <a:spLocks noGrp="1"/>
+          </p:cNvSpPr>
+          <p:nvPr/>
+        </p:nvSpPr>
+        <p:spPr>
+          <a:xfrm>
+            <a:off x="533400" y="4318000"/>
+            <a:ext cx="4191000" cy="12700"/>
+          </a:xfrm>
+          <a:prstGeom prst="rect">
+            <a:avLst/>
+          </a:prstGeom>
+          <a:solidFill>
+            <a:srgbClr val="0E96AC"/>
+          </a:solidFill>
+          <a:ln>
+            <a:noFill/>
+          </a:ln>
+        </p:spPr>
+        <p:txBody>
+          <a:bodyPr/>
+          <a:lstStyle/>
+          <a:p>
+            <a:endParaRPr/>
+          </a:p>
+        </p:txBody>
+      </p:sp>
+      <p:sp>
+        <p:nvSpPr>
+          <p:cNvPr id="32" name="IMUBox"/>
+          <p:cNvSpPr>
+            <a:spLocks noGrp="1"/>
+          </p:cNvSpPr>
+          <p:nvPr/>
+        </p:nvSpPr>
+        <p:spPr>
+          <a:xfrm>
+            <a:off x="533400" y="4394200"/>
+            <a:ext cx="1219200" cy="355600"/>
+          </a:xfrm>
+          <a:prstGeom prst="roundRect">
+            <a:avLst>
+              <a:gd name="adj" fmla="val 20000"/>
+            </a:avLst>
+          </a:prstGeom>
+          <a:solidFill>
+            <a:srgbClr val="E8F5F7"/>
+          </a:solidFill>
+          <a:ln w="9525">
+            <a:solidFill>
+              <a:srgbClr val="0E96AC"/>
+            </a:solidFill>
+          </a:ln>
+        </p:spPr>
+        <p:txBody>
+          <a:bodyPr/>
+          <a:lstStyle/>
+          <a:p>
+            <a:pPr marL="0" indent="0" algn="ctr">
+              <a:buNone/>
+            </a:pPr>
+            <a:r>
+              <a:rPr lang="en-IN" sz="1000" dirty="0">
+                <a:solidFill>
+                  <a:srgbClr val="0A7A8E"/>
+                </a:solidFill>
+                <a:latin typeface="Calibri" pitchFamily="34" charset="0"/>
+              </a:rPr>
+              <a:t>MPU6050 IMU</a:t>
+            </a:r>
+          </a:p>
+        </p:txBody>
+      </p:sp>
+      <p:sp>
+        <p:nvSpPr>
+          <p:cNvPr id="33" name="UltraBox"/>
+          <p:cNvSpPr>
+            <a:spLocks noGrp="1"/>
+          </p:cNvSpPr>
+          <p:nvPr/>
+        </p:nvSpPr>
+        <p:spPr>
+          <a:xfrm>
+            <a:off x="1841500" y="4394200"/>
+            <a:ext cx="1397000" cy="355600"/>
+          </a:xfrm>
+          <a:prstGeom prst="roundRect">
+            <a:avLst>
+              <a:gd name="adj" fmla="val 20000"/>
+            </a:avLst>
+          </a:prstGeom>
+          <a:solidFill>
+            <a:srgbClr val="E8F5F7"/>
+          </a:solidFill>
+          <a:ln w="9525">
+            <a:solidFill>
+              <a:srgbClr val="0E96AC"/>
+            </a:solidFill>
+          </a:ln>
+        </p:spPr>
+        <p:txBody>
+          <a:bodyPr/>
+          <a:lstStyle/>
+          <a:p>
+            <a:pPr marL="0" indent="0" algn="ctr">
+              <a:buNone/>
+            </a:pPr>
+            <a:r>
+              <a:rPr lang="en-IN" sz="1000" dirty="0">
+                <a:solidFill>
+                  <a:srgbClr val="0A7A8E"/>
+                </a:solidFill>
+                <a:latin typeface="Calibri" pitchFamily="34" charset="0"/>
+              </a:rPr>
+              <a:t>HC-SR04 Sonar</a:t>
+            </a:r>
+          </a:p>
+        </p:txBody>
+      </p:sp>
+      <p:sp>
+        <p:nvSpPr>
+          <p:cNvPr id="34" name="OLEDBox"/>
+          <p:cNvSpPr>
+            <a:spLocks noGrp="1"/>
+          </p:cNvSpPr>
+          <p:nvPr/>
+        </p:nvSpPr>
+        <p:spPr>
+          <a:xfrm>
+            <a:off x="3327400" y="4394200"/>
+            <a:ext cx="1397000" cy="355600"/>
+          </a:xfrm>
+          <a:prstGeom prst="roundRect">
+            <a:avLst>
+              <a:gd name="adj" fmla="val 20000"/>
+            </a:avLst>
+          </a:prstGeom>
+          <a:solidFill>
+            <a:srgbClr val="E8F5F7"/>
+          </a:solidFill>
+          <a:ln w="9525">
+            <a:solidFill>
+              <a:srgbClr val="0E96AC"/>
+            </a:solidFill>
+          </a:ln>
+        </p:spPr>
+        <p:txBody>
+          <a:bodyPr/>
+          <a:lstStyle/>
+          <a:p>
+            <a:pPr marL="0" indent="0" algn="ctr">
+              <a:buNone/>
+            </a:pPr>
+            <a:r>
+              <a:rPr lang="en-IN" sz="1000" dirty="0">
+                <a:solidFill>
+                  <a:srgbClr val="0A7A8E"/>
+                </a:solidFill>
+                <a:latin typeface="Calibri" pitchFamily="34" charset="0"/>
+              </a:rPr>
+              <a:t>SSD1306 OLED</a:t>
+            </a:r>
+          </a:p>
+        </p:txBody>
+      </p:sp>
+      <p:sp>
+        <p:nvSpPr>
+          <p:cNvPr id="35" name="NoteBox"/>
+          <p:cNvSpPr>
+            <a:spLocks noGrp="1"/>
+          </p:cNvSpPr>
+          <p:nvPr/>
+        </p:nvSpPr>
+        <p:spPr>
+          <a:xfrm>
+            <a:off x="533400" y="4889500"/>
+            <a:ext cx="4191000" cy="635000"/>
+          </a:xfrm>
+          <a:prstGeom prst="roundRect">
+            <a:avLst>
+              <a:gd name="adj" fmla="val 20000"/>
+            </a:avLst>
+          </a:prstGeom>
+          <a:solidFill>
+            <a:srgbClr val="FFF8E1"/>
+          </a:solidFill>
+          <a:ln w="9525">
+            <a:solidFill>
+              <a:srgbClr val="E6AC00"/>
+            </a:solidFill>
+          </a:ln>
+        </p:spPr>
+        <p:txBody>
+          <a:bodyPr/>
+          <a:lstStyle/>
+          <a:p>
+            <a:pPr marL="0" indent="0" algn="l">
+              <a:buNone/>
+            </a:pPr>
+            <a:r>
+              <a:rPr lang="en-IN" sz="1000" b="1" dirty="0">
+                <a:solidFill>
+                  <a:srgbClr val="B87900"/>
+                </a:solidFill>
+                <a:latin typeface="Calibri" pitchFamily="34" charset="0"/>
+              </a:rPr>
+              <a:t>NOTE</a:t>
+            </a:r>
+          </a:p>
+          <a:p>
+            <a:pPr marL="0" indent="0">
+              <a:buNone/>
+            </a:pPr>
+            <a:r>
+              <a:rPr lang="en-IN" sz="1000" dirty="0">
+                <a:solidFill>
+                  <a:srgbClr val="555E6F"/>
+                </a:solidFill>
+                <a:latin typeface="Calibri" pitchFamily="34" charset="0"/>
+              </a:rPr>
+              <a:t>Simulation platform created to validate software</a:t>
+            </a:r>
+          </a:p>
+          <a:p>
+            <a:pPr marL="0" indent="0">
+              <a:buNone/>
+            </a:pPr>
+            <a:r>
+              <a:rPr lang="en-IN" sz="1000" dirty="0">
+                <a:solidFill>
+                  <a:srgbClr val="555E6F"/>
+                </a:solidFill>
+                <a:latin typeface="Calibri" pitchFamily="34" charset="0"/>
+              </a:rPr>
+              <a:t>architecture before Dynamixel hardware arrival.</a:t>
+            </a:r>
+          </a:p>
+        </p:txBody>
+      </p:sp>
+      <p:sp>
+        <p:nvSpPr>
+          <p:cNvPr id="40" name="ColSep"/>
+          <p:cNvSpPr>
+            <a:spLocks noGrp="1"/>
+          </p:cNvSpPr>
+          <p:nvPr/>
+        </p:nvSpPr>
+        <p:spPr>
+          <a:xfrm>
+            <a:off x="4902200" y="1143000"/>
+            <a:ext cx="12700" cy="4572000"/>
+          </a:xfrm>
+          <a:prstGeom prst="rect">
+            <a:avLst/>
+          </a:prstGeom>
+          <a:solidFill>
+            <a:srgbClr val="D0D7E5"/>
+          </a:solidFill>
+          <a:ln>
+            <a:noFill/>
+          </a:ln>
+        </p:spPr>
+        <p:txBody>
+          <a:bodyPr/>
+          <a:lstStyle/>
+          <a:p>
+            <a:endParaRPr/>
+          </a:p>
+        </p:txBody>
+      </p:sp>
+      <p:sp>
+        <p:nvSpPr>
+          <p:cNvPr id="50" name="RightHeader"/>
+          <p:cNvSpPr>
+            <a:spLocks noGrp="1"/>
+          </p:cNvSpPr>
+          <p:nvPr/>
+        </p:nvSpPr>
+        <p:spPr>
+          <a:xfrm>
+            <a:off x="5029200" y="1143000"/>
+            <a:ext cx="6985000" cy="279400"/>
+          </a:xfrm>
+          <a:prstGeom prst="rect">
+            <a:avLst/>
+          </a:prstGeom>
+          <a:solidFill>
+            <a:srgbClr val="16223A"/>
+          </a:solidFill>
+          <a:ln>
+            <a:noFill/>
+          </a:ln>
+        </p:spPr>
+        <p:txBody>
+          <a:bodyPr/>
+          <a:lstStyle/>
+          <a:p>
+            <a:pPr marL="0" indent="0" algn="l">
+              <a:buNone/>
+            </a:pPr>
+            <a:r>
+              <a:rPr lang="en-IN" sz="1200" b="1" dirty="0">
+                <a:solidFill>
+                  <a:srgbClr val="FFFFFF"/>
+                </a:solidFill>
+                <a:latin typeface="Calibri" pitchFamily="34" charset="0"/>
+              </a:rPr>
+              <a:t>WORK COMPLETED</a:t>
+            </a:r>
+          </a:p>
+        </p:txBody>
+      </p:sp>
+      <p:sp>
+        <p:nvSpPr>
+          <p:cNvPr id="60" name="AchCard0"/>
+          <p:cNvSpPr>
+            <a:spLocks noGrp="1"/>
+          </p:cNvSpPr>
+          <p:nvPr/>
+        </p:nvSpPr>
+        <p:spPr>
+          <a:xfrm>
+            <a:off x="5029200" y="1549400"/>
+            <a:ext cx="6959600" cy="482600"/>
+          </a:xfrm>
+          <a:prstGeom prst="roundRect">
+            <a:avLst>
+              <a:gd name="adj" fmla="val 20000"/>
+            </a:avLst>
+          </a:prstGeom>
+          <a:solidFill>
+            <a:srgbClr val="FFFFFF"/>
+          </a:solidFill>
+          <a:ln w="9525">
+            <a:solidFill>
+              <a:srgbClr val="D0D7E5"/>
+            </a:solidFill>
+          </a:ln>
+        </p:spPr>
+        <p:txBody>
+          <a:bodyPr/>
+          <a:lstStyle/>
+          <a:p>
+            <a:endParaRPr/>
+          </a:p>
+        </p:txBody>
+      </p:sp>
+      <p:sp>
+        <p:nvSpPr>
+          <p:cNvPr id="61" name="AchCheck0"/>
+          <p:cNvSpPr/>
+          <p:nvPr/>
+        </p:nvSpPr>
+        <p:spPr>
+          <a:xfrm>
+            <a:off x="5130800" y="1663700"/>
+            <a:ext cx="254000" cy="254000"/>
+          </a:xfrm>
+          <a:prstGeom prst="ellipse">
+            <a:avLst/>
+          </a:prstGeom>
+          <a:solidFill>
+            <a:srgbClr val="0E96AC"/>
+          </a:solidFill>
+          <a:ln>
+            <a:noFill/>
+          </a:ln>
+        </p:spPr>
+        <p:txBody>
+          <a:bodyPr anchor="ctr" anchorCtr="1">
+            <a:normAutofit fontScale="70000" lnSpcReduction="20000"/>
+          </a:bodyPr>
+          <a:lstStyle/>
+          <a:p>
+            <a:pPr algn="ctr">
+              <a:buNone/>
+            </a:pPr>
+            <a:r>
+              <a:rPr lang="en-IN" sz="1000" b="1" dirty="0">
+                <a:solidFill>
+                  <a:srgbClr val="FFFFFF"/>
+                </a:solidFill>
+                <a:latin typeface="Calibri" pitchFamily="34" charset="0"/>
+              </a:rPr>
+              <a:t>✓</a:t>
+            </a:r>
+          </a:p>
+        </p:txBody>
+      </p:sp>
+      <p:sp>
+        <p:nvSpPr>
+          <p:cNvPr id="62" name="AchText0"/>
+          <p:cNvSpPr>
+            <a:spLocks noGrp="1"/>
+          </p:cNvSpPr>
+          <p:nvPr/>
+        </p:nvSpPr>
+        <p:spPr>
+          <a:xfrm>
+            <a:off x="5486400" y="1612900"/>
+            <a:ext cx="6426200" cy="355600"/>
+          </a:xfrm>
+          <a:prstGeom prst="rect">
+            <a:avLst/>
+          </a:prstGeom>
+          <a:noFill/>
+          <a:ln>
+            <a:noFill/>
+          </a:ln>
+        </p:spPr>
+        <p:txBody>
+          <a:bodyPr/>
+          <a:lstStyle/>
+          <a:p>
+            <a:pPr marL="0" indent="0" algn="l">
+              <a:buNone/>
+            </a:pPr>
+            <a:r>
+              <a:rPr lang="en-IN" sz="1200" dirty="0">
+                <a:solidFill>
+                  <a:srgbClr val="16223A"/>
+                </a:solidFill>
+                <a:latin typeface="Calibri" pitchFamily="34" charset="0"/>
+              </a:rPr>
+              <a:t>Multi-joint locomotion simulation implemented</a:t>
+            </a:r>
+          </a:p>
+        </p:txBody>
+      </p:sp>
+      <p:sp>
+        <p:nvSpPr>
+          <p:cNvPr id="63" name="AchCard1"/>
+          <p:cNvSpPr>
+            <a:spLocks noGrp="1"/>
+          </p:cNvSpPr>
+          <p:nvPr/>
+        </p:nvSpPr>
+        <p:spPr>
+          <a:xfrm>
+            <a:off x="5029200" y="2108200"/>
+            <a:ext cx="6959600" cy="482600"/>
+          </a:xfrm>
+          <a:prstGeom prst="roundRect">
+            <a:avLst>
+              <a:gd name="adj" fmla="val 20000"/>
+            </a:avLst>
+          </a:prstGeom>
+          <a:solidFill>
+            <a:srgbClr val="FFFFFF"/>
+          </a:solidFill>
+          <a:ln w="9525">
+            <a:solidFill>
+              <a:srgbClr val="D0D7E5"/>
+            </a:solidFill>
+          </a:ln>
+        </p:spPr>
+        <p:txBody>
+          <a:bodyPr/>
+          <a:lstStyle/>
+          <a:p>
+            <a:endParaRPr/>
+          </a:p>
+        </p:txBody>
+      </p:sp>
+      <p:sp>
+        <p:nvSpPr>
+          <p:cNvPr id="64" name="AchCheck1"/>
+          <p:cNvSpPr/>
+          <p:nvPr/>
+        </p:nvSpPr>
+        <p:spPr>
+          <a:xfrm>
+            <a:off x="5130800" y="2222500"/>
+            <a:ext cx="254000" cy="254000"/>
+          </a:xfrm>
+          <a:prstGeom prst="ellipse">
+            <a:avLst/>
+          </a:prstGeom>
+          <a:solidFill>
+            <a:srgbClr val="0E96AC"/>
+          </a:solidFill>
+          <a:ln>
+            <a:noFill/>
+          </a:ln>
+        </p:spPr>
+        <p:txBody>
+          <a:bodyPr anchor="ctr" anchorCtr="1">
+            <a:normAutofit fontScale="70000" lnSpcReduction="20000"/>
+          </a:bodyPr>
+          <a:lstStyle/>
+          <a:p>
+            <a:pPr algn="ctr">
+              <a:buNone/>
+            </a:pPr>
+            <a:r>
+              <a:rPr lang="en-IN" sz="1000" b="1" dirty="0">
+                <a:solidFill>
+                  <a:srgbClr val="FFFFFF"/>
+                </a:solidFill>
+                <a:latin typeface="Calibri" pitchFamily="34" charset="0"/>
+              </a:rPr>
+              <a:t>✓</a:t>
+            </a:r>
+          </a:p>
+        </p:txBody>
+      </p:sp>
+      <p:sp>
+        <p:nvSpPr>
+          <p:cNvPr id="65" name="AchText1"/>
+          <p:cNvSpPr>
+            <a:spLocks noGrp="1"/>
+          </p:cNvSpPr>
+          <p:nvPr/>
+        </p:nvSpPr>
+        <p:spPr>
+          <a:xfrm>
+            <a:off x="5486400" y="2171700"/>
+            <a:ext cx="6426200" cy="355600"/>
+          </a:xfrm>
+          <a:prstGeom prst="rect">
+            <a:avLst/>
+          </a:prstGeom>
+          <a:noFill/>
+          <a:ln>
+            <a:noFill/>
+          </a:ln>
+        </p:spPr>
+        <p:txBody>
+          <a:bodyPr/>
+          <a:lstStyle/>
+          <a:p>
+            <a:pPr marL="0" indent="0" algn="l">
+              <a:buNone/>
+            </a:pPr>
+            <a:r>
+              <a:rPr lang="en-IN" sz="1200" dirty="0">
+                <a:solidFill>
+                  <a:srgbClr val="16223A"/>
+                </a:solidFill>
+                <a:latin typeface="Calibri" pitchFamily="34" charset="0"/>
+              </a:rPr>
+              <a:t>Travelling-wave serpentine gait generation developed</a:t>
+            </a:r>
+          </a:p>
+        </p:txBody>
+      </p:sp>
+      <p:sp>
+        <p:nvSpPr>
+          <p:cNvPr id="66" name="AchCard2"/>
+          <p:cNvSpPr>
+            <a:spLocks noGrp="1"/>
+          </p:cNvSpPr>
+          <p:nvPr/>
+        </p:nvSpPr>
+        <p:spPr>
+          <a:xfrm>
+            <a:off x="5029200" y="2667000"/>
+            <a:ext cx="6959600" cy="482600"/>
+          </a:xfrm>
+          <a:prstGeom prst="roundRect">
+            <a:avLst>
+              <a:gd name="adj" fmla="val 20000"/>
+            </a:avLst>
+          </a:prstGeom>
+          <a:solidFill>
+            <a:srgbClr val="FFFFFF"/>
+          </a:solidFill>
+          <a:ln w="9525">
+            <a:solidFill>
+              <a:srgbClr val="D0D7E5"/>
+            </a:solidFill>
+          </a:ln>
+        </p:spPr>
+        <p:txBody>
+          <a:bodyPr/>
+          <a:lstStyle/>
+          <a:p>
+            <a:endParaRPr/>
+          </a:p>
+        </p:txBody>
+      </p:sp>
+      <p:sp>
+        <p:nvSpPr>
+          <p:cNvPr id="67" name="AchCheck2"/>
+          <p:cNvSpPr/>
+          <p:nvPr/>
+        </p:nvSpPr>
+        <p:spPr>
+          <a:xfrm>
+            <a:off x="5130800" y="2781300"/>
+            <a:ext cx="254000" cy="254000"/>
+          </a:xfrm>
+          <a:prstGeom prst="ellipse">
+            <a:avLst/>
+          </a:prstGeom>
+          <a:solidFill>
+            <a:srgbClr val="0E96AC"/>
+          </a:solidFill>
+          <a:ln>
+            <a:noFill/>
+          </a:ln>
+        </p:spPr>
+        <p:txBody>
+          <a:bodyPr anchor="ctr" anchorCtr="1">
+            <a:normAutofit fontScale="70000" lnSpcReduction="20000"/>
+          </a:bodyPr>
+          <a:lstStyle/>
+          <a:p>
+            <a:pPr algn="ctr">
+              <a:buNone/>
+            </a:pPr>
+            <a:r>
+              <a:rPr lang="en-IN" sz="1000" b="1" dirty="0">
+                <a:solidFill>
+                  <a:srgbClr val="FFFFFF"/>
+                </a:solidFill>
+                <a:latin typeface="Calibri" pitchFamily="34" charset="0"/>
+              </a:rPr>
+              <a:t>✓</a:t>
+            </a:r>
+          </a:p>
+        </p:txBody>
+      </p:sp>
+      <p:sp>
+        <p:nvSpPr>
+          <p:cNvPr id="68" name="AchText2"/>
+          <p:cNvSpPr>
+            <a:spLocks noGrp="1"/>
+          </p:cNvSpPr>
+          <p:nvPr/>
+        </p:nvSpPr>
+        <p:spPr>
+          <a:xfrm>
+            <a:off x="5486400" y="2730500"/>
+            <a:ext cx="6426200" cy="355600"/>
+          </a:xfrm>
+          <a:prstGeom prst="rect">
+            <a:avLst/>
+          </a:prstGeom>
+          <a:noFill/>
+          <a:ln>
+            <a:noFill/>
+          </a:ln>
+        </p:spPr>
+        <p:txBody>
+          <a:bodyPr/>
+          <a:lstStyle/>
+          <a:p>
+            <a:pPr marL="0" indent="0" algn="l">
+              <a:buNone/>
+            </a:pPr>
+            <a:r>
+              <a:rPr lang="en-IN" sz="1200" dirty="0">
+                <a:solidFill>
+                  <a:srgbClr val="16223A"/>
+                </a:solidFill>
+                <a:latin typeface="Calibri" pitchFamily="34" charset="0"/>
+              </a:rPr>
+              <a:t>Obstacle detection framework integrated (ultrasonic)</a:t>
+            </a:r>
+          </a:p>
+        </p:txBody>
+      </p:sp>
+      <p:sp>
+        <p:nvSpPr>
+          <p:cNvPr id="69" name="AchCard3"/>
+          <p:cNvSpPr>
+            <a:spLocks noGrp="1"/>
+          </p:cNvSpPr>
+          <p:nvPr/>
+        </p:nvSpPr>
+        <p:spPr>
+          <a:xfrm>
+            <a:off x="5029200" y="3225800"/>
+            <a:ext cx="6959600" cy="482600"/>
+          </a:xfrm>
+          <a:prstGeom prst="roundRect">
+            <a:avLst>
+              <a:gd name="adj" fmla="val 20000"/>
+            </a:avLst>
+          </a:prstGeom>
+          <a:solidFill>
+            <a:srgbClr val="FFFFFF"/>
+          </a:solidFill>
+          <a:ln w="9525">
+            <a:solidFill>
+              <a:srgbClr val="D0D7E5"/>
+            </a:solidFill>
+          </a:ln>
+        </p:spPr>
+        <p:txBody>
+          <a:bodyPr/>
+          <a:lstStyle/>
+          <a:p>
+            <a:endParaRPr/>
+          </a:p>
+        </p:txBody>
+      </p:sp>
+      <p:sp>
+        <p:nvSpPr>
+          <p:cNvPr id="70" name="AchCheck3"/>
+          <p:cNvSpPr/>
+          <p:nvPr/>
+        </p:nvSpPr>
+        <p:spPr>
+          <a:xfrm>
+            <a:off x="5130800" y="3340100"/>
+            <a:ext cx="254000" cy="254000"/>
+          </a:xfrm>
+          <a:prstGeom prst="ellipse">
+            <a:avLst/>
+          </a:prstGeom>
+          <a:solidFill>
+            <a:srgbClr val="0E96AC"/>
+          </a:solidFill>
+          <a:ln>
+            <a:noFill/>
+          </a:ln>
+        </p:spPr>
+        <p:txBody>
+          <a:bodyPr anchor="ctr" anchorCtr="1">
+            <a:normAutofit fontScale="70000" lnSpcReduction="20000"/>
+          </a:bodyPr>
+          <a:lstStyle/>
+          <a:p>
+            <a:pPr algn="ctr">
+              <a:buNone/>
+            </a:pPr>
+            <a:r>
+              <a:rPr lang="en-IN" sz="1000" b="1" dirty="0">
+                <a:solidFill>
+                  <a:srgbClr val="FFFFFF"/>
+                </a:solidFill>
+                <a:latin typeface="Calibri" pitchFamily="34" charset="0"/>
+              </a:rPr>
+              <a:t>✓</a:t>
+            </a:r>
+          </a:p>
+        </p:txBody>
+      </p:sp>
+      <p:sp>
+        <p:nvSpPr>
+          <p:cNvPr id="71" name="AchText3"/>
+          <p:cNvSpPr>
+            <a:spLocks noGrp="1"/>
+          </p:cNvSpPr>
+          <p:nvPr/>
+        </p:nvSpPr>
+        <p:spPr>
+          <a:xfrm>
+            <a:off x="5486400" y="3289300"/>
+            <a:ext cx="6426200" cy="355600"/>
+          </a:xfrm>
+          <a:prstGeom prst="rect">
+            <a:avLst/>
+          </a:prstGeom>
+          <a:noFill/>
+          <a:ln>
+            <a:noFill/>
+          </a:ln>
+        </p:spPr>
+        <p:txBody>
+          <a:bodyPr/>
+          <a:lstStyle/>
+          <a:p>
+            <a:pPr marL="0" indent="0" algn="l">
+              <a:buNone/>
+            </a:pPr>
+            <a:r>
+              <a:rPr lang="en-IN" sz="1200" dirty="0">
+                <a:solidFill>
+                  <a:srgbClr val="16223A"/>
+                </a:solidFill>
+                <a:latin typeface="Calibri" pitchFamily="34" charset="0"/>
+              </a:rPr>
+              <a:t>IMU integration prepared for orientation feedback</a:t>
+            </a:r>
+          </a:p>
+        </p:txBody>
+      </p:sp>
+      <p:sp>
+        <p:nvSpPr>
+          <p:cNvPr id="72" name="AchCard4"/>
+          <p:cNvSpPr>
+            <a:spLocks noGrp="1"/>
+          </p:cNvSpPr>
+          <p:nvPr/>
+        </p:nvSpPr>
+        <p:spPr>
+          <a:xfrm>
+            <a:off x="5029200" y="3784600"/>
+            <a:ext cx="6959600" cy="482600"/>
+          </a:xfrm>
+          <a:prstGeom prst="roundRect">
+            <a:avLst>
+              <a:gd name="adj" fmla="val 20000"/>
+            </a:avLst>
+          </a:prstGeom>
+          <a:solidFill>
+            <a:srgbClr val="FFFFFF"/>
+          </a:solidFill>
+          <a:ln w="9525">
+            <a:solidFill>
+              <a:srgbClr val="D0D7E5"/>
+            </a:solidFill>
+          </a:ln>
+        </p:spPr>
+        <p:txBody>
+          <a:bodyPr/>
+          <a:lstStyle/>
+          <a:p>
+            <a:endParaRPr/>
+          </a:p>
+        </p:txBody>
+      </p:sp>
+      <p:sp>
+        <p:nvSpPr>
+          <p:cNvPr id="73" name="AchCheck4"/>
+          <p:cNvSpPr/>
+          <p:nvPr/>
+        </p:nvSpPr>
+        <p:spPr>
+          <a:xfrm>
+            <a:off x="5130800" y="3898900"/>
+            <a:ext cx="254000" cy="254000"/>
+          </a:xfrm>
+          <a:prstGeom prst="ellipse">
+            <a:avLst/>
+          </a:prstGeom>
+          <a:solidFill>
+            <a:srgbClr val="0E96AC"/>
+          </a:solidFill>
+          <a:ln>
+            <a:noFill/>
+          </a:ln>
+        </p:spPr>
+        <p:txBody>
+          <a:bodyPr anchor="ctr" anchorCtr="1">
+            <a:normAutofit fontScale="70000" lnSpcReduction="20000"/>
+          </a:bodyPr>
+          <a:lstStyle/>
+          <a:p>
+            <a:pPr algn="ctr">
+              <a:buNone/>
+            </a:pPr>
+            <a:r>
+              <a:rPr lang="en-IN" sz="1000" b="1" dirty="0">
+                <a:solidFill>
+                  <a:srgbClr val="FFFFFF"/>
+                </a:solidFill>
+                <a:latin typeface="Calibri" pitchFamily="34" charset="0"/>
+              </a:rPr>
+              <a:t>✓</a:t>
+            </a:r>
+          </a:p>
+        </p:txBody>
+      </p:sp>
+      <p:sp>
+        <p:nvSpPr>
+          <p:cNvPr id="74" name="AchText4"/>
+          <p:cNvSpPr>
+            <a:spLocks noGrp="1"/>
+          </p:cNvSpPr>
+          <p:nvPr/>
+        </p:nvSpPr>
+        <p:spPr>
+          <a:xfrm>
+            <a:off x="5486400" y="3848100"/>
+            <a:ext cx="6426200" cy="355600"/>
+          </a:xfrm>
+          <a:prstGeom prst="rect">
+            <a:avLst/>
+          </a:prstGeom>
+          <a:noFill/>
+          <a:ln>
+            <a:noFill/>
+          </a:ln>
+        </p:spPr>
+        <p:txBody>
+          <a:bodyPr/>
+          <a:lstStyle/>
+          <a:p>
+            <a:pPr marL="0" indent="0" algn="l">
+              <a:buNone/>
+            </a:pPr>
+            <a:r>
+              <a:rPr lang="en-IN" sz="1200" dirty="0">
+                <a:solidFill>
+                  <a:srgbClr val="16223A"/>
+                </a:solidFill>
+                <a:latin typeface="Calibri" pitchFamily="34" charset="0"/>
+              </a:rPr>
+              <a:t>OLED status display integrated</a:t>
+            </a:r>
+          </a:p>
+        </p:txBody>
+      </p:sp>
+      <p:sp>
+        <p:nvSpPr>
+          <p:cNvPr id="75" name="AchCard5"/>
+          <p:cNvSpPr>
+            <a:spLocks noGrp="1"/>
+          </p:cNvSpPr>
+          <p:nvPr/>
+        </p:nvSpPr>
+        <p:spPr>
+          <a:xfrm>
+            <a:off x="5029200" y="4343400"/>
+            <a:ext cx="6959600" cy="482600"/>
+          </a:xfrm>
+          <a:prstGeom prst="roundRect">
+            <a:avLst>
+              <a:gd name="adj" fmla="val 20000"/>
+            </a:avLst>
+          </a:prstGeom>
+          <a:solidFill>
+            <a:srgbClr val="FFFFFF"/>
+          </a:solidFill>
+          <a:ln w="9525">
+            <a:solidFill>
+              <a:srgbClr val="D0D7E5"/>
+            </a:solidFill>
+          </a:ln>
+        </p:spPr>
+        <p:txBody>
+          <a:bodyPr/>
+          <a:lstStyle/>
+          <a:p>
+            <a:endParaRPr/>
+          </a:p>
+        </p:txBody>
+      </p:sp>
+      <p:sp>
+        <p:nvSpPr>
+          <p:cNvPr id="76" name="AchCheck5"/>
+          <p:cNvSpPr/>
+          <p:nvPr/>
+        </p:nvSpPr>
+        <p:spPr>
+          <a:xfrm>
+            <a:off x="5130800" y="4457700"/>
+            <a:ext cx="254000" cy="254000"/>
+          </a:xfrm>
+          <a:prstGeom prst="ellipse">
+            <a:avLst/>
+          </a:prstGeom>
+          <a:solidFill>
+            <a:srgbClr val="0E96AC"/>
+          </a:solidFill>
+          <a:ln>
+            <a:noFill/>
+          </a:ln>
+        </p:spPr>
+        <p:txBody>
+          <a:bodyPr anchor="ctr" anchorCtr="1">
+            <a:normAutofit fontScale="70000" lnSpcReduction="20000"/>
+          </a:bodyPr>
+          <a:lstStyle/>
+          <a:p>
+            <a:pPr algn="ctr">
+              <a:buNone/>
+            </a:pPr>
+            <a:r>
+              <a:rPr lang="en-IN" sz="1000" b="1" dirty="0">
+                <a:solidFill>
+                  <a:srgbClr val="FFFFFF"/>
+                </a:solidFill>
+                <a:latin typeface="Calibri" pitchFamily="34" charset="0"/>
+              </a:rPr>
+              <a:t>✓</a:t>
+            </a:r>
+          </a:p>
+        </p:txBody>
+      </p:sp>
+      <p:sp>
+        <p:nvSpPr>
+          <p:cNvPr id="77" name="AchText5"/>
+          <p:cNvSpPr>
+            <a:spLocks noGrp="1"/>
+          </p:cNvSpPr>
+          <p:nvPr/>
+        </p:nvSpPr>
+        <p:spPr>
+          <a:xfrm>
+            <a:off x="5486400" y="4406900"/>
+            <a:ext cx="6426200" cy="355600"/>
+          </a:xfrm>
+          <a:prstGeom prst="rect">
+            <a:avLst/>
+          </a:prstGeom>
+          <a:noFill/>
+          <a:ln>
+            <a:noFill/>
+          </a:ln>
+        </p:spPr>
+        <p:txBody>
+          <a:bodyPr/>
+          <a:lstStyle/>
+          <a:p>
+            <a:pPr marL="0" indent="0" algn="l">
+              <a:buNone/>
+            </a:pPr>
+            <a:r>
+              <a:rPr lang="en-IN" sz="1200" dirty="0">
+                <a:solidFill>
+                  <a:srgbClr val="16223A"/>
+                </a:solidFill>
+                <a:latin typeface="Calibri" pitchFamily="34" charset="0"/>
+              </a:rPr>
+              <a:t>Modular architecture designed for migration to RPi 5 + Dynamixel XL330</a:t>
+            </a:r>
+          </a:p>
+        </p:txBody>
+      </p:sp>
+      <p:sp>
+        <p:nvSpPr>
+          <p:cNvPr id="100" name="BottomDiv"/>
+          <p:cNvSpPr>
+            <a:spLocks noGrp="1"/>
+          </p:cNvSpPr>
+          <p:nvPr/>
+        </p:nvSpPr>
+        <p:spPr>
+          <a:xfrm>
+            <a:off x="533400" y="5740400"/>
+            <a:ext cx="11125200" cy="12700"/>
+          </a:xfrm>
+          <a:prstGeom prst="rect">
+            <a:avLst/>
+          </a:prstGeom>
+          <a:solidFill>
+            <a:srgbClr val="0E96AC"/>
+          </a:solidFill>
+          <a:ln>
+            <a:noFill/>
+          </a:ln>
+        </p:spPr>
+        <p:txBody>
+          <a:bodyPr/>
+          <a:lstStyle/>
+          <a:p>
+            <a:endParaRPr/>
+          </a:p>
+        </p:txBody>
+      </p:sp>
+      <p:sp>
+        <p:nvSpPr>
+          <p:cNvPr id="101" name="OutcomeBox"/>
+          <p:cNvSpPr>
+            <a:spLocks noGrp="1"/>
+          </p:cNvSpPr>
+          <p:nvPr/>
+        </p:nvSpPr>
+        <p:spPr>
+          <a:xfrm>
+            <a:off x="533400" y="5816600"/>
+            <a:ext cx="11125200" cy="635000"/>
+          </a:xfrm>
+          <a:prstGeom prst="roundRect">
+            <a:avLst>
+              <a:gd name="adj" fmla="val 20000"/>
+            </a:avLst>
+          </a:prstGeom>
+          <a:solidFill>
+            <a:srgbClr val="EAF7FA"/>
+          </a:solidFill>
+          <a:ln w="19050">
+            <a:solidFill>
+              <a:srgbClr val="0E96AC"/>
+            </a:solidFill>
+          </a:ln>
+        </p:spPr>
+        <p:txBody>
+          <a:bodyPr/>
+          <a:lstStyle/>
+          <a:p>
+            <a:pPr marL="0" indent="0">
+              <a:buNone/>
+            </a:pPr>
+            <a:r>
+              <a:rPr lang="en-IN" sz="1000" b="1" dirty="0">
+                <a:solidFill>
+                  <a:srgbClr val="0A7A8E"/>
+                </a:solidFill>
+                <a:latin typeface="Calibri" pitchFamily="34" charset="0"/>
+              </a:rPr>
+              <a:t>KEY OUTCOME  </a:t>
+            </a:r>
+            <a:r>
+              <a:rPr lang="en-IN" sz="1000" dirty="0">
+                <a:solidFill>
+                  <a:srgbClr val="16223A"/>
+                </a:solidFill>
+                <a:latin typeface="Calibri" pitchFamily="34" charset="0"/>
+              </a:rPr>
+              <a:t>A complete software-validation environment established to test locomotion, sensing, and control workflows before physical hardware arrival, reducing future integration risk.</a:t>
+            </a:r>
+          </a:p>
+          <a:p>
+            <a:pPr marL="0" indent="0">
+              <a:buNone/>
+            </a:pPr>
+            <a:r>
+              <a:rPr lang="en-IN" sz="950" i="1" dirty="0">
+                <a:solidFill>
+                  <a:srgbClr val="6B7280"/>
+                </a:solidFill>
+                <a:latin typeface="Calibri" pitchFamily="34" charset="0"/>
+              </a:rPr>
+              <a:t>Simulation-based development enables parallel software progress while Dynamixel actuators and communication hardware remain under procurement.</a:t>
+            </a:r>
+          </a:p>
+        </p:txBody>
+      </p:sp>
+    </p:spTree>
+    <p:extLst>
+      <p:ext uri="{BB962C8B-B14F-4D97-AF65-F5344CB8AC3E}">
+        <p14:creationId xmlns:p14="http://schemas.microsoft.com/office/powerpoint/2010/main" val="1705374684"/>
+      </p:ext>
+    </p:extLst>
+  </p:cSld>
+  <p:clrMapOvr>
+    <a:masterClrMapping/>
+  </p:clrMapOvr>
+</p:sld>
+</file>
+
+<file path=ppt/slides/slide15.xml><?xml version="1.0" encoding="utf-8"?>
+<p:sld xmlns:a="http://schemas.openxmlformats.org/drawingml/2006/main" xmlns:r="http://schemas.openxmlformats.org/officeDocument/2006/relationships" xmlns:p="http://schemas.openxmlformats.org/presentationml/2006/main">
+  <p:cSld>
+    <p:spTree>
+      <p:nvGrpSpPr>
+        <p:cNvPr id="1" name=""/>
+        <p:cNvGrpSpPr/>
+        <p:nvPr/>
+      </p:nvGrpSpPr>
+      <p:grpSpPr>
+        <a:xfrm>
+          <a:off x="0" y="0"/>
+          <a:ext cx="0" cy="0"/>
+          <a:chOff x="0" y="0"/>
+          <a:chExt cx="0" cy="0"/>
+        </a:xfrm>
+      </p:grpSpPr>
+    </p:spTree>
+    <p:extLst>
+      <p:ext uri="{BB962C8B-B14F-4D97-AF65-F5344CB8AC3E}">
+        <p14:creationId xmlns:p14="http://schemas.microsoft.com/office/powerpoint/2010/main" val="3975997946"/>
+      </p:ext>
+    </p:extLst>
   </p:cSld>
   <p:clrMapOvr>
     <a:masterClrMapping/>
@@ -15120,7 +16830,7 @@
                 <a:ea typeface="Calibri" pitchFamily="34" charset="-122"/>
                 <a:cs typeface="Calibri" pitchFamily="34" charset="-120"/>
               </a:rPr>
-              <a:t>OVERALL COMPLETION</a:t>
+              <a:t>OVERALL COMPLETION(till now)</a:t>
             </a:r>
             <a:endParaRPr lang="en-US" sz="1150" dirty="0"/>
           </a:p>

--- a/docs/presentations/Smart_Snake_Robot_SURGE090_Progress_Review  -  Repaired.pptx
+++ b/docs/presentations/Smart_Snake_Robot_SURGE090_Progress_Review  -  Repaired.pptx
@@ -21,8 +21,8 @@
     <p:sldId id="285" r:id="rId12"/>
     <p:sldId id="268" r:id="rId13"/>
     <p:sldId id="269" r:id="rId14"/>
-    <p:sldId id="308" r:id="rId15"/>
-    <p:sldId id="306" r:id="rId16"/>
+    <p:sldId id="314" r:id="rId15"/>
+    <p:sldId id="323" r:id="rId16"/>
   </p:sldIdLst>
   <p:sldSz cx="12192000" cy="6858000"/>
   <p:notesSz cx="6858000" cy="12192000"/>
@@ -10247,1500 +10247,1183 @@
           </a:p>
         </p:txBody>
       </p:sp>
-      <p:sp>
-        <p:nvSpPr>
-          <p:cNvPr id="20" name="LeftHeader"/>
-          <p:cNvSpPr>
-            <a:spLocks noGrp="1"/>
-          </p:cNvSpPr>
-          <p:nvPr/>
-        </p:nvSpPr>
-        <p:spPr>
-          <a:xfrm>
-            <a:off x="533400" y="1143000"/>
-            <a:ext cx="4191000" cy="279400"/>
-          </a:xfrm>
-          <a:prstGeom prst="rect">
-            <a:avLst/>
-          </a:prstGeom>
-          <a:solidFill>
-            <a:srgbClr val="16223A"/>
-          </a:solidFill>
-          <a:ln>
-            <a:noFill/>
-          </a:ln>
-        </p:spPr>
-        <p:txBody>
-          <a:bodyPr/>
-          <a:lstStyle/>
-          <a:p>
-            <a:pPr marL="0" indent="0" algn="l">
-              <a:buNone/>
-            </a:pPr>
-            <a:r>
-              <a:rPr lang="en-IN" sz="1200" b="1" dirty="0">
-                <a:solidFill>
-                  <a:srgbClr val="FFFFFF"/>
-                </a:solidFill>
-                <a:latin typeface="Calibri" pitchFamily="34" charset="0"/>
-              </a:rPr>
-              <a:t>SYSTEM OVERVIEW</a:t>
-            </a:r>
-          </a:p>
-        </p:txBody>
-      </p:sp>
-      <p:sp>
-        <p:nvSpPr>
-          <p:cNvPr id="21" name="ESP32Block"/>
-          <p:cNvSpPr>
-            <a:spLocks noGrp="1"/>
-          </p:cNvSpPr>
-          <p:nvPr/>
-        </p:nvSpPr>
-        <p:spPr>
-          <a:xfrm>
-            <a:off x="1168400" y="1574800"/>
-            <a:ext cx="2921000" cy="457200"/>
-          </a:xfrm>
-          <a:prstGeom prst="roundRect">
-            <a:avLst>
-              <a:gd name="adj" fmla="val 20000"/>
-            </a:avLst>
-          </a:prstGeom>
-          <a:solidFill>
-            <a:srgbClr val="0E96AC"/>
-          </a:solidFill>
-          <a:ln>
-            <a:noFill/>
-          </a:ln>
-        </p:spPr>
-        <p:txBody>
-          <a:bodyPr/>
-          <a:lstStyle/>
-          <a:p>
-            <a:pPr marL="0" indent="0" algn="ctr">
-              <a:buNone/>
-            </a:pPr>
-            <a:r>
-              <a:rPr lang="en-IN" sz="1400" b="1" dirty="0">
-                <a:solidFill>
-                  <a:srgbClr val="FFFFFF"/>
-                </a:solidFill>
-                <a:latin typeface="Calibri" pitchFamily="34" charset="0"/>
-              </a:rPr>
-              <a:t>ESP32 Controller</a:t>
-            </a:r>
-          </a:p>
-        </p:txBody>
-      </p:sp>
-      <p:sp>
-        <p:nvSpPr>
-          <p:cNvPr id="22" name="Arr1Line"/>
-          <p:cNvSpPr>
-            <a:spLocks noGrp="1"/>
-          </p:cNvSpPr>
-          <p:nvPr/>
-        </p:nvSpPr>
-        <p:spPr>
-          <a:xfrm>
-            <a:off x="2603500" y="2032000"/>
-            <a:ext cx="25400" cy="228600"/>
-          </a:xfrm>
-          <a:prstGeom prst="rect">
-            <a:avLst/>
-          </a:prstGeom>
-          <a:solidFill>
-            <a:srgbClr val="16223A"/>
-          </a:solidFill>
-          <a:ln>
-            <a:noFill/>
-          </a:ln>
-        </p:spPr>
-        <p:txBody>
-          <a:bodyPr/>
-          <a:lstStyle/>
-          <a:p>
-            <a:endParaRPr/>
-          </a:p>
-        </p:txBody>
-      </p:sp>
-      <p:sp>
-        <p:nvSpPr>
-          <p:cNvPr id="23" name="Arr1Head"/>
-          <p:cNvSpPr/>
-          <p:nvPr/>
-        </p:nvSpPr>
-        <p:spPr>
-          <a:xfrm>
-            <a:off x="2540000" y="2235200"/>
-            <a:ext cx="152400" cy="101600"/>
-          </a:xfrm>
-          <a:prstGeom prst="downArrow">
-            <a:avLst>
-              <a:gd name="adj1" fmla="val 50000"/>
-              <a:gd name="adj2" fmla="val 50000"/>
-            </a:avLst>
-          </a:prstGeom>
-          <a:solidFill>
-            <a:srgbClr val="16223A"/>
-          </a:solidFill>
-          <a:ln>
-            <a:noFill/>
-          </a:ln>
-        </p:spPr>
-        <p:txBody>
-          <a:bodyPr/>
-          <a:lstStyle/>
-          <a:p>
-            <a:endParaRPr/>
-          </a:p>
-        </p:txBody>
-      </p:sp>
-      <p:sp>
-        <p:nvSpPr>
-          <p:cNvPr id="24" name="ServoBlock"/>
-          <p:cNvSpPr>
-            <a:spLocks noGrp="1"/>
-          </p:cNvSpPr>
-          <p:nvPr/>
-        </p:nvSpPr>
-        <p:spPr>
-          <a:xfrm>
-            <a:off x="914400" y="2362200"/>
-            <a:ext cx="3429000" cy="457200"/>
-          </a:xfrm>
-          <a:prstGeom prst="roundRect">
-            <a:avLst>
-              <a:gd name="adj" fmla="val 20000"/>
-            </a:avLst>
-          </a:prstGeom>
-          <a:solidFill>
-            <a:srgbClr val="1A3460"/>
-          </a:solidFill>
-          <a:ln>
-            <a:noFill/>
-          </a:ln>
-        </p:spPr>
-        <p:txBody>
-          <a:bodyPr/>
-          <a:lstStyle/>
-          <a:p>
-            <a:pPr marL="0" indent="0" algn="ctr">
-              <a:buNone/>
-            </a:pPr>
-            <a:r>
-              <a:rPr lang="en-IN" sz="1400" b="1" dirty="0">
-                <a:solidFill>
-                  <a:srgbClr val="FFFFFF"/>
-                </a:solidFill>
-                <a:latin typeface="Calibri" pitchFamily="34" charset="0"/>
-              </a:rPr>
-              <a:t>5 Servo Motor Network</a:t>
-            </a:r>
-          </a:p>
-        </p:txBody>
-      </p:sp>
-      <p:sp>
-        <p:nvSpPr>
-          <p:cNvPr id="25" name="ServoSub"/>
-          <p:cNvSpPr>
-            <a:spLocks noGrp="1"/>
-          </p:cNvSpPr>
-          <p:nvPr/>
-        </p:nvSpPr>
-        <p:spPr>
-          <a:xfrm>
-            <a:off x="914400" y="2844800"/>
-            <a:ext cx="3429000" cy="203200"/>
-          </a:xfrm>
-          <a:prstGeom prst="rect">
-            <a:avLst/>
-          </a:prstGeom>
-          <a:noFill/>
-          <a:ln>
-            <a:noFill/>
-          </a:ln>
-        </p:spPr>
-        <p:txBody>
-          <a:bodyPr/>
-          <a:lstStyle/>
-          <a:p>
-            <a:pPr marL="0" indent="0" algn="ctr">
-              <a:buNone/>
-            </a:pPr>
-            <a:r>
-              <a:rPr lang="en-IN" sz="1100" dirty="0">
-                <a:solidFill>
-                  <a:srgbClr val="555E6F"/>
-                </a:solidFill>
-                <a:latin typeface="Calibri" pitchFamily="34" charset="0"/>
-              </a:rPr>
-              <a:t>Joints: S1 – S5 (SG90)</a:t>
-            </a:r>
-          </a:p>
-        </p:txBody>
-      </p:sp>
-      <p:sp>
-        <p:nvSpPr>
-          <p:cNvPr id="26" name="Arr2Line"/>
-          <p:cNvSpPr>
-            <a:spLocks noGrp="1"/>
-          </p:cNvSpPr>
-          <p:nvPr/>
-        </p:nvSpPr>
-        <p:spPr>
-          <a:xfrm>
-            <a:off x="2603500" y="3048000"/>
-            <a:ext cx="25400" cy="228600"/>
-          </a:xfrm>
-          <a:prstGeom prst="rect">
-            <a:avLst/>
-          </a:prstGeom>
-          <a:solidFill>
-            <a:srgbClr val="16223A"/>
-          </a:solidFill>
-          <a:ln>
-            <a:noFill/>
-          </a:ln>
-        </p:spPr>
-        <p:txBody>
-          <a:bodyPr/>
-          <a:lstStyle/>
-          <a:p>
-            <a:endParaRPr/>
-          </a:p>
-        </p:txBody>
-      </p:sp>
-      <p:sp>
-        <p:nvSpPr>
-          <p:cNvPr id="27" name="Arr2Head"/>
-          <p:cNvSpPr/>
-          <p:nvPr/>
-        </p:nvSpPr>
-        <p:spPr>
-          <a:xfrm>
-            <a:off x="2540000" y="3251200"/>
-            <a:ext cx="152400" cy="101600"/>
-          </a:xfrm>
-          <a:prstGeom prst="downArrow">
-            <a:avLst>
-              <a:gd name="adj1" fmla="val 50000"/>
-              <a:gd name="adj2" fmla="val 50000"/>
-            </a:avLst>
-          </a:prstGeom>
-          <a:solidFill>
-            <a:srgbClr val="16223A"/>
-          </a:solidFill>
-          <a:ln>
-            <a:noFill/>
-          </a:ln>
-        </p:spPr>
-        <p:txBody>
-          <a:bodyPr/>
-          <a:lstStyle/>
-          <a:p>
-            <a:endParaRPr/>
-          </a:p>
-        </p:txBody>
-      </p:sp>
-      <p:sp>
-        <p:nvSpPr>
-          <p:cNvPr id="28" name="AlgoBlock"/>
-          <p:cNvSpPr>
-            <a:spLocks noGrp="1"/>
-          </p:cNvSpPr>
-          <p:nvPr/>
-        </p:nvSpPr>
-        <p:spPr>
-          <a:xfrm>
-            <a:off x="914400" y="3378200"/>
-            <a:ext cx="3429000" cy="457200"/>
-          </a:xfrm>
-          <a:prstGeom prst="roundRect">
-            <a:avLst>
-              <a:gd name="adj" fmla="val 20000"/>
-            </a:avLst>
-          </a:prstGeom>
-          <a:solidFill>
-            <a:srgbClr val="0A7A8E"/>
-          </a:solidFill>
-          <a:ln>
-            <a:noFill/>
-          </a:ln>
-        </p:spPr>
-        <p:txBody>
-          <a:bodyPr/>
-          <a:lstStyle/>
-          <a:p>
-            <a:pPr marL="0" indent="0" algn="ctr">
-              <a:buNone/>
-            </a:pPr>
-            <a:r>
-              <a:rPr lang="en-IN" sz="1300" b="1" dirty="0">
-                <a:solidFill>
-                  <a:srgbClr val="FFFFFF"/>
-                </a:solidFill>
-                <a:latin typeface="Calibri" pitchFamily="34" charset="0"/>
-              </a:rPr>
-              <a:t>Serpentine Locomotion Algorithm</a:t>
-            </a:r>
-          </a:p>
-        </p:txBody>
-      </p:sp>
-      <p:sp>
-        <p:nvSpPr>
-          <p:cNvPr id="30" name="SensorHeader"/>
-          <p:cNvSpPr>
-            <a:spLocks noGrp="1"/>
-          </p:cNvSpPr>
-          <p:nvPr/>
-        </p:nvSpPr>
-        <p:spPr>
-          <a:xfrm>
-            <a:off x="533400" y="4064000"/>
-            <a:ext cx="4191000" cy="228600"/>
-          </a:xfrm>
-          <a:prstGeom prst="rect">
-            <a:avLst/>
-          </a:prstGeom>
-          <a:noFill/>
-          <a:ln>
-            <a:noFill/>
-          </a:ln>
-        </p:spPr>
-        <p:txBody>
-          <a:bodyPr/>
-          <a:lstStyle/>
-          <a:p>
-            <a:pPr marL="0" indent="0" algn="l">
-              <a:buNone/>
-            </a:pPr>
-            <a:r>
-              <a:rPr lang="en-IN" sz="1100" b="1" dirty="0">
-                <a:solidFill>
-                  <a:srgbClr val="16223A"/>
-                </a:solidFill>
-                <a:latin typeface="Calibri" pitchFamily="34" charset="0"/>
-              </a:rPr>
-              <a:t>SENSOR MODULES</a:t>
-            </a:r>
-          </a:p>
-        </p:txBody>
-      </p:sp>
-      <p:sp>
-        <p:nvSpPr>
-          <p:cNvPr id="31" name="SensDivider"/>
-          <p:cNvSpPr>
-            <a:spLocks noGrp="1"/>
-          </p:cNvSpPr>
-          <p:nvPr/>
-        </p:nvSpPr>
-        <p:spPr>
-          <a:xfrm>
-            <a:off x="533400" y="4318000"/>
-            <a:ext cx="4191000" cy="12700"/>
-          </a:xfrm>
-          <a:prstGeom prst="rect">
-            <a:avLst/>
-          </a:prstGeom>
-          <a:solidFill>
-            <a:srgbClr val="0E96AC"/>
-          </a:solidFill>
-          <a:ln>
-            <a:noFill/>
-          </a:ln>
-        </p:spPr>
-        <p:txBody>
-          <a:bodyPr/>
-          <a:lstStyle/>
-          <a:p>
-            <a:endParaRPr/>
-          </a:p>
-        </p:txBody>
-      </p:sp>
-      <p:sp>
-        <p:nvSpPr>
-          <p:cNvPr id="32" name="IMUBox"/>
-          <p:cNvSpPr>
-            <a:spLocks noGrp="1"/>
-          </p:cNvSpPr>
-          <p:nvPr/>
-        </p:nvSpPr>
-        <p:spPr>
-          <a:xfrm>
-            <a:off x="533400" y="4394200"/>
-            <a:ext cx="1219200" cy="355600"/>
-          </a:xfrm>
-          <a:prstGeom prst="roundRect">
-            <a:avLst>
-              <a:gd name="adj" fmla="val 20000"/>
-            </a:avLst>
-          </a:prstGeom>
-          <a:solidFill>
-            <a:srgbClr val="E8F5F7"/>
-          </a:solidFill>
-          <a:ln w="9525">
+      <p:pic>
+        <p:nvPicPr>
+          <p:cNvPr id="2" name="Picture 1">
+            <a:extLst>
+              <a:ext uri="{FF2B5EF4-FFF2-40B4-BE49-F238E27FC236}">
+                <a16:creationId xmlns:a16="http://schemas.microsoft.com/office/drawing/2014/main" id="{FF57F7DB-A372-8BEE-AF61-AC58FDC57F17}"/>
+              </a:ext>
+            </a:extLst>
+          </p:cNvPr>
+          <p:cNvPicPr>
+            <a:picLocks noChangeAspect="1"/>
+          </p:cNvPicPr>
+          <p:nvPr/>
+        </p:nvPicPr>
+        <p:blipFill>
+          <a:blip r:embed="rId2"/>
+          <a:stretch>
+            <a:fillRect/>
+          </a:stretch>
+        </p:blipFill>
+        <p:spPr>
+          <a:xfrm>
+            <a:off x="533400" y="1270000"/>
+            <a:ext cx="6350000" cy="4772421"/>
+          </a:xfrm>
+          <a:prstGeom prst="rect">
+            <a:avLst/>
+          </a:prstGeom>
+        </p:spPr>
+      </p:pic>
+      <p:sp>
+        <p:nvSpPr>
+          <p:cNvPr id="3" name="ImgFrame">
+            <a:extLst>
+              <a:ext uri="{FF2B5EF4-FFF2-40B4-BE49-F238E27FC236}">
+                <a16:creationId xmlns:a16="http://schemas.microsoft.com/office/drawing/2014/main" id="{4BAB2F69-E5D7-47C1-A740-AD4ADA6781C8}"/>
+              </a:ext>
+            </a:extLst>
+          </p:cNvPr>
+          <p:cNvSpPr/>
+          <p:nvPr/>
+        </p:nvSpPr>
+        <p:spPr>
+          <a:xfrm>
+            <a:off x="520700" y="1257300"/>
+            <a:ext cx="6375400" cy="4800600"/>
+          </a:xfrm>
+          <a:prstGeom prst="rect">
+            <a:avLst/>
+          </a:prstGeom>
+          <a:noFill/>
+          <a:ln w="19050" cap="flat" cmpd="sng" algn="ctr">
             <a:solidFill>
               <a:srgbClr val="0E96AC"/>
             </a:solidFill>
-          </a:ln>
-        </p:spPr>
-        <p:txBody>
-          <a:bodyPr/>
-          <a:lstStyle/>
-          <a:p>
-            <a:pPr marL="0" indent="0" algn="ctr">
-              <a:buNone/>
+            <a:prstDash val="solid"/>
+            <a:miter lim="800000"/>
+          </a:ln>
+        </p:spPr>
+        <p:style>
+          <a:lnRef idx="2">
+            <a:schemeClr val="accent1">
+              <a:shade val="15000"/>
+            </a:schemeClr>
+          </a:lnRef>
+          <a:fillRef idx="1">
+            <a:schemeClr val="accent1"/>
+          </a:fillRef>
+          <a:effectRef idx="0">
+            <a:schemeClr val="accent1"/>
+          </a:effectRef>
+          <a:fontRef idx="minor">
+            <a:schemeClr val="lt1"/>
+          </a:fontRef>
+        </p:style>
+        <p:txBody>
+          <a:bodyPr vertOverflow="clip" horzOverflow="clip" rtlCol="0" anchor="t"/>
+          <a:lstStyle/>
+          <a:p>
+            <a:pPr algn="l"/>
+            <a:endParaRPr lang="en-IN"/>
+          </a:p>
+        </p:txBody>
+      </p:sp>
+      <p:sp>
+        <p:nvSpPr>
+          <p:cNvPr id="4" name="Caption">
+            <a:extLst>
+              <a:ext uri="{FF2B5EF4-FFF2-40B4-BE49-F238E27FC236}">
+                <a16:creationId xmlns:a16="http://schemas.microsoft.com/office/drawing/2014/main" id="{0A70087A-913A-4173-8A2B-10264A92E2F2}"/>
+              </a:ext>
+            </a:extLst>
+          </p:cNvPr>
+          <p:cNvSpPr txBox="1"/>
+          <p:nvPr/>
+        </p:nvSpPr>
+        <p:spPr>
+          <a:xfrm>
+            <a:off x="533400" y="6121400"/>
+            <a:ext cx="6350000" cy="584200"/>
+          </a:xfrm>
+          <a:prstGeom prst="rect">
+            <a:avLst/>
+          </a:prstGeom>
+          <a:noFill/>
+        </p:spPr>
+        <p:txBody>
+          <a:bodyPr vertOverflow="overflow" vert="horz" wrap="square" rtlCol="0" anchor="t" anchorCtr="0">
+            <a:spAutoFit/>
+          </a:bodyPr>
+          <a:lstStyle/>
+          <a:p>
+            <a:pPr algn="l"/>
+            <a:r>
+              <a:rPr lang="en-US" sz="1050" i="1">
+                <a:solidFill>
+                  <a:srgbClr val="6B7280"/>
+                </a:solidFill>
+                <a:latin typeface="Calibri"/>
+                <a:ea typeface="Calibri"/>
+                <a:cs typeface="Calibri"/>
+              </a:rPr>
+              <a:t>Wokwi-based simulation environment developed to validate locomotion control, sensor integration, and communication architecture before physical Dynamixel hardware arrival.</a:t>
+            </a:r>
+            <a:endParaRPr lang="en-IN" sz="1050" i="1">
+              <a:solidFill>
+                <a:srgbClr val="6B7280"/>
+              </a:solidFill>
+              <a:latin typeface="Calibri"/>
+              <a:ea typeface="Calibri"/>
+              <a:cs typeface="Calibri"/>
+            </a:endParaRPr>
+          </a:p>
+        </p:txBody>
+      </p:sp>
+      <p:sp>
+        <p:nvSpPr>
+          <p:cNvPr id="5" name="ColSep">
+            <a:extLst>
+              <a:ext uri="{FF2B5EF4-FFF2-40B4-BE49-F238E27FC236}">
+                <a16:creationId xmlns:a16="http://schemas.microsoft.com/office/drawing/2014/main" id="{F4B4824F-43FB-40F3-A930-950484DEE059}"/>
+              </a:ext>
+            </a:extLst>
+          </p:cNvPr>
+          <p:cNvSpPr/>
+          <p:nvPr/>
+        </p:nvSpPr>
+        <p:spPr>
+          <a:xfrm>
+            <a:off x="7010400" y="1219200"/>
+            <a:ext cx="12700" cy="5486400"/>
+          </a:xfrm>
+          <a:prstGeom prst="rect">
+            <a:avLst/>
+          </a:prstGeom>
+          <a:solidFill>
+            <a:srgbClr val="D0D7E5"/>
+          </a:solidFill>
+          <a:ln w="12700" cap="flat" cmpd="sng" algn="ctr">
+            <a:noFill/>
+            <a:prstDash val="solid"/>
+            <a:miter lim="800000"/>
+          </a:ln>
+        </p:spPr>
+        <p:style>
+          <a:lnRef idx="2">
+            <a:schemeClr val="accent1">
+              <a:shade val="15000"/>
+            </a:schemeClr>
+          </a:lnRef>
+          <a:fillRef idx="1">
+            <a:schemeClr val="accent1"/>
+          </a:fillRef>
+          <a:effectRef idx="0">
+            <a:schemeClr val="accent1"/>
+          </a:effectRef>
+          <a:fontRef idx="minor">
+            <a:schemeClr val="lt1"/>
+          </a:fontRef>
+        </p:style>
+        <p:txBody>
+          <a:bodyPr vertOverflow="clip" horzOverflow="clip" rtlCol="0" anchor="t"/>
+          <a:lstStyle/>
+          <a:p>
+            <a:pPr algn="l"/>
+            <a:endParaRPr lang="en-IN"/>
+          </a:p>
+        </p:txBody>
+      </p:sp>
+      <p:sp>
+        <p:nvSpPr>
+          <p:cNvPr id="6" name="ObjBar">
+            <a:extLst>
+              <a:ext uri="{FF2B5EF4-FFF2-40B4-BE49-F238E27FC236}">
+                <a16:creationId xmlns:a16="http://schemas.microsoft.com/office/drawing/2014/main" id="{178EDC1E-CA49-4444-807D-C176B8B794B6}"/>
+              </a:ext>
+            </a:extLst>
+          </p:cNvPr>
+          <p:cNvSpPr/>
+          <p:nvPr/>
+        </p:nvSpPr>
+        <p:spPr>
+          <a:xfrm>
+            <a:off x="7112000" y="1270000"/>
+            <a:ext cx="4546600" cy="254000"/>
+          </a:xfrm>
+          <a:prstGeom prst="rect">
+            <a:avLst/>
+          </a:prstGeom>
+          <a:solidFill>
+            <a:srgbClr val="16223A"/>
+          </a:solidFill>
+          <a:ln w="12700" cap="flat" cmpd="sng" algn="ctr">
+            <a:noFill/>
+            <a:prstDash val="solid"/>
+            <a:miter lim="800000"/>
+          </a:ln>
+        </p:spPr>
+        <p:style>
+          <a:lnRef idx="2">
+            <a:schemeClr val="accent1">
+              <a:shade val="15000"/>
+            </a:schemeClr>
+          </a:lnRef>
+          <a:fillRef idx="1">
+            <a:schemeClr val="accent1"/>
+          </a:fillRef>
+          <a:effectRef idx="0">
+            <a:schemeClr val="accent1"/>
+          </a:effectRef>
+          <a:fontRef idx="minor">
+            <a:schemeClr val="lt1"/>
+          </a:fontRef>
+        </p:style>
+        <p:txBody>
+          <a:bodyPr vertOverflow="clip" horzOverflow="clip" wrap="square" rtlCol="0" anchor="ctr" anchorCtr="0">
+            <a:noAutofit/>
+          </a:bodyPr>
+          <a:lstStyle/>
+          <a:p>
+            <a:pPr algn="l"/>
+            <a:r>
+              <a:rPr lang="en-IN" sz="1050" b="1">
+                <a:solidFill>
+                  <a:srgbClr val="FFFFFF"/>
+                </a:solidFill>
+                <a:latin typeface="Calibri"/>
+                <a:ea typeface="Calibri"/>
+                <a:cs typeface="Calibri"/>
+              </a:rPr>
+              <a:t>SIMULATION OBJECTIVE</a:t>
+            </a:r>
+          </a:p>
+        </p:txBody>
+      </p:sp>
+      <p:sp>
+        <p:nvSpPr>
+          <p:cNvPr id="7" name="ObjText">
+            <a:extLst>
+              <a:ext uri="{FF2B5EF4-FFF2-40B4-BE49-F238E27FC236}">
+                <a16:creationId xmlns:a16="http://schemas.microsoft.com/office/drawing/2014/main" id="{AB2E6402-3A0B-4197-BB71-81ED271D7DB2}"/>
+              </a:ext>
+            </a:extLst>
+          </p:cNvPr>
+          <p:cNvSpPr txBox="1"/>
+          <p:nvPr/>
+        </p:nvSpPr>
+        <p:spPr>
+          <a:xfrm>
+            <a:off x="7112000" y="1549400"/>
+            <a:ext cx="4546600" cy="812800"/>
+          </a:xfrm>
+          <a:prstGeom prst="rect">
+            <a:avLst/>
+          </a:prstGeom>
+          <a:noFill/>
+        </p:spPr>
+        <p:txBody>
+          <a:bodyPr vertOverflow="overflow" vert="horz" wrap="square" rtlCol="0" anchor="t" anchorCtr="0">
+            <a:spAutoFit/>
+          </a:bodyPr>
+          <a:lstStyle/>
+          <a:p>
+            <a:pPr algn="l"/>
+            <a:r>
+              <a:rPr lang="en-US" sz="1050">
+                <a:solidFill>
+                  <a:srgbClr val="16223A"/>
+                </a:solidFill>
+                <a:latin typeface="Calibri"/>
+                <a:ea typeface="Calibri"/>
+                <a:cs typeface="Calibri"/>
+              </a:rPr>
+              <a:t>A virtual testing platform to validate the control architecture before Dynamixel actuators and communication hardware arrive — enabling software development, algorithm verification, and sensor integration in parallel with procurement.</a:t>
+            </a:r>
+            <a:endParaRPr lang="en-IN" sz="1050">
+              <a:solidFill>
+                <a:srgbClr val="16223A"/>
+              </a:solidFill>
+              <a:latin typeface="Calibri"/>
+              <a:ea typeface="Calibri"/>
+              <a:cs typeface="Calibri"/>
+            </a:endParaRPr>
+          </a:p>
+        </p:txBody>
+      </p:sp>
+      <p:sp>
+        <p:nvSpPr>
+          <p:cNvPr id="8" name="CompBar">
+            <a:extLst>
+              <a:ext uri="{FF2B5EF4-FFF2-40B4-BE49-F238E27FC236}">
+                <a16:creationId xmlns:a16="http://schemas.microsoft.com/office/drawing/2014/main" id="{13A72280-DA83-4A91-A182-E29B80090FB4}"/>
+              </a:ext>
+            </a:extLst>
+          </p:cNvPr>
+          <p:cNvSpPr/>
+          <p:nvPr/>
+        </p:nvSpPr>
+        <p:spPr>
+          <a:xfrm>
+            <a:off x="7112000" y="2413000"/>
+            <a:ext cx="4546600" cy="254000"/>
+          </a:xfrm>
+          <a:prstGeom prst="rect">
+            <a:avLst/>
+          </a:prstGeom>
+          <a:solidFill>
+            <a:srgbClr val="16223A"/>
+          </a:solidFill>
+          <a:ln w="12700" cap="flat" cmpd="sng" algn="ctr">
+            <a:noFill/>
+            <a:prstDash val="solid"/>
+            <a:miter lim="800000"/>
+          </a:ln>
+        </p:spPr>
+        <p:style>
+          <a:lnRef idx="2">
+            <a:schemeClr val="accent1">
+              <a:shade val="15000"/>
+            </a:schemeClr>
+          </a:lnRef>
+          <a:fillRef idx="1">
+            <a:schemeClr val="accent1"/>
+          </a:fillRef>
+          <a:effectRef idx="0">
+            <a:schemeClr val="accent1"/>
+          </a:effectRef>
+          <a:fontRef idx="minor">
+            <a:schemeClr val="lt1"/>
+          </a:fontRef>
+        </p:style>
+        <p:txBody>
+          <a:bodyPr vertOverflow="clip" horzOverflow="clip" wrap="square" rtlCol="0" anchor="ctr" anchorCtr="0">
+            <a:noAutofit/>
+          </a:bodyPr>
+          <a:lstStyle/>
+          <a:p>
+            <a:pPr algn="l"/>
+            <a:r>
+              <a:rPr lang="en-IN" sz="1050" b="1">
+                <a:solidFill>
+                  <a:srgbClr val="FFFFFF"/>
+                </a:solidFill>
+                <a:latin typeface="Calibri"/>
+                <a:ea typeface="Calibri"/>
+                <a:cs typeface="Calibri"/>
+              </a:rPr>
+              <a:t>COMPONENTS SIMULATED</a:t>
+            </a:r>
+          </a:p>
+        </p:txBody>
+      </p:sp>
+      <p:pic>
+        <p:nvPicPr>
+          <p:cNvPr id="14" name="Graphic 14" descr="Controller"/>
+          <p:cNvPicPr>
+            <a:picLocks noChangeAspect="1"/>
+          </p:cNvPicPr>
+          <p:nvPr/>
+        </p:nvPicPr>
+        <p:blipFill>
+          <a:blip>
+            <a:extLst>
+              <a:ext uri="{96DAC541-7B7A-43D3-8B79-37D633B846F1}">
+                <asvg:svgBlip xmlns:asvg="http://schemas.microsoft.com/office/drawing/2016/SVG/main" r:embed="rId3"/>
+              </a:ext>
+            </a:extLst>
+          </a:blip>
+          <a:stretch>
+            <a:fillRect/>
+          </a:stretch>
+        </p:blipFill>
+        <p:spPr>
+          <a:xfrm>
+            <a:off x="7340600" y="2743200"/>
+            <a:ext cx="330200" cy="330200"/>
+          </a:xfrm>
+          <a:prstGeom prst="rect">
+            <a:avLst/>
+          </a:prstGeom>
+        </p:spPr>
+      </p:pic>
+      <p:pic>
+        <p:nvPicPr>
+          <p:cNvPr id="15" name="Graphic 15" descr="Sensors"/>
+          <p:cNvPicPr>
+            <a:picLocks noChangeAspect="1"/>
+          </p:cNvPicPr>
+          <p:nvPr/>
+        </p:nvPicPr>
+        <p:blipFill>
+          <a:blip>
+            <a:extLst>
+              <a:ext uri="{96DAC541-7B7A-43D3-8B79-37D633B846F1}">
+                <asvg:svgBlip xmlns:asvg="http://schemas.microsoft.com/office/drawing/2016/SVG/main" r:embed="rId4"/>
+              </a:ext>
+            </a:extLst>
+          </a:blip>
+          <a:stretch>
+            <a:fillRect/>
+          </a:stretch>
+        </p:blipFill>
+        <p:spPr>
+          <a:xfrm>
+            <a:off x="8483600" y="2743200"/>
+            <a:ext cx="330200" cy="330200"/>
+          </a:xfrm>
+          <a:prstGeom prst="rect">
+            <a:avLst/>
+          </a:prstGeom>
+        </p:spPr>
+      </p:pic>
+      <p:pic>
+        <p:nvPicPr>
+          <p:cNvPr id="16" name="Graphic 16" descr="Display"/>
+          <p:cNvPicPr>
+            <a:picLocks noChangeAspect="1"/>
+          </p:cNvPicPr>
+          <p:nvPr/>
+        </p:nvPicPr>
+        <p:blipFill>
+          <a:blip>
+            <a:extLst>
+              <a:ext uri="{96DAC541-7B7A-43D3-8B79-37D633B846F1}">
+                <asvg:svgBlip xmlns:asvg="http://schemas.microsoft.com/office/drawing/2016/SVG/main" r:embed="rId5"/>
+              </a:ext>
+            </a:extLst>
+          </a:blip>
+          <a:stretch>
+            <a:fillRect/>
+          </a:stretch>
+        </p:blipFill>
+        <p:spPr>
+          <a:xfrm>
+            <a:off x="9626600" y="2743200"/>
+            <a:ext cx="330200" cy="330200"/>
+          </a:xfrm>
+          <a:prstGeom prst="rect">
+            <a:avLst/>
+          </a:prstGeom>
+        </p:spPr>
+      </p:pic>
+      <p:pic>
+        <p:nvPicPr>
+          <p:cNvPr id="17" name="Graphic 17" descr="Actuators"/>
+          <p:cNvPicPr>
+            <a:picLocks noChangeAspect="1"/>
+          </p:cNvPicPr>
+          <p:nvPr/>
+        </p:nvPicPr>
+        <p:blipFill>
+          <a:blip>
+            <a:extLst>
+              <a:ext uri="{96DAC541-7B7A-43D3-8B79-37D633B846F1}">
+                <asvg:svgBlip xmlns:asvg="http://schemas.microsoft.com/office/drawing/2016/SVG/main" r:embed="rId6"/>
+              </a:ext>
+            </a:extLst>
+          </a:blip>
+          <a:stretch>
+            <a:fillRect/>
+          </a:stretch>
+        </p:blipFill>
+        <p:spPr>
+          <a:xfrm>
+            <a:off x="10769600" y="2743200"/>
+            <a:ext cx="330200" cy="330200"/>
+          </a:xfrm>
+          <a:prstGeom prst="rect">
+            <a:avLst/>
+          </a:prstGeom>
+        </p:spPr>
+      </p:pic>
+      <p:sp>
+        <p:nvSpPr>
+          <p:cNvPr id="9" name="TextBox 8">
+            <a:extLst>
+              <a:ext uri="{FF2B5EF4-FFF2-40B4-BE49-F238E27FC236}">
+                <a16:creationId xmlns:a16="http://schemas.microsoft.com/office/drawing/2014/main" id="{F14FDCAF-EA1B-4688-86EC-4FDF39171679}"/>
+              </a:ext>
+            </a:extLst>
+          </p:cNvPr>
+          <p:cNvSpPr txBox="1"/>
+          <p:nvPr/>
+        </p:nvSpPr>
+        <p:spPr>
+          <a:xfrm>
+            <a:off x="6946900" y="3086100"/>
+            <a:ext cx="1117600" cy="177800"/>
+          </a:xfrm>
+          <a:prstGeom prst="rect">
+            <a:avLst/>
+          </a:prstGeom>
+          <a:noFill/>
+        </p:spPr>
+        <p:txBody>
+          <a:bodyPr vertOverflow="overflow" vert="horz" wrap="square" rtlCol="0" anchor="t" anchorCtr="0">
+            <a:noAutofit/>
+          </a:bodyPr>
+          <a:lstStyle/>
+          <a:p>
+            <a:pPr algn="l"/>
+            <a:r>
+              <a:rPr lang="en-IN" sz="900" b="1">
+                <a:solidFill>
+                  <a:srgbClr val="16223A"/>
+                </a:solidFill>
+                <a:latin typeface="Calibri"/>
+                <a:ea typeface="Calibri"/>
+                <a:cs typeface="Calibri"/>
+              </a:rPr>
+              <a:t>Controller</a:t>
+            </a:r>
+          </a:p>
+        </p:txBody>
+      </p:sp>
+      <p:sp>
+        <p:nvSpPr>
+          <p:cNvPr id="18" name="TextBox 17">
+            <a:extLst>
+              <a:ext uri="{FF2B5EF4-FFF2-40B4-BE49-F238E27FC236}">
+                <a16:creationId xmlns:a16="http://schemas.microsoft.com/office/drawing/2014/main" id="{BCAC9736-26F2-4544-A0F4-600AE742E3F5}"/>
+              </a:ext>
+            </a:extLst>
+          </p:cNvPr>
+          <p:cNvSpPr txBox="1"/>
+          <p:nvPr/>
+        </p:nvSpPr>
+        <p:spPr>
+          <a:xfrm>
+            <a:off x="8089900" y="3086100"/>
+            <a:ext cx="1117600" cy="177800"/>
+          </a:xfrm>
+          <a:prstGeom prst="rect">
+            <a:avLst/>
+          </a:prstGeom>
+          <a:noFill/>
+        </p:spPr>
+        <p:txBody>
+          <a:bodyPr vertOverflow="overflow" vert="horz" wrap="square" rtlCol="0" anchor="t" anchorCtr="0">
+            <a:noAutofit/>
+          </a:bodyPr>
+          <a:lstStyle/>
+          <a:p>
+            <a:pPr algn="l"/>
+            <a:r>
+              <a:rPr lang="en-IN" sz="900" b="1">
+                <a:solidFill>
+                  <a:srgbClr val="16223A"/>
+                </a:solidFill>
+                <a:latin typeface="Calibri"/>
+                <a:ea typeface="Calibri"/>
+                <a:cs typeface="Calibri"/>
+              </a:rPr>
+              <a:t>Sensors</a:t>
+            </a:r>
+          </a:p>
+        </p:txBody>
+      </p:sp>
+      <p:sp>
+        <p:nvSpPr>
+          <p:cNvPr id="19" name="TextBox 18">
+            <a:extLst>
+              <a:ext uri="{FF2B5EF4-FFF2-40B4-BE49-F238E27FC236}">
+                <a16:creationId xmlns:a16="http://schemas.microsoft.com/office/drawing/2014/main" id="{73C8DB26-9565-46C7-9618-2E76312967B5}"/>
+              </a:ext>
+            </a:extLst>
+          </p:cNvPr>
+          <p:cNvSpPr txBox="1"/>
+          <p:nvPr/>
+        </p:nvSpPr>
+        <p:spPr>
+          <a:xfrm>
+            <a:off x="9232900" y="3086100"/>
+            <a:ext cx="1117600" cy="177800"/>
+          </a:xfrm>
+          <a:prstGeom prst="rect">
+            <a:avLst/>
+          </a:prstGeom>
+          <a:noFill/>
+        </p:spPr>
+        <p:txBody>
+          <a:bodyPr vertOverflow="overflow" vert="horz" wrap="square" rtlCol="0" anchor="t" anchorCtr="0">
+            <a:noAutofit/>
+          </a:bodyPr>
+          <a:lstStyle/>
+          <a:p>
+            <a:pPr algn="l"/>
+            <a:r>
+              <a:rPr lang="en-IN" sz="900" b="1">
+                <a:solidFill>
+                  <a:srgbClr val="16223A"/>
+                </a:solidFill>
+                <a:latin typeface="Calibri"/>
+                <a:ea typeface="Calibri"/>
+                <a:cs typeface="Calibri"/>
+              </a:rPr>
+              <a:t>Display</a:t>
+            </a:r>
+          </a:p>
+        </p:txBody>
+      </p:sp>
+      <p:sp>
+        <p:nvSpPr>
+          <p:cNvPr id="20" name="TextBox 19">
+            <a:extLst>
+              <a:ext uri="{FF2B5EF4-FFF2-40B4-BE49-F238E27FC236}">
+                <a16:creationId xmlns:a16="http://schemas.microsoft.com/office/drawing/2014/main" id="{943EA61A-F56F-4D25-A1D6-D7B8CDF5A8FC}"/>
+              </a:ext>
+            </a:extLst>
+          </p:cNvPr>
+          <p:cNvSpPr txBox="1"/>
+          <p:nvPr/>
+        </p:nvSpPr>
+        <p:spPr>
+          <a:xfrm>
+            <a:off x="10375900" y="3086100"/>
+            <a:ext cx="1117600" cy="177800"/>
+          </a:xfrm>
+          <a:prstGeom prst="rect">
+            <a:avLst/>
+          </a:prstGeom>
+          <a:noFill/>
+        </p:spPr>
+        <p:txBody>
+          <a:bodyPr vertOverflow="overflow" vert="horz" wrap="square" rtlCol="0" anchor="t" anchorCtr="0">
+            <a:noAutofit/>
+          </a:bodyPr>
+          <a:lstStyle/>
+          <a:p>
+            <a:pPr algn="l"/>
+            <a:r>
+              <a:rPr lang="en-IN" sz="900" b="1">
+                <a:solidFill>
+                  <a:srgbClr val="16223A"/>
+                </a:solidFill>
+                <a:latin typeface="Calibri"/>
+                <a:ea typeface="Calibri"/>
+                <a:cs typeface="Calibri"/>
+              </a:rPr>
+              <a:t>Actuators</a:t>
+            </a:r>
+          </a:p>
+        </p:txBody>
+      </p:sp>
+      <p:sp>
+        <p:nvSpPr>
+          <p:cNvPr id="21" name="CompSub">
+            <a:extLst>
+              <a:ext uri="{FF2B5EF4-FFF2-40B4-BE49-F238E27FC236}">
+                <a16:creationId xmlns:a16="http://schemas.microsoft.com/office/drawing/2014/main" id="{E9BA4A95-644D-43CC-86B7-250148BF0C59}"/>
+              </a:ext>
+            </a:extLst>
+          </p:cNvPr>
+          <p:cNvSpPr txBox="1"/>
+          <p:nvPr/>
+        </p:nvSpPr>
+        <p:spPr>
+          <a:xfrm>
+            <a:off x="7112000" y="3327400"/>
+            <a:ext cx="4546600" cy="330200"/>
+          </a:xfrm>
+          <a:prstGeom prst="rect">
+            <a:avLst/>
+          </a:prstGeom>
+          <a:noFill/>
+        </p:spPr>
+        <p:txBody>
+          <a:bodyPr vertOverflow="overflow" vert="horz" wrap="square" rtlCol="0" anchor="t" anchorCtr="0">
+            <a:spAutoFit/>
+          </a:bodyPr>
+          <a:lstStyle/>
+          <a:p>
+            <a:pPr algn="l"/>
+            <a:r>
+              <a:rPr lang="en-IN" sz="900" i="1">
+                <a:solidFill>
+                  <a:srgbClr val="6B7280"/>
+                </a:solidFill>
+                <a:latin typeface="Calibri"/>
+                <a:ea typeface="Calibri"/>
+                <a:cs typeface="Calibri"/>
+              </a:rPr>
+              <a:t>ESP32 · 5-Servo joint network · MPU6050 IMU · HC-SR04 ultrasonic · SSD1306 OLED · control &amp; communication framework</a:t>
+            </a:r>
+          </a:p>
+        </p:txBody>
+      </p:sp>
+      <p:sp>
+        <p:nvSpPr>
+          <p:cNvPr id="22" name="ValBar">
+            <a:extLst>
+              <a:ext uri="{FF2B5EF4-FFF2-40B4-BE49-F238E27FC236}">
+                <a16:creationId xmlns:a16="http://schemas.microsoft.com/office/drawing/2014/main" id="{969CB65F-F6A4-423C-A59B-AAE9CC13FF12}"/>
+              </a:ext>
+            </a:extLst>
+          </p:cNvPr>
+          <p:cNvSpPr/>
+          <p:nvPr/>
+        </p:nvSpPr>
+        <p:spPr>
+          <a:xfrm>
+            <a:off x="7112000" y="3708400"/>
+            <a:ext cx="4546600" cy="254000"/>
+          </a:xfrm>
+          <a:prstGeom prst="rect">
+            <a:avLst/>
+          </a:prstGeom>
+          <a:solidFill>
+            <a:srgbClr val="16223A"/>
+          </a:solidFill>
+          <a:ln w="12700" cap="flat" cmpd="sng" algn="ctr">
+            <a:noFill/>
+            <a:prstDash val="solid"/>
+            <a:miter lim="800000"/>
+          </a:ln>
+        </p:spPr>
+        <p:style>
+          <a:lnRef idx="2">
+            <a:schemeClr val="accent1">
+              <a:shade val="15000"/>
+            </a:schemeClr>
+          </a:lnRef>
+          <a:fillRef idx="1">
+            <a:schemeClr val="accent1"/>
+          </a:fillRef>
+          <a:effectRef idx="0">
+            <a:schemeClr val="accent1"/>
+          </a:effectRef>
+          <a:fontRef idx="minor">
+            <a:schemeClr val="lt1"/>
+          </a:fontRef>
+        </p:style>
+        <p:txBody>
+          <a:bodyPr vertOverflow="clip" horzOverflow="clip" wrap="square" rtlCol="0" anchor="ctr" anchorCtr="0">
+            <a:noAutofit/>
+          </a:bodyPr>
+          <a:lstStyle/>
+          <a:p>
+            <a:pPr algn="l"/>
+            <a:r>
+              <a:rPr lang="en-IN" sz="1050" b="1">
+                <a:solidFill>
+                  <a:srgbClr val="FFFFFF"/>
+                </a:solidFill>
+                <a:latin typeface="Calibri"/>
+                <a:ea typeface="Calibri"/>
+                <a:cs typeface="Calibri"/>
+              </a:rPr>
+              <a:t>FUNCTIONAL VALIDATION COMPLETED</a:t>
+            </a:r>
+          </a:p>
+        </p:txBody>
+      </p:sp>
+      <p:sp>
+        <p:nvSpPr>
+          <p:cNvPr id="23" name="BenBar">
+            <a:extLst>
+              <a:ext uri="{FF2B5EF4-FFF2-40B4-BE49-F238E27FC236}">
+                <a16:creationId xmlns:a16="http://schemas.microsoft.com/office/drawing/2014/main" id="{17226090-79FF-4BDE-85B8-E78705648C85}"/>
+              </a:ext>
+            </a:extLst>
+          </p:cNvPr>
+          <p:cNvSpPr/>
+          <p:nvPr/>
+        </p:nvSpPr>
+        <p:spPr>
+          <a:xfrm>
+            <a:off x="7112000" y="5283200"/>
+            <a:ext cx="4546600" cy="254000"/>
+          </a:xfrm>
+          <a:prstGeom prst="rect">
+            <a:avLst/>
+          </a:prstGeom>
+          <a:solidFill>
+            <a:srgbClr val="16223A"/>
+          </a:solidFill>
+          <a:ln w="12700" cap="flat" cmpd="sng" algn="ctr">
+            <a:noFill/>
+            <a:prstDash val="solid"/>
+            <a:miter lim="800000"/>
+          </a:ln>
+        </p:spPr>
+        <p:style>
+          <a:lnRef idx="2">
+            <a:schemeClr val="accent1">
+              <a:shade val="15000"/>
+            </a:schemeClr>
+          </a:lnRef>
+          <a:fillRef idx="1">
+            <a:schemeClr val="accent1"/>
+          </a:fillRef>
+          <a:effectRef idx="0">
+            <a:schemeClr val="accent1"/>
+          </a:effectRef>
+          <a:fontRef idx="minor">
+            <a:schemeClr val="lt1"/>
+          </a:fontRef>
+        </p:style>
+        <p:txBody>
+          <a:bodyPr vertOverflow="clip" horzOverflow="clip" wrap="square" rtlCol="0" anchor="ctr" anchorCtr="0">
+            <a:noAutofit/>
+          </a:bodyPr>
+          <a:lstStyle/>
+          <a:p>
+            <a:pPr algn="l"/>
+            <a:r>
+              <a:rPr lang="en-IN" sz="1050" b="1">
+                <a:solidFill>
+                  <a:srgbClr val="FFFFFF"/>
+                </a:solidFill>
+                <a:latin typeface="Calibri"/>
+                <a:ea typeface="Calibri"/>
+                <a:cs typeface="Calibri"/>
+              </a:rPr>
+              <a:t>ENGINEERING BENEFITS</a:t>
+            </a:r>
+          </a:p>
+        </p:txBody>
+      </p:sp>
+      <p:sp>
+        <p:nvSpPr>
+          <p:cNvPr id="24" name="ValList">
+            <a:extLst>
+              <a:ext uri="{FF2B5EF4-FFF2-40B4-BE49-F238E27FC236}">
+                <a16:creationId xmlns:a16="http://schemas.microsoft.com/office/drawing/2014/main" id="{8F2F53C0-A6EB-4C72-B492-9B0DAB6755D0}"/>
+              </a:ext>
+            </a:extLst>
+          </p:cNvPr>
+          <p:cNvSpPr txBox="1"/>
+          <p:nvPr/>
+        </p:nvSpPr>
+        <p:spPr>
+          <a:xfrm>
+            <a:off x="7112000" y="3987800"/>
+            <a:ext cx="4546600" cy="1244600"/>
+          </a:xfrm>
+          <a:prstGeom prst="rect">
+            <a:avLst/>
+          </a:prstGeom>
+          <a:noFill/>
+        </p:spPr>
+        <p:txBody>
+          <a:bodyPr vertOverflow="overflow" vert="horz" wrap="square" rtlCol="0" anchor="t" anchorCtr="0">
+            <a:noAutofit/>
+          </a:bodyPr>
+          <a:lstStyle/>
+          <a:p>
+            <a:pPr marL="170000" indent="-170000">
+              <a:lnSpc>
+                <a:spcPts val="1380"/>
+              </a:lnSpc>
+              <a:spcAft>
+                <a:spcPts val="200"/>
+              </a:spcAft>
+              <a:buClr>
+                <a:srgbClr val="1F9D55"/>
+              </a:buClr>
+              <a:buFont typeface="Arial"/>
+              <a:buChar char="✓"/>
             </a:pPr>
             <a:r>
               <a:rPr lang="en-IN" sz="1000" dirty="0">
                 <a:solidFill>
-                  <a:srgbClr val="0A7A8E"/>
-                </a:solidFill>
-                <a:latin typeface="Calibri" pitchFamily="34" charset="0"/>
-              </a:rPr>
-              <a:t>MPU6050 IMU</a:t>
-            </a:r>
-          </a:p>
-        </p:txBody>
-      </p:sp>
-      <p:sp>
-        <p:nvSpPr>
-          <p:cNvPr id="33" name="UltraBox"/>
-          <p:cNvSpPr>
-            <a:spLocks noGrp="1"/>
-          </p:cNvSpPr>
-          <p:nvPr/>
-        </p:nvSpPr>
-        <p:spPr>
-          <a:xfrm>
-            <a:off x="1841500" y="4394200"/>
-            <a:ext cx="1397000" cy="355600"/>
-          </a:xfrm>
-          <a:prstGeom prst="roundRect">
-            <a:avLst>
-              <a:gd name="adj" fmla="val 20000"/>
-            </a:avLst>
-          </a:prstGeom>
-          <a:solidFill>
-            <a:srgbClr val="E8F5F7"/>
-          </a:solidFill>
-          <a:ln w="9525">
+                  <a:srgbClr val="16223A"/>
+                </a:solidFill>
+                <a:latin typeface="Calibri"/>
+              </a:rPr>
+              <a:t>Multi-joint servo coordination</a:t>
+            </a:r>
+          </a:p>
+          <a:p>
+            <a:pPr marL="170000" indent="-170000">
+              <a:lnSpc>
+                <a:spcPts val="1380"/>
+              </a:lnSpc>
+              <a:spcAft>
+                <a:spcPts val="200"/>
+              </a:spcAft>
+              <a:buClr>
+                <a:srgbClr val="1F9D55"/>
+              </a:buClr>
+              <a:buFont typeface="Arial"/>
+              <a:buChar char="✓"/>
+            </a:pPr>
+            <a:r>
+              <a:rPr lang="en-IN" sz="1000" dirty="0">
+                <a:solidFill>
+                  <a:srgbClr val="16223A"/>
+                </a:solidFill>
+                <a:latin typeface="Calibri"/>
+              </a:rPr>
+              <a:t>Travelling-wave serpentine gait generation</a:t>
+            </a:r>
+          </a:p>
+          <a:p>
+            <a:pPr marL="170000" indent="-170000">
+              <a:lnSpc>
+                <a:spcPts val="1380"/>
+              </a:lnSpc>
+              <a:spcAft>
+                <a:spcPts val="200"/>
+              </a:spcAft>
+              <a:buClr>
+                <a:srgbClr val="1F9D55"/>
+              </a:buClr>
+              <a:buFont typeface="Arial"/>
+              <a:buChar char="✓"/>
+            </a:pPr>
+            <a:r>
+              <a:rPr lang="en-IN" sz="1000" dirty="0">
+                <a:solidFill>
+                  <a:srgbClr val="16223A"/>
+                </a:solidFill>
+                <a:latin typeface="Calibri"/>
+              </a:rPr>
+              <a:t>Obstacle detection via ultrasonic sensing</a:t>
+            </a:r>
+          </a:p>
+          <a:p>
+            <a:pPr marL="170000" indent="-170000">
+              <a:lnSpc>
+                <a:spcPts val="1380"/>
+              </a:lnSpc>
+              <a:spcAft>
+                <a:spcPts val="200"/>
+              </a:spcAft>
+              <a:buClr>
+                <a:srgbClr val="1F9D55"/>
+              </a:buClr>
+              <a:buFont typeface="Arial"/>
+              <a:buChar char="✓"/>
+            </a:pPr>
+            <a:r>
+              <a:rPr lang="en-IN" sz="1000" dirty="0">
+                <a:solidFill>
+                  <a:srgbClr val="16223A"/>
+                </a:solidFill>
+                <a:latin typeface="Calibri"/>
+              </a:rPr>
+              <a:t>IMU integration for orientation feedback</a:t>
+            </a:r>
+          </a:p>
+          <a:p>
+            <a:pPr marL="170000" indent="-170000">
+              <a:lnSpc>
+                <a:spcPts val="1380"/>
+              </a:lnSpc>
+              <a:spcAft>
+                <a:spcPts val="200"/>
+              </a:spcAft>
+              <a:buClr>
+                <a:srgbClr val="1F9D55"/>
+              </a:buClr>
+              <a:buFont typeface="Arial"/>
+              <a:buChar char="✓"/>
+            </a:pPr>
+            <a:r>
+              <a:rPr lang="en-IN" sz="1000" dirty="0">
+                <a:solidFill>
+                  <a:srgbClr val="16223A"/>
+                </a:solidFill>
+                <a:latin typeface="Calibri"/>
+              </a:rPr>
+              <a:t>OLED-based system status monitoring</a:t>
+            </a:r>
+          </a:p>
+          <a:p>
+            <a:pPr marL="170000" indent="-170000">
+              <a:lnSpc>
+                <a:spcPts val="1380"/>
+              </a:lnSpc>
+              <a:spcAft>
+                <a:spcPts val="200"/>
+              </a:spcAft>
+              <a:buClr>
+                <a:srgbClr val="1F9D55"/>
+              </a:buClr>
+              <a:buFont typeface="Arial"/>
+              <a:buChar char="✓"/>
+            </a:pPr>
+            <a:r>
+              <a:rPr lang="en-IN" sz="1000" dirty="0">
+                <a:solidFill>
+                  <a:srgbClr val="16223A"/>
+                </a:solidFill>
+                <a:latin typeface="Calibri"/>
+              </a:rPr>
+              <a:t>Sensor–controller–actuator communication</a:t>
+            </a:r>
+          </a:p>
+        </p:txBody>
+      </p:sp>
+      <p:sp>
+        <p:nvSpPr>
+          <p:cNvPr id="25" name="BenList">
+            <a:extLst>
+              <a:ext uri="{FF2B5EF4-FFF2-40B4-BE49-F238E27FC236}">
+                <a16:creationId xmlns:a16="http://schemas.microsoft.com/office/drawing/2014/main" id="{FF6D1A2A-EA57-464C-91D6-7133350B2A9C}"/>
+              </a:ext>
+            </a:extLst>
+          </p:cNvPr>
+          <p:cNvSpPr txBox="1"/>
+          <p:nvPr/>
+        </p:nvSpPr>
+        <p:spPr>
+          <a:xfrm>
+            <a:off x="7112000" y="5562600"/>
+            <a:ext cx="4546600" cy="609600"/>
+          </a:xfrm>
+          <a:prstGeom prst="rect">
+            <a:avLst/>
+          </a:prstGeom>
+          <a:noFill/>
+        </p:spPr>
+        <p:txBody>
+          <a:bodyPr vertOverflow="overflow" vert="horz" wrap="square" rtlCol="0" anchor="t" anchorCtr="0">
+            <a:noAutofit/>
+          </a:bodyPr>
+          <a:lstStyle/>
+          <a:p>
+            <a:pPr marL="150000" indent="-150000">
+              <a:lnSpc>
+                <a:spcPts val="1180"/>
+              </a:lnSpc>
+              <a:spcAft>
+                <a:spcPts val="150"/>
+              </a:spcAft>
+              <a:buFont typeface="Arial"/>
+              <a:buChar char="•"/>
+            </a:pPr>
+            <a:r>
+              <a:rPr lang="en-IN" sz="950" dirty="0">
+                <a:solidFill>
+                  <a:srgbClr val="16223A"/>
+                </a:solidFill>
+                <a:latin typeface="Calibri"/>
+              </a:rPr>
+              <a:t>Reduced dependence on hardware delivery timelines</a:t>
+            </a:r>
+          </a:p>
+          <a:p>
+            <a:pPr marL="150000" indent="-150000">
+              <a:lnSpc>
+                <a:spcPts val="1180"/>
+              </a:lnSpc>
+              <a:spcAft>
+                <a:spcPts val="150"/>
+              </a:spcAft>
+              <a:buFont typeface="Arial"/>
+              <a:buChar char="•"/>
+            </a:pPr>
+            <a:r>
+              <a:rPr lang="en-IN" sz="950" dirty="0">
+                <a:solidFill>
+                  <a:srgbClr val="16223A"/>
+                </a:solidFill>
+                <a:latin typeface="Calibri"/>
+              </a:rPr>
+              <a:t>Enabled early software debugging &amp; control-architecture verification</a:t>
+            </a:r>
+          </a:p>
+          <a:p>
+            <a:pPr marL="150000" indent="-150000">
+              <a:lnSpc>
+                <a:spcPts val="1180"/>
+              </a:lnSpc>
+              <a:spcAft>
+                <a:spcPts val="150"/>
+              </a:spcAft>
+              <a:buFont typeface="Arial"/>
+              <a:buChar char="•"/>
+            </a:pPr>
+            <a:r>
+              <a:rPr lang="en-IN" sz="950" dirty="0">
+                <a:solidFill>
+                  <a:srgbClr val="16223A"/>
+                </a:solidFill>
+                <a:latin typeface="Calibri"/>
+              </a:rPr>
+              <a:t>Established migration path to Raspberry Pi 5 + Dynamixel XL330, reducing integration risk</a:t>
+            </a:r>
+          </a:p>
+        </p:txBody>
+      </p:sp>
+      <p:sp>
+        <p:nvSpPr>
+          <p:cNvPr id="26" name="OutcomeBox">
+            <a:extLst>
+              <a:ext uri="{FF2B5EF4-FFF2-40B4-BE49-F238E27FC236}">
+                <a16:creationId xmlns:a16="http://schemas.microsoft.com/office/drawing/2014/main" id="{A1111AB1-B2DD-4A6B-94F7-1E0F10B973B3}"/>
+              </a:ext>
+            </a:extLst>
+          </p:cNvPr>
+          <p:cNvSpPr/>
+          <p:nvPr/>
+        </p:nvSpPr>
+        <p:spPr>
+          <a:xfrm>
+            <a:off x="7112000" y="6248400"/>
+            <a:ext cx="4546600" cy="508000"/>
+          </a:xfrm>
+          <a:prstGeom prst="rect">
+            <a:avLst/>
+          </a:prstGeom>
+          <a:solidFill>
+            <a:srgbClr val="EAF7FA"/>
+          </a:solidFill>
+          <a:ln w="19050" cap="flat" cmpd="sng" algn="ctr">
             <a:solidFill>
               <a:srgbClr val="0E96AC"/>
             </a:solidFill>
-          </a:ln>
-        </p:spPr>
-        <p:txBody>
-          <a:bodyPr/>
-          <a:lstStyle/>
-          <a:p>
-            <a:pPr marL="0" indent="0" algn="ctr">
-              <a:buNone/>
-            </a:pPr>
-            <a:r>
-              <a:rPr lang="en-IN" sz="1000" dirty="0">
-                <a:solidFill>
-                  <a:srgbClr val="0A7A8E"/>
-                </a:solidFill>
-                <a:latin typeface="Calibri" pitchFamily="34" charset="0"/>
-              </a:rPr>
-              <a:t>HC-SR04 Sonar</a:t>
-            </a:r>
-          </a:p>
-        </p:txBody>
-      </p:sp>
-      <p:sp>
-        <p:nvSpPr>
-          <p:cNvPr id="34" name="OLEDBox"/>
-          <p:cNvSpPr>
-            <a:spLocks noGrp="1"/>
-          </p:cNvSpPr>
-          <p:nvPr/>
-        </p:nvSpPr>
-        <p:spPr>
-          <a:xfrm>
-            <a:off x="3327400" y="4394200"/>
-            <a:ext cx="1397000" cy="355600"/>
-          </a:xfrm>
-          <a:prstGeom prst="roundRect">
-            <a:avLst>
-              <a:gd name="adj" fmla="val 20000"/>
-            </a:avLst>
-          </a:prstGeom>
-          <a:solidFill>
-            <a:srgbClr val="E8F5F7"/>
-          </a:solidFill>
-          <a:ln w="9525">
-            <a:solidFill>
-              <a:srgbClr val="0E96AC"/>
-            </a:solidFill>
-          </a:ln>
-        </p:spPr>
-        <p:txBody>
-          <a:bodyPr/>
-          <a:lstStyle/>
-          <a:p>
-            <a:pPr marL="0" indent="0" algn="ctr">
-              <a:buNone/>
-            </a:pPr>
-            <a:r>
-              <a:rPr lang="en-IN" sz="1000" dirty="0">
-                <a:solidFill>
-                  <a:srgbClr val="0A7A8E"/>
-                </a:solidFill>
-                <a:latin typeface="Calibri" pitchFamily="34" charset="0"/>
-              </a:rPr>
-              <a:t>SSD1306 OLED</a:t>
-            </a:r>
-          </a:p>
-        </p:txBody>
-      </p:sp>
-      <p:sp>
-        <p:nvSpPr>
-          <p:cNvPr id="35" name="NoteBox"/>
-          <p:cNvSpPr>
-            <a:spLocks noGrp="1"/>
-          </p:cNvSpPr>
-          <p:nvPr/>
-        </p:nvSpPr>
-        <p:spPr>
-          <a:xfrm>
-            <a:off x="533400" y="4889500"/>
-            <a:ext cx="4191000" cy="635000"/>
-          </a:xfrm>
-          <a:prstGeom prst="roundRect">
-            <a:avLst>
-              <a:gd name="adj" fmla="val 20000"/>
-            </a:avLst>
-          </a:prstGeom>
-          <a:solidFill>
-            <a:srgbClr val="FFF8E1"/>
-          </a:solidFill>
-          <a:ln w="9525">
-            <a:solidFill>
-              <a:srgbClr val="E6AC00"/>
-            </a:solidFill>
-          </a:ln>
-        </p:spPr>
-        <p:txBody>
-          <a:bodyPr/>
-          <a:lstStyle/>
-          <a:p>
-            <a:pPr marL="0" indent="0" algn="l">
-              <a:buNone/>
-            </a:pPr>
-            <a:r>
-              <a:rPr lang="en-IN" sz="1000" b="1" dirty="0">
-                <a:solidFill>
-                  <a:srgbClr val="B87900"/>
-                </a:solidFill>
-                <a:latin typeface="Calibri" pitchFamily="34" charset="0"/>
-              </a:rPr>
-              <a:t>NOTE</a:t>
-            </a:r>
-          </a:p>
+            <a:prstDash val="solid"/>
+            <a:miter lim="800000"/>
+          </a:ln>
+        </p:spPr>
+        <p:style>
+          <a:lnRef idx="2">
+            <a:schemeClr val="accent1">
+              <a:shade val="15000"/>
+            </a:schemeClr>
+          </a:lnRef>
+          <a:fillRef idx="1">
+            <a:schemeClr val="accent1"/>
+          </a:fillRef>
+          <a:effectRef idx="0">
+            <a:schemeClr val="accent1"/>
+          </a:effectRef>
+          <a:fontRef idx="minor">
+            <a:schemeClr val="lt1"/>
+          </a:fontRef>
+        </p:style>
+        <p:txBody>
+          <a:bodyPr vertOverflow="clip" horzOverflow="clip" wrap="square" rtlCol="0" anchor="ctr" anchorCtr="0">
+            <a:noAutofit/>
+          </a:bodyPr>
+          <a:lstStyle/>
           <a:p>
             <a:pPr marL="0" indent="0">
               <a:buNone/>
             </a:pPr>
             <a:r>
-              <a:rPr lang="en-IN" sz="1000" dirty="0">
-                <a:solidFill>
-                  <a:srgbClr val="555E6F"/>
-                </a:solidFill>
-                <a:latin typeface="Calibri" pitchFamily="34" charset="0"/>
-              </a:rPr>
-              <a:t>Simulation platform created to validate software</a:t>
-            </a:r>
-          </a:p>
-          <a:p>
-            <a:pPr marL="0" indent="0">
-              <a:buNone/>
-            </a:pPr>
-            <a:r>
-              <a:rPr lang="en-IN" sz="1000" dirty="0">
-                <a:solidFill>
-                  <a:srgbClr val="555E6F"/>
-                </a:solidFill>
-                <a:latin typeface="Calibri" pitchFamily="34" charset="0"/>
-              </a:rPr>
-              <a:t>architecture before Dynamixel hardware arrival.</a:t>
-            </a:r>
-          </a:p>
-        </p:txBody>
-      </p:sp>
-      <p:sp>
-        <p:nvSpPr>
-          <p:cNvPr id="40" name="ColSep"/>
-          <p:cNvSpPr>
-            <a:spLocks noGrp="1"/>
-          </p:cNvSpPr>
-          <p:nvPr/>
-        </p:nvSpPr>
-        <p:spPr>
-          <a:xfrm>
-            <a:off x="4902200" y="1143000"/>
-            <a:ext cx="12700" cy="4572000"/>
-          </a:xfrm>
-          <a:prstGeom prst="rect">
-            <a:avLst/>
-          </a:prstGeom>
-          <a:solidFill>
-            <a:srgbClr val="D0D7E5"/>
-          </a:solidFill>
-          <a:ln>
-            <a:noFill/>
-          </a:ln>
-        </p:spPr>
-        <p:txBody>
-          <a:bodyPr/>
-          <a:lstStyle/>
-          <a:p>
-            <a:endParaRPr/>
-          </a:p>
-        </p:txBody>
-      </p:sp>
-      <p:sp>
-        <p:nvSpPr>
-          <p:cNvPr id="50" name="RightHeader"/>
-          <p:cNvSpPr>
-            <a:spLocks noGrp="1"/>
-          </p:cNvSpPr>
-          <p:nvPr/>
-        </p:nvSpPr>
-        <p:spPr>
-          <a:xfrm>
-            <a:off x="5029200" y="1143000"/>
-            <a:ext cx="6985000" cy="279400"/>
-          </a:xfrm>
-          <a:prstGeom prst="rect">
-            <a:avLst/>
-          </a:prstGeom>
-          <a:solidFill>
-            <a:srgbClr val="16223A"/>
-          </a:solidFill>
-          <a:ln>
-            <a:noFill/>
-          </a:ln>
-        </p:spPr>
-        <p:txBody>
-          <a:bodyPr/>
-          <a:lstStyle/>
-          <a:p>
-            <a:pPr marL="0" indent="0" algn="l">
-              <a:buNone/>
-            </a:pPr>
-            <a:r>
-              <a:rPr lang="en-IN" sz="1200" b="1" dirty="0">
-                <a:solidFill>
-                  <a:srgbClr val="FFFFFF"/>
-                </a:solidFill>
-                <a:latin typeface="Calibri" pitchFamily="34" charset="0"/>
-              </a:rPr>
-              <a:t>WORK COMPLETED</a:t>
-            </a:r>
-          </a:p>
-        </p:txBody>
-      </p:sp>
-      <p:sp>
-        <p:nvSpPr>
-          <p:cNvPr id="60" name="AchCard0"/>
-          <p:cNvSpPr>
-            <a:spLocks noGrp="1"/>
-          </p:cNvSpPr>
-          <p:nvPr/>
-        </p:nvSpPr>
-        <p:spPr>
-          <a:xfrm>
-            <a:off x="5029200" y="1549400"/>
-            <a:ext cx="6959600" cy="482600"/>
-          </a:xfrm>
-          <a:prstGeom prst="roundRect">
-            <a:avLst>
-              <a:gd name="adj" fmla="val 20000"/>
-            </a:avLst>
-          </a:prstGeom>
-          <a:solidFill>
-            <a:srgbClr val="FFFFFF"/>
-          </a:solidFill>
-          <a:ln w="9525">
-            <a:solidFill>
-              <a:srgbClr val="D0D7E5"/>
-            </a:solidFill>
-          </a:ln>
-        </p:spPr>
-        <p:txBody>
-          <a:bodyPr/>
-          <a:lstStyle/>
-          <a:p>
-            <a:endParaRPr/>
-          </a:p>
-        </p:txBody>
-      </p:sp>
-      <p:sp>
-        <p:nvSpPr>
-          <p:cNvPr id="61" name="AchCheck0"/>
-          <p:cNvSpPr/>
-          <p:nvPr/>
-        </p:nvSpPr>
-        <p:spPr>
-          <a:xfrm>
-            <a:off x="5130800" y="1663700"/>
-            <a:ext cx="254000" cy="254000"/>
-          </a:xfrm>
-          <a:prstGeom prst="ellipse">
-            <a:avLst/>
-          </a:prstGeom>
-          <a:solidFill>
-            <a:srgbClr val="0E96AC"/>
-          </a:solidFill>
-          <a:ln>
-            <a:noFill/>
-          </a:ln>
-        </p:spPr>
-        <p:txBody>
-          <a:bodyPr anchor="ctr" anchorCtr="1">
-            <a:normAutofit fontScale="70000" lnSpcReduction="20000"/>
-          </a:bodyPr>
-          <a:lstStyle/>
-          <a:p>
-            <a:pPr algn="ctr">
-              <a:buNone/>
-            </a:pPr>
-            <a:r>
-              <a:rPr lang="en-IN" sz="1000" b="1" dirty="0">
-                <a:solidFill>
-                  <a:srgbClr val="FFFFFF"/>
-                </a:solidFill>
-                <a:latin typeface="Calibri" pitchFamily="34" charset="0"/>
-              </a:rPr>
-              <a:t>✓</a:t>
-            </a:r>
-          </a:p>
-        </p:txBody>
-      </p:sp>
-      <p:sp>
-        <p:nvSpPr>
-          <p:cNvPr id="62" name="AchText0"/>
-          <p:cNvSpPr>
-            <a:spLocks noGrp="1"/>
-          </p:cNvSpPr>
-          <p:nvPr/>
-        </p:nvSpPr>
-        <p:spPr>
-          <a:xfrm>
-            <a:off x="5486400" y="1612900"/>
-            <a:ext cx="6426200" cy="355600"/>
-          </a:xfrm>
-          <a:prstGeom prst="rect">
-            <a:avLst/>
-          </a:prstGeom>
-          <a:noFill/>
-          <a:ln>
-            <a:noFill/>
-          </a:ln>
-        </p:spPr>
-        <p:txBody>
-          <a:bodyPr/>
-          <a:lstStyle/>
-          <a:p>
-            <a:pPr marL="0" indent="0" algn="l">
-              <a:buNone/>
-            </a:pPr>
-            <a:r>
-              <a:rPr lang="en-IN" sz="1200" dirty="0">
+              <a:rPr lang="en-IN" sz="950" b="1" dirty="0">
+                <a:solidFill>
+                  <a:srgbClr val="0A7A8E"/>
+                </a:solidFill>
+                <a:latin typeface="Calibri"/>
+              </a:rPr>
+              <a:t>KEY OUTCOME  </a:t>
+            </a:r>
+            <a:r>
+              <a:rPr lang="en-IN" sz="950" dirty="0">
                 <a:solidFill>
                   <a:srgbClr val="16223A"/>
                 </a:solidFill>
-                <a:latin typeface="Calibri" pitchFamily="34" charset="0"/>
-              </a:rPr>
-              <a:t>Multi-joint locomotion simulation implemented</a:t>
-            </a:r>
-          </a:p>
-        </p:txBody>
-      </p:sp>
-      <p:sp>
-        <p:nvSpPr>
-          <p:cNvPr id="63" name="AchCard1"/>
-          <p:cNvSpPr>
-            <a:spLocks noGrp="1"/>
-          </p:cNvSpPr>
-          <p:nvPr/>
-        </p:nvSpPr>
-        <p:spPr>
-          <a:xfrm>
-            <a:off x="5029200" y="2108200"/>
-            <a:ext cx="6959600" cy="482600"/>
-          </a:xfrm>
-          <a:prstGeom prst="roundRect">
-            <a:avLst>
-              <a:gd name="adj" fmla="val 20000"/>
-            </a:avLst>
-          </a:prstGeom>
-          <a:solidFill>
-            <a:srgbClr val="FFFFFF"/>
-          </a:solidFill>
-          <a:ln w="9525">
-            <a:solidFill>
-              <a:srgbClr val="D0D7E5"/>
-            </a:solidFill>
-          </a:ln>
-        </p:spPr>
-        <p:txBody>
-          <a:bodyPr/>
-          <a:lstStyle/>
-          <a:p>
-            <a:endParaRPr/>
-          </a:p>
-        </p:txBody>
-      </p:sp>
-      <p:sp>
-        <p:nvSpPr>
-          <p:cNvPr id="64" name="AchCheck1"/>
-          <p:cNvSpPr/>
-          <p:nvPr/>
-        </p:nvSpPr>
-        <p:spPr>
-          <a:xfrm>
-            <a:off x="5130800" y="2222500"/>
-            <a:ext cx="254000" cy="254000"/>
-          </a:xfrm>
-          <a:prstGeom prst="ellipse">
-            <a:avLst/>
-          </a:prstGeom>
-          <a:solidFill>
-            <a:srgbClr val="0E96AC"/>
-          </a:solidFill>
-          <a:ln>
-            <a:noFill/>
-          </a:ln>
-        </p:spPr>
-        <p:txBody>
-          <a:bodyPr anchor="ctr" anchorCtr="1">
-            <a:normAutofit fontScale="70000" lnSpcReduction="20000"/>
-          </a:bodyPr>
-          <a:lstStyle/>
-          <a:p>
-            <a:pPr algn="ctr">
-              <a:buNone/>
-            </a:pPr>
-            <a:r>
-              <a:rPr lang="en-IN" sz="1000" b="1" dirty="0">
-                <a:solidFill>
-                  <a:srgbClr val="FFFFFF"/>
-                </a:solidFill>
-                <a:latin typeface="Calibri" pitchFamily="34" charset="0"/>
-              </a:rPr>
-              <a:t>✓</a:t>
-            </a:r>
-          </a:p>
-        </p:txBody>
-      </p:sp>
-      <p:sp>
-        <p:nvSpPr>
-          <p:cNvPr id="65" name="AchText1"/>
-          <p:cNvSpPr>
-            <a:spLocks noGrp="1"/>
-          </p:cNvSpPr>
-          <p:nvPr/>
-        </p:nvSpPr>
-        <p:spPr>
-          <a:xfrm>
-            <a:off x="5486400" y="2171700"/>
-            <a:ext cx="6426200" cy="355600"/>
-          </a:xfrm>
-          <a:prstGeom prst="rect">
-            <a:avLst/>
-          </a:prstGeom>
-          <a:noFill/>
-          <a:ln>
-            <a:noFill/>
-          </a:ln>
-        </p:spPr>
-        <p:txBody>
-          <a:bodyPr/>
-          <a:lstStyle/>
-          <a:p>
-            <a:pPr marL="0" indent="0" algn="l">
-              <a:buNone/>
-            </a:pPr>
-            <a:r>
-              <a:rPr lang="en-IN" sz="1200" dirty="0">
-                <a:solidFill>
-                  <a:srgbClr val="16223A"/>
-                </a:solidFill>
-                <a:latin typeface="Calibri" pitchFamily="34" charset="0"/>
-              </a:rPr>
-              <a:t>Travelling-wave serpentine gait generation developed</a:t>
-            </a:r>
-          </a:p>
-        </p:txBody>
-      </p:sp>
-      <p:sp>
-        <p:nvSpPr>
-          <p:cNvPr id="66" name="AchCard2"/>
-          <p:cNvSpPr>
-            <a:spLocks noGrp="1"/>
-          </p:cNvSpPr>
-          <p:nvPr/>
-        </p:nvSpPr>
-        <p:spPr>
-          <a:xfrm>
-            <a:off x="5029200" y="2667000"/>
-            <a:ext cx="6959600" cy="482600"/>
-          </a:xfrm>
-          <a:prstGeom prst="roundRect">
-            <a:avLst>
-              <a:gd name="adj" fmla="val 20000"/>
-            </a:avLst>
-          </a:prstGeom>
-          <a:solidFill>
-            <a:srgbClr val="FFFFFF"/>
-          </a:solidFill>
-          <a:ln w="9525">
-            <a:solidFill>
-              <a:srgbClr val="D0D7E5"/>
-            </a:solidFill>
-          </a:ln>
-        </p:spPr>
-        <p:txBody>
-          <a:bodyPr/>
-          <a:lstStyle/>
-          <a:p>
-            <a:endParaRPr/>
-          </a:p>
-        </p:txBody>
-      </p:sp>
-      <p:sp>
-        <p:nvSpPr>
-          <p:cNvPr id="67" name="AchCheck2"/>
-          <p:cNvSpPr/>
-          <p:nvPr/>
-        </p:nvSpPr>
-        <p:spPr>
-          <a:xfrm>
-            <a:off x="5130800" y="2781300"/>
-            <a:ext cx="254000" cy="254000"/>
-          </a:xfrm>
-          <a:prstGeom prst="ellipse">
-            <a:avLst/>
-          </a:prstGeom>
-          <a:solidFill>
-            <a:srgbClr val="0E96AC"/>
-          </a:solidFill>
-          <a:ln>
-            <a:noFill/>
-          </a:ln>
-        </p:spPr>
-        <p:txBody>
-          <a:bodyPr anchor="ctr" anchorCtr="1">
-            <a:normAutofit fontScale="70000" lnSpcReduction="20000"/>
-          </a:bodyPr>
-          <a:lstStyle/>
-          <a:p>
-            <a:pPr algn="ctr">
-              <a:buNone/>
-            </a:pPr>
-            <a:r>
-              <a:rPr lang="en-IN" sz="1000" b="1" dirty="0">
-                <a:solidFill>
-                  <a:srgbClr val="FFFFFF"/>
-                </a:solidFill>
-                <a:latin typeface="Calibri" pitchFamily="34" charset="0"/>
-              </a:rPr>
-              <a:t>✓</a:t>
-            </a:r>
-          </a:p>
-        </p:txBody>
-      </p:sp>
-      <p:sp>
-        <p:nvSpPr>
-          <p:cNvPr id="68" name="AchText2"/>
-          <p:cNvSpPr>
-            <a:spLocks noGrp="1"/>
-          </p:cNvSpPr>
-          <p:nvPr/>
-        </p:nvSpPr>
-        <p:spPr>
-          <a:xfrm>
-            <a:off x="5486400" y="2730500"/>
-            <a:ext cx="6426200" cy="355600"/>
-          </a:xfrm>
-          <a:prstGeom prst="rect">
-            <a:avLst/>
-          </a:prstGeom>
-          <a:noFill/>
-          <a:ln>
-            <a:noFill/>
-          </a:ln>
-        </p:spPr>
-        <p:txBody>
-          <a:bodyPr/>
-          <a:lstStyle/>
-          <a:p>
-            <a:pPr marL="0" indent="0" algn="l">
-              <a:buNone/>
-            </a:pPr>
-            <a:r>
-              <a:rPr lang="en-IN" sz="1200" dirty="0">
-                <a:solidFill>
-                  <a:srgbClr val="16223A"/>
-                </a:solidFill>
-                <a:latin typeface="Calibri" pitchFamily="34" charset="0"/>
-              </a:rPr>
-              <a:t>Obstacle detection framework integrated (ultrasonic)</a:t>
-            </a:r>
-          </a:p>
-        </p:txBody>
-      </p:sp>
-      <p:sp>
-        <p:nvSpPr>
-          <p:cNvPr id="69" name="AchCard3"/>
-          <p:cNvSpPr>
-            <a:spLocks noGrp="1"/>
-          </p:cNvSpPr>
-          <p:nvPr/>
-        </p:nvSpPr>
-        <p:spPr>
-          <a:xfrm>
-            <a:off x="5029200" y="3225800"/>
-            <a:ext cx="6959600" cy="482600"/>
-          </a:xfrm>
-          <a:prstGeom prst="roundRect">
-            <a:avLst>
-              <a:gd name="adj" fmla="val 20000"/>
-            </a:avLst>
-          </a:prstGeom>
-          <a:solidFill>
-            <a:srgbClr val="FFFFFF"/>
-          </a:solidFill>
-          <a:ln w="9525">
-            <a:solidFill>
-              <a:srgbClr val="D0D7E5"/>
-            </a:solidFill>
-          </a:ln>
-        </p:spPr>
-        <p:txBody>
-          <a:bodyPr/>
-          <a:lstStyle/>
-          <a:p>
-            <a:endParaRPr/>
-          </a:p>
-        </p:txBody>
-      </p:sp>
-      <p:sp>
-        <p:nvSpPr>
-          <p:cNvPr id="70" name="AchCheck3"/>
-          <p:cNvSpPr/>
-          <p:nvPr/>
-        </p:nvSpPr>
-        <p:spPr>
-          <a:xfrm>
-            <a:off x="5130800" y="3340100"/>
-            <a:ext cx="254000" cy="254000"/>
-          </a:xfrm>
-          <a:prstGeom prst="ellipse">
-            <a:avLst/>
-          </a:prstGeom>
-          <a:solidFill>
-            <a:srgbClr val="0E96AC"/>
-          </a:solidFill>
-          <a:ln>
-            <a:noFill/>
-          </a:ln>
-        </p:spPr>
-        <p:txBody>
-          <a:bodyPr anchor="ctr" anchorCtr="1">
-            <a:normAutofit fontScale="70000" lnSpcReduction="20000"/>
-          </a:bodyPr>
-          <a:lstStyle/>
-          <a:p>
-            <a:pPr algn="ctr">
-              <a:buNone/>
-            </a:pPr>
-            <a:r>
-              <a:rPr lang="en-IN" sz="1000" b="1" dirty="0">
-                <a:solidFill>
-                  <a:srgbClr val="FFFFFF"/>
-                </a:solidFill>
-                <a:latin typeface="Calibri" pitchFamily="34" charset="0"/>
-              </a:rPr>
-              <a:t>✓</a:t>
-            </a:r>
-          </a:p>
-        </p:txBody>
-      </p:sp>
-      <p:sp>
-        <p:nvSpPr>
-          <p:cNvPr id="71" name="AchText3"/>
-          <p:cNvSpPr>
-            <a:spLocks noGrp="1"/>
-          </p:cNvSpPr>
-          <p:nvPr/>
-        </p:nvSpPr>
-        <p:spPr>
-          <a:xfrm>
-            <a:off x="5486400" y="3289300"/>
-            <a:ext cx="6426200" cy="355600"/>
-          </a:xfrm>
-          <a:prstGeom prst="rect">
-            <a:avLst/>
-          </a:prstGeom>
-          <a:noFill/>
-          <a:ln>
-            <a:noFill/>
-          </a:ln>
-        </p:spPr>
-        <p:txBody>
-          <a:bodyPr/>
-          <a:lstStyle/>
-          <a:p>
-            <a:pPr marL="0" indent="0" algn="l">
-              <a:buNone/>
-            </a:pPr>
-            <a:r>
-              <a:rPr lang="en-IN" sz="1200" dirty="0">
-                <a:solidFill>
-                  <a:srgbClr val="16223A"/>
-                </a:solidFill>
-                <a:latin typeface="Calibri" pitchFamily="34" charset="0"/>
-              </a:rPr>
-              <a:t>IMU integration prepared for orientation feedback</a:t>
-            </a:r>
-          </a:p>
-        </p:txBody>
-      </p:sp>
-      <p:sp>
-        <p:nvSpPr>
-          <p:cNvPr id="72" name="AchCard4"/>
-          <p:cNvSpPr>
-            <a:spLocks noGrp="1"/>
-          </p:cNvSpPr>
-          <p:nvPr/>
-        </p:nvSpPr>
-        <p:spPr>
-          <a:xfrm>
-            <a:off x="5029200" y="3784600"/>
-            <a:ext cx="6959600" cy="482600"/>
-          </a:xfrm>
-          <a:prstGeom prst="roundRect">
-            <a:avLst>
-              <a:gd name="adj" fmla="val 20000"/>
-            </a:avLst>
-          </a:prstGeom>
-          <a:solidFill>
-            <a:srgbClr val="FFFFFF"/>
-          </a:solidFill>
-          <a:ln w="9525">
-            <a:solidFill>
-              <a:srgbClr val="D0D7E5"/>
-            </a:solidFill>
-          </a:ln>
-        </p:spPr>
-        <p:txBody>
-          <a:bodyPr/>
-          <a:lstStyle/>
-          <a:p>
-            <a:endParaRPr/>
-          </a:p>
-        </p:txBody>
-      </p:sp>
-      <p:sp>
-        <p:nvSpPr>
-          <p:cNvPr id="73" name="AchCheck4"/>
-          <p:cNvSpPr/>
-          <p:nvPr/>
-        </p:nvSpPr>
-        <p:spPr>
-          <a:xfrm>
-            <a:off x="5130800" y="3898900"/>
-            <a:ext cx="254000" cy="254000"/>
-          </a:xfrm>
-          <a:prstGeom prst="ellipse">
-            <a:avLst/>
-          </a:prstGeom>
-          <a:solidFill>
-            <a:srgbClr val="0E96AC"/>
-          </a:solidFill>
-          <a:ln>
-            <a:noFill/>
-          </a:ln>
-        </p:spPr>
-        <p:txBody>
-          <a:bodyPr anchor="ctr" anchorCtr="1">
-            <a:normAutofit fontScale="70000" lnSpcReduction="20000"/>
-          </a:bodyPr>
-          <a:lstStyle/>
-          <a:p>
-            <a:pPr algn="ctr">
-              <a:buNone/>
-            </a:pPr>
-            <a:r>
-              <a:rPr lang="en-IN" sz="1000" b="1" dirty="0">
-                <a:solidFill>
-                  <a:srgbClr val="FFFFFF"/>
-                </a:solidFill>
-                <a:latin typeface="Calibri" pitchFamily="34" charset="0"/>
-              </a:rPr>
-              <a:t>✓</a:t>
-            </a:r>
-          </a:p>
-        </p:txBody>
-      </p:sp>
-      <p:sp>
-        <p:nvSpPr>
-          <p:cNvPr id="74" name="AchText4"/>
-          <p:cNvSpPr>
-            <a:spLocks noGrp="1"/>
-          </p:cNvSpPr>
-          <p:nvPr/>
-        </p:nvSpPr>
-        <p:spPr>
-          <a:xfrm>
-            <a:off x="5486400" y="3848100"/>
-            <a:ext cx="6426200" cy="355600"/>
-          </a:xfrm>
-          <a:prstGeom prst="rect">
-            <a:avLst/>
-          </a:prstGeom>
-          <a:noFill/>
-          <a:ln>
-            <a:noFill/>
-          </a:ln>
-        </p:spPr>
-        <p:txBody>
-          <a:bodyPr/>
-          <a:lstStyle/>
-          <a:p>
-            <a:pPr marL="0" indent="0" algn="l">
-              <a:buNone/>
-            </a:pPr>
-            <a:r>
-              <a:rPr lang="en-IN" sz="1200" dirty="0">
-                <a:solidFill>
-                  <a:srgbClr val="16223A"/>
-                </a:solidFill>
-                <a:latin typeface="Calibri" pitchFamily="34" charset="0"/>
-              </a:rPr>
-              <a:t>OLED status display integrated</a:t>
-            </a:r>
-          </a:p>
-        </p:txBody>
-      </p:sp>
-      <p:sp>
-        <p:nvSpPr>
-          <p:cNvPr id="75" name="AchCard5"/>
-          <p:cNvSpPr>
-            <a:spLocks noGrp="1"/>
-          </p:cNvSpPr>
-          <p:nvPr/>
-        </p:nvSpPr>
-        <p:spPr>
-          <a:xfrm>
-            <a:off x="5029200" y="4343400"/>
-            <a:ext cx="6959600" cy="482600"/>
-          </a:xfrm>
-          <a:prstGeom prst="roundRect">
-            <a:avLst>
-              <a:gd name="adj" fmla="val 20000"/>
-            </a:avLst>
-          </a:prstGeom>
-          <a:solidFill>
-            <a:srgbClr val="FFFFFF"/>
-          </a:solidFill>
-          <a:ln w="9525">
-            <a:solidFill>
-              <a:srgbClr val="D0D7E5"/>
-            </a:solidFill>
-          </a:ln>
-        </p:spPr>
-        <p:txBody>
-          <a:bodyPr/>
-          <a:lstStyle/>
-          <a:p>
-            <a:endParaRPr/>
-          </a:p>
-        </p:txBody>
-      </p:sp>
-      <p:sp>
-        <p:nvSpPr>
-          <p:cNvPr id="76" name="AchCheck5"/>
-          <p:cNvSpPr/>
-          <p:nvPr/>
-        </p:nvSpPr>
-        <p:spPr>
-          <a:xfrm>
-            <a:off x="5130800" y="4457700"/>
-            <a:ext cx="254000" cy="254000"/>
-          </a:xfrm>
-          <a:prstGeom prst="ellipse">
-            <a:avLst/>
-          </a:prstGeom>
-          <a:solidFill>
-            <a:srgbClr val="0E96AC"/>
-          </a:solidFill>
-          <a:ln>
-            <a:noFill/>
-          </a:ln>
-        </p:spPr>
-        <p:txBody>
-          <a:bodyPr anchor="ctr" anchorCtr="1">
-            <a:normAutofit fontScale="70000" lnSpcReduction="20000"/>
-          </a:bodyPr>
-          <a:lstStyle/>
-          <a:p>
-            <a:pPr algn="ctr">
-              <a:buNone/>
-            </a:pPr>
-            <a:r>
-              <a:rPr lang="en-IN" sz="1000" b="1" dirty="0">
-                <a:solidFill>
-                  <a:srgbClr val="FFFFFF"/>
-                </a:solidFill>
-                <a:latin typeface="Calibri" pitchFamily="34" charset="0"/>
-              </a:rPr>
-              <a:t>✓</a:t>
-            </a:r>
-          </a:p>
-        </p:txBody>
-      </p:sp>
-      <p:sp>
-        <p:nvSpPr>
-          <p:cNvPr id="77" name="AchText5"/>
-          <p:cNvSpPr>
-            <a:spLocks noGrp="1"/>
-          </p:cNvSpPr>
-          <p:nvPr/>
-        </p:nvSpPr>
-        <p:spPr>
-          <a:xfrm>
-            <a:off x="5486400" y="4406900"/>
-            <a:ext cx="6426200" cy="355600"/>
-          </a:xfrm>
-          <a:prstGeom prst="rect">
-            <a:avLst/>
-          </a:prstGeom>
-          <a:noFill/>
-          <a:ln>
-            <a:noFill/>
-          </a:ln>
-        </p:spPr>
-        <p:txBody>
-          <a:bodyPr/>
-          <a:lstStyle/>
-          <a:p>
-            <a:pPr marL="0" indent="0" algn="l">
-              <a:buNone/>
-            </a:pPr>
-            <a:r>
-              <a:rPr lang="en-IN" sz="1200" dirty="0">
-                <a:solidFill>
-                  <a:srgbClr val="16223A"/>
-                </a:solidFill>
-                <a:latin typeface="Calibri" pitchFamily="34" charset="0"/>
-              </a:rPr>
-              <a:t>Modular architecture designed for migration to RPi 5 + Dynamixel XL330</a:t>
-            </a:r>
-          </a:p>
-        </p:txBody>
-      </p:sp>
-      <p:sp>
-        <p:nvSpPr>
-          <p:cNvPr id="100" name="BottomDiv"/>
-          <p:cNvSpPr>
-            <a:spLocks noGrp="1"/>
-          </p:cNvSpPr>
-          <p:nvPr/>
-        </p:nvSpPr>
-        <p:spPr>
-          <a:xfrm>
-            <a:off x="533400" y="5740400"/>
-            <a:ext cx="11125200" cy="12700"/>
-          </a:xfrm>
-          <a:prstGeom prst="rect">
-            <a:avLst/>
-          </a:prstGeom>
-          <a:solidFill>
-            <a:srgbClr val="0E96AC"/>
-          </a:solidFill>
-          <a:ln>
-            <a:noFill/>
-          </a:ln>
-        </p:spPr>
-        <p:txBody>
-          <a:bodyPr/>
-          <a:lstStyle/>
-          <a:p>
-            <a:endParaRPr/>
-          </a:p>
-        </p:txBody>
-      </p:sp>
-      <p:sp>
-        <p:nvSpPr>
-          <p:cNvPr id="101" name="OutcomeBox"/>
-          <p:cNvSpPr>
-            <a:spLocks noGrp="1"/>
-          </p:cNvSpPr>
-          <p:nvPr/>
-        </p:nvSpPr>
-        <p:spPr>
-          <a:xfrm>
-            <a:off x="533400" y="5816600"/>
-            <a:ext cx="11125200" cy="635000"/>
-          </a:xfrm>
-          <a:prstGeom prst="roundRect">
-            <a:avLst>
-              <a:gd name="adj" fmla="val 20000"/>
-            </a:avLst>
-          </a:prstGeom>
-          <a:solidFill>
-            <a:srgbClr val="EAF7FA"/>
-          </a:solidFill>
-          <a:ln w="19050">
-            <a:solidFill>
-              <a:srgbClr val="0E96AC"/>
-            </a:solidFill>
-          </a:ln>
-        </p:spPr>
-        <p:txBody>
-          <a:bodyPr/>
-          <a:lstStyle/>
-          <a:p>
-            <a:pPr marL="0" indent="0">
-              <a:buNone/>
-            </a:pPr>
-            <a:r>
-              <a:rPr lang="en-IN" sz="1000" b="1" dirty="0">
-                <a:solidFill>
-                  <a:srgbClr val="0A7A8E"/>
-                </a:solidFill>
-                <a:latin typeface="Calibri" pitchFamily="34" charset="0"/>
-              </a:rPr>
-              <a:t>KEY OUTCOME  </a:t>
-            </a:r>
-            <a:r>
-              <a:rPr lang="en-IN" sz="1000" dirty="0">
-                <a:solidFill>
-                  <a:srgbClr val="16223A"/>
-                </a:solidFill>
-                <a:latin typeface="Calibri" pitchFamily="34" charset="0"/>
-              </a:rPr>
-              <a:t>A complete software-validation environment established to test locomotion, sensing, and control workflows before physical hardware arrival, reducing future integration risk.</a:t>
-            </a:r>
-          </a:p>
-          <a:p>
-            <a:pPr marL="0" indent="0">
-              <a:buNone/>
-            </a:pPr>
-            <a:r>
-              <a:rPr lang="en-IN" sz="950" i="1" dirty="0">
-                <a:solidFill>
-                  <a:srgbClr val="6B7280"/>
-                </a:solidFill>
-                <a:latin typeface="Calibri" pitchFamily="34" charset="0"/>
-              </a:rPr>
-              <a:t>Simulation-based development enables parallel software progress while Dynamixel actuators and communication hardware remain under procurement.</a:t>
+                <a:latin typeface="Calibri"/>
+              </a:rPr>
+              <a:t>A complete software-validation framework was developed, allowing locomotion, sensing, and control workflows to be tested before physical robot assembly.</a:t>
             </a:r>
           </a:p>
         </p:txBody>
@@ -11748,7 +11431,7 @@
     </p:spTree>
     <p:extLst>
       <p:ext uri="{BB962C8B-B14F-4D97-AF65-F5344CB8AC3E}">
-        <p14:creationId xmlns:p14="http://schemas.microsoft.com/office/powerpoint/2010/main" val="1705374684"/>
+        <p14:creationId xmlns:p14="http://schemas.microsoft.com/office/powerpoint/2010/main" val="37453613"/>
       </p:ext>
     </p:extLst>
   </p:cSld>
@@ -11761,6 +11444,16 @@
 <file path=ppt/slides/slide15.xml><?xml version="1.0" encoding="utf-8"?>
 <p:sld xmlns:a="http://schemas.openxmlformats.org/drawingml/2006/main" xmlns:r="http://schemas.openxmlformats.org/officeDocument/2006/relationships" xmlns:p="http://schemas.openxmlformats.org/presentationml/2006/main">
   <p:cSld>
+    <p:bg>
+      <p:bgPr>
+        <a:solidFill>
+          <a:srgbClr val="FFFFFF">
+            <a:alpha val="100000"/>
+          </a:srgbClr>
+        </a:solidFill>
+        <a:effectLst/>
+      </p:bgPr>
+    </p:bg>
     <p:spTree>
       <p:nvGrpSpPr>
         <p:cNvPr id="1" name=""/>
@@ -11775,10 +11468,2974 @@
           <a:chExt cx="0" cy="0"/>
         </a:xfrm>
       </p:grpSpPr>
+      <p:sp>
+        <p:nvSpPr>
+          <p:cNvPr id="2" name="TopBar">
+            <a:extLst>
+              <a:ext uri="{FF2B5EF4-FFF2-40B4-BE49-F238E27FC236}">
+                <a16:creationId xmlns:a16="http://schemas.microsoft.com/office/drawing/2014/main" id="{30ED9168-1A8D-46D3-AF26-084DB3ADAA2A}"/>
+              </a:ext>
+            </a:extLst>
+          </p:cNvPr>
+          <p:cNvSpPr/>
+          <p:nvPr/>
+        </p:nvSpPr>
+        <p:spPr>
+          <a:xfrm>
+            <a:off x="0" y="0"/>
+            <a:ext cx="12192000" cy="76200"/>
+          </a:xfrm>
+          <a:prstGeom prst="rect">
+            <a:avLst/>
+          </a:prstGeom>
+          <a:solidFill>
+            <a:srgbClr val="0E96AC"/>
+          </a:solidFill>
+          <a:ln w="12700" cap="flat" cmpd="sng" algn="ctr">
+            <a:noFill/>
+            <a:prstDash val="solid"/>
+            <a:miter lim="800000"/>
+          </a:ln>
+        </p:spPr>
+        <p:style>
+          <a:lnRef idx="2">
+            <a:schemeClr val="accent1">
+              <a:shade val="15000"/>
+            </a:schemeClr>
+          </a:lnRef>
+          <a:fillRef idx="1">
+            <a:schemeClr val="accent1"/>
+          </a:fillRef>
+          <a:effectRef idx="0">
+            <a:schemeClr val="accent1"/>
+          </a:effectRef>
+          <a:fontRef idx="minor">
+            <a:schemeClr val="lt1"/>
+          </a:fontRef>
+        </p:style>
+        <p:txBody>
+          <a:bodyPr vertOverflow="clip" horzOverflow="clip" rtlCol="0" anchor="t"/>
+          <a:lstStyle/>
+          <a:p>
+            <a:pPr algn="l"/>
+            <a:endParaRPr lang="en-IN"/>
+          </a:p>
+        </p:txBody>
+      </p:sp>
+      <p:sp>
+        <p:nvSpPr>
+          <p:cNvPr id="3" name="Eyebrow">
+            <a:extLst>
+              <a:ext uri="{FF2B5EF4-FFF2-40B4-BE49-F238E27FC236}">
+                <a16:creationId xmlns:a16="http://schemas.microsoft.com/office/drawing/2014/main" id="{18DBE4B9-D6CE-44B5-B1C7-914B242C66E1}"/>
+              </a:ext>
+            </a:extLst>
+          </p:cNvPr>
+          <p:cNvSpPr txBox="1"/>
+          <p:nvPr/>
+        </p:nvSpPr>
+        <p:spPr>
+          <a:xfrm>
+            <a:off x="533400" y="177800"/>
+            <a:ext cx="8890000" cy="228600"/>
+          </a:xfrm>
+          <a:prstGeom prst="rect">
+            <a:avLst/>
+          </a:prstGeom>
+          <a:noFill/>
+        </p:spPr>
+        <p:txBody>
+          <a:bodyPr vertOverflow="overflow" vert="horz" wrap="square" rtlCol="0" anchor="ctr" anchorCtr="0">
+            <a:spAutoFit/>
+          </a:bodyPr>
+          <a:lstStyle/>
+          <a:p>
+            <a:pPr algn="l"/>
+            <a:r>
+              <a:rPr lang="en-IN" sz="1100" b="1">
+                <a:solidFill>
+                  <a:srgbClr val="0E96AC"/>
+                </a:solidFill>
+                <a:latin typeface="Calibri"/>
+                <a:ea typeface="Calibri"/>
+                <a:cs typeface="Calibri"/>
+              </a:rPr>
+              <a:t>FUTURE WORK &amp; DEVELOPMENT ROADMAP</a:t>
+            </a:r>
+          </a:p>
+        </p:txBody>
+      </p:sp>
+      <p:sp>
+        <p:nvSpPr>
+          <p:cNvPr id="4" name="AccentLine">
+            <a:extLst>
+              <a:ext uri="{FF2B5EF4-FFF2-40B4-BE49-F238E27FC236}">
+                <a16:creationId xmlns:a16="http://schemas.microsoft.com/office/drawing/2014/main" id="{442F3D03-E326-4CE5-A515-22A546C90469}"/>
+              </a:ext>
+            </a:extLst>
+          </p:cNvPr>
+          <p:cNvSpPr/>
+          <p:nvPr/>
+        </p:nvSpPr>
+        <p:spPr>
+          <a:xfrm>
+            <a:off x="533400" y="431800"/>
+            <a:ext cx="11125200" cy="12700"/>
+          </a:xfrm>
+          <a:prstGeom prst="rect">
+            <a:avLst/>
+          </a:prstGeom>
+          <a:solidFill>
+            <a:srgbClr val="0E96AC"/>
+          </a:solidFill>
+          <a:ln w="12700" cap="flat" cmpd="sng" algn="ctr">
+            <a:noFill/>
+            <a:prstDash val="solid"/>
+            <a:miter lim="800000"/>
+          </a:ln>
+        </p:spPr>
+        <p:style>
+          <a:lnRef idx="2">
+            <a:schemeClr val="accent1">
+              <a:shade val="15000"/>
+            </a:schemeClr>
+          </a:lnRef>
+          <a:fillRef idx="1">
+            <a:schemeClr val="accent1"/>
+          </a:fillRef>
+          <a:effectRef idx="0">
+            <a:schemeClr val="accent1"/>
+          </a:effectRef>
+          <a:fontRef idx="minor">
+            <a:schemeClr val="lt1"/>
+          </a:fontRef>
+        </p:style>
+        <p:txBody>
+          <a:bodyPr vertOverflow="clip" horzOverflow="clip" rtlCol="0" anchor="t"/>
+          <a:lstStyle/>
+          <a:p>
+            <a:pPr algn="l"/>
+            <a:endParaRPr lang="en-IN"/>
+          </a:p>
+        </p:txBody>
+      </p:sp>
+      <p:sp>
+        <p:nvSpPr>
+          <p:cNvPr id="5" name="MainTitle">
+            <a:extLst>
+              <a:ext uri="{FF2B5EF4-FFF2-40B4-BE49-F238E27FC236}">
+                <a16:creationId xmlns:a16="http://schemas.microsoft.com/office/drawing/2014/main" id="{5EE60894-65EF-4387-A4AF-239835B25496}"/>
+              </a:ext>
+            </a:extLst>
+          </p:cNvPr>
+          <p:cNvSpPr txBox="1"/>
+          <p:nvPr/>
+        </p:nvSpPr>
+        <p:spPr>
+          <a:xfrm>
+            <a:off x="533400" y="508000"/>
+            <a:ext cx="11125200" cy="508000"/>
+          </a:xfrm>
+          <a:prstGeom prst="rect">
+            <a:avLst/>
+          </a:prstGeom>
+          <a:noFill/>
+        </p:spPr>
+        <p:txBody>
+          <a:bodyPr vertOverflow="overflow" vert="horz" wrap="square" rtlCol="0" anchor="ctr" anchorCtr="0">
+            <a:spAutoFit/>
+          </a:bodyPr>
+          <a:lstStyle/>
+          <a:p>
+            <a:pPr algn="l"/>
+            <a:r>
+              <a:rPr lang="en-US" sz="2400" b="1">
+                <a:solidFill>
+                  <a:srgbClr val="16223A"/>
+                </a:solidFill>
+                <a:latin typeface="Calibri"/>
+                <a:ea typeface="Calibri"/>
+                <a:cs typeface="Calibri"/>
+              </a:rPr>
+              <a:t>Planned Activities for the Next Development Phase</a:t>
+            </a:r>
+            <a:endParaRPr lang="en-IN" sz="2400" b="1">
+              <a:solidFill>
+                <a:srgbClr val="16223A"/>
+              </a:solidFill>
+              <a:latin typeface="Calibri"/>
+              <a:ea typeface="Calibri"/>
+              <a:cs typeface="Calibri"/>
+            </a:endParaRPr>
+          </a:p>
+        </p:txBody>
+      </p:sp>
+      <p:sp>
+        <p:nvSpPr>
+          <p:cNvPr id="201" name="Pill0"/>
+          <p:cNvSpPr/>
+          <p:nvPr/>
+        </p:nvSpPr>
+        <p:spPr>
+          <a:xfrm>
+            <a:off x="533400" y="1219200"/>
+            <a:ext cx="1752600" cy="584200"/>
+          </a:xfrm>
+          <a:prstGeom prst="roundRect">
+            <a:avLst/>
+          </a:prstGeom>
+          <a:solidFill>
+            <a:srgbClr val="1F9D55"/>
+          </a:solidFill>
+          <a:ln>
+            <a:noFill/>
+          </a:ln>
+        </p:spPr>
+        <p:txBody>
+          <a:bodyPr/>
+          <a:lstStyle/>
+          <a:p>
+            <a:endParaRPr/>
+          </a:p>
+        </p:txBody>
+      </p:sp>
+      <p:sp>
+        <p:nvSpPr>
+          <p:cNvPr id="202" name="Num0"/>
+          <p:cNvSpPr/>
+          <p:nvPr/>
+        </p:nvSpPr>
+        <p:spPr>
+          <a:xfrm>
+            <a:off x="635000" y="1346200"/>
+            <a:ext cx="330200" cy="330200"/>
+          </a:xfrm>
+          <a:prstGeom prst="ellipse">
+            <a:avLst/>
+          </a:prstGeom>
+          <a:solidFill>
+            <a:srgbClr val="FFFFFF"/>
+          </a:solidFill>
+          <a:ln>
+            <a:noFill/>
+          </a:ln>
+        </p:spPr>
+        <p:txBody>
+          <a:bodyPr/>
+          <a:lstStyle/>
+          <a:p>
+            <a:endParaRPr/>
+          </a:p>
+        </p:txBody>
+      </p:sp>
+      <p:sp>
+        <p:nvSpPr>
+          <p:cNvPr id="203" name="NumT0"/>
+          <p:cNvSpPr txBox="1"/>
+          <p:nvPr/>
+        </p:nvSpPr>
+        <p:spPr>
+          <a:xfrm>
+            <a:off x="635000" y="1346200"/>
+            <a:ext cx="330200" cy="330200"/>
+          </a:xfrm>
+          <a:prstGeom prst="rect">
+            <a:avLst/>
+          </a:prstGeom>
+          <a:noFill/>
+        </p:spPr>
+        <p:txBody>
+          <a:bodyPr wrap="square" lIns="38100" tIns="25400" rIns="38100" bIns="25400" anchor="ctr">
+            <a:noAutofit/>
+          </a:bodyPr>
+          <a:lstStyle/>
+          <a:p>
+            <a:pPr algn="ctr">
+              <a:buNone/>
+            </a:pPr>
+            <a:r>
+              <a:rPr lang="en-IN" sz="1300" b="1" dirty="0">
+                <a:solidFill>
+                  <a:srgbClr val="1F9D55"/>
+                </a:solidFill>
+                <a:latin typeface="Calibri"/>
+              </a:rPr>
+              <a:t>1</a:t>
+            </a:r>
+          </a:p>
+        </p:txBody>
+      </p:sp>
+      <p:sp>
+        <p:nvSpPr>
+          <p:cNvPr id="204" name="PillT0"/>
+          <p:cNvSpPr txBox="1"/>
+          <p:nvPr/>
+        </p:nvSpPr>
+        <p:spPr>
+          <a:xfrm>
+            <a:off x="1016000" y="1219200"/>
+            <a:ext cx="1219200" cy="584200"/>
+          </a:xfrm>
+          <a:prstGeom prst="rect">
+            <a:avLst/>
+          </a:prstGeom>
+          <a:noFill/>
+        </p:spPr>
+        <p:txBody>
+          <a:bodyPr wrap="square" lIns="38100" tIns="25400" rIns="38100" bIns="25400" anchor="ctr">
+            <a:noAutofit/>
+          </a:bodyPr>
+          <a:lstStyle/>
+          <a:p>
+            <a:pPr algn="l">
+              <a:buNone/>
+            </a:pPr>
+            <a:r>
+              <a:rPr lang="en-IN" sz="1000" b="1" dirty="0">
+                <a:solidFill>
+                  <a:srgbClr val="FFFFFF"/>
+                </a:solidFill>
+                <a:latin typeface="Calibri"/>
+              </a:rPr>
+              <a:t>Hardware Arrival</a:t>
+            </a:r>
+          </a:p>
+        </p:txBody>
+      </p:sp>
+      <p:sp>
+        <p:nvSpPr>
+          <p:cNvPr id="205" name="Card0"/>
+          <p:cNvSpPr/>
+          <p:nvPr/>
+        </p:nvSpPr>
+        <p:spPr>
+          <a:xfrm>
+            <a:off x="533400" y="1905000"/>
+            <a:ext cx="1752600" cy="1676400"/>
+          </a:xfrm>
+          <a:prstGeom prst="roundRect">
+            <a:avLst/>
+          </a:prstGeom>
+          <a:solidFill>
+            <a:srgbClr val="FFFFFF"/>
+          </a:solidFill>
+          <a:ln w="9525">
+            <a:solidFill>
+              <a:srgbClr val="D0D7E5"/>
+            </a:solidFill>
+          </a:ln>
+        </p:spPr>
+        <p:txBody>
+          <a:bodyPr/>
+          <a:lstStyle/>
+          <a:p>
+            <a:endParaRPr/>
+          </a:p>
+        </p:txBody>
+      </p:sp>
+      <p:sp>
+        <p:nvSpPr>
+          <p:cNvPr id="206" name="Strip0"/>
+          <p:cNvSpPr/>
+          <p:nvPr/>
+        </p:nvSpPr>
+        <p:spPr>
+          <a:xfrm>
+            <a:off x="533400" y="1905000"/>
+            <a:ext cx="1752600" cy="38100"/>
+          </a:xfrm>
+          <a:prstGeom prst="rect">
+            <a:avLst/>
+          </a:prstGeom>
+          <a:solidFill>
+            <a:srgbClr val="1F9D55"/>
+          </a:solidFill>
+          <a:ln>
+            <a:noFill/>
+          </a:ln>
+        </p:spPr>
+        <p:txBody>
+          <a:bodyPr/>
+          <a:lstStyle/>
+          <a:p>
+            <a:endParaRPr/>
+          </a:p>
+        </p:txBody>
+      </p:sp>
+      <p:sp>
+        <p:nvSpPr>
+          <p:cNvPr id="207" name="CardT0"/>
+          <p:cNvSpPr txBox="1"/>
+          <p:nvPr/>
+        </p:nvSpPr>
+        <p:spPr>
+          <a:xfrm>
+            <a:off x="635000" y="2336800"/>
+            <a:ext cx="1549400" cy="1168400"/>
+          </a:xfrm>
+          <a:prstGeom prst="rect">
+            <a:avLst/>
+          </a:prstGeom>
+          <a:noFill/>
+        </p:spPr>
+        <p:txBody>
+          <a:bodyPr wrap="square" lIns="38100" tIns="25400" rIns="38100" bIns="25400" anchor="t">
+            <a:noAutofit/>
+          </a:bodyPr>
+          <a:lstStyle/>
+          <a:p>
+            <a:pPr marL="120000" indent="-120000" algn="l">
+              <a:lnSpc>
+                <a:spcPts val="1180"/>
+              </a:lnSpc>
+              <a:spcAft>
+                <a:spcPts val="400"/>
+              </a:spcAft>
+              <a:buClr>
+                <a:srgbClr val="1F9D55"/>
+              </a:buClr>
+              <a:buFont typeface="Arial"/>
+              <a:buChar char="•"/>
+            </a:pPr>
+            <a:r>
+              <a:rPr lang="en-IN" sz="900" dirty="0">
+                <a:solidFill>
+                  <a:srgbClr val="16223A"/>
+                </a:solidFill>
+                <a:latin typeface="Calibri"/>
+              </a:rPr>
+              <a:t>Receive Dynamixel XL330 motors</a:t>
+            </a:r>
+          </a:p>
+          <a:p>
+            <a:pPr marL="120000" indent="-120000" algn="l">
+              <a:lnSpc>
+                <a:spcPts val="1180"/>
+              </a:lnSpc>
+              <a:spcAft>
+                <a:spcPts val="400"/>
+              </a:spcAft>
+              <a:buClr>
+                <a:srgbClr val="1F9D55"/>
+              </a:buClr>
+              <a:buFont typeface="Arial"/>
+              <a:buChar char="•"/>
+            </a:pPr>
+            <a:r>
+              <a:rPr lang="en-IN" sz="900" dirty="0">
+                <a:solidFill>
+                  <a:srgbClr val="16223A"/>
+                </a:solidFill>
+                <a:latin typeface="Calibri"/>
+              </a:rPr>
+              <a:t>Receive U2D2 interface</a:t>
+            </a:r>
+          </a:p>
+          <a:p>
+            <a:pPr marL="120000" indent="-120000" algn="l">
+              <a:lnSpc>
+                <a:spcPts val="1180"/>
+              </a:lnSpc>
+              <a:spcAft>
+                <a:spcPts val="400"/>
+              </a:spcAft>
+              <a:buClr>
+                <a:srgbClr val="1F9D55"/>
+              </a:buClr>
+              <a:buFont typeface="Arial"/>
+              <a:buChar char="•"/>
+            </a:pPr>
+            <a:r>
+              <a:rPr lang="en-IN" sz="900" dirty="0">
+                <a:solidFill>
+                  <a:srgbClr val="16223A"/>
+                </a:solidFill>
+                <a:latin typeface="Calibri"/>
+              </a:rPr>
+              <a:t>Verify purchased components</a:t>
+            </a:r>
+          </a:p>
+        </p:txBody>
+      </p:sp>
+      <p:sp>
+        <p:nvSpPr>
+          <p:cNvPr id="209" name="Pill1"/>
+          <p:cNvSpPr/>
+          <p:nvPr/>
+        </p:nvSpPr>
+        <p:spPr>
+          <a:xfrm>
+            <a:off x="2387600" y="1219200"/>
+            <a:ext cx="1752600" cy="584200"/>
+          </a:xfrm>
+          <a:prstGeom prst="roundRect">
+            <a:avLst/>
+          </a:prstGeom>
+          <a:solidFill>
+            <a:srgbClr val="1F9D55"/>
+          </a:solidFill>
+          <a:ln>
+            <a:noFill/>
+          </a:ln>
+        </p:spPr>
+        <p:txBody>
+          <a:bodyPr/>
+          <a:lstStyle/>
+          <a:p>
+            <a:endParaRPr/>
+          </a:p>
+        </p:txBody>
+      </p:sp>
+      <p:sp>
+        <p:nvSpPr>
+          <p:cNvPr id="210" name="Num1"/>
+          <p:cNvSpPr/>
+          <p:nvPr/>
+        </p:nvSpPr>
+        <p:spPr>
+          <a:xfrm>
+            <a:off x="2489200" y="1346200"/>
+            <a:ext cx="330200" cy="330200"/>
+          </a:xfrm>
+          <a:prstGeom prst="ellipse">
+            <a:avLst/>
+          </a:prstGeom>
+          <a:solidFill>
+            <a:srgbClr val="FFFFFF"/>
+          </a:solidFill>
+          <a:ln>
+            <a:noFill/>
+          </a:ln>
+        </p:spPr>
+        <p:txBody>
+          <a:bodyPr/>
+          <a:lstStyle/>
+          <a:p>
+            <a:endParaRPr/>
+          </a:p>
+        </p:txBody>
+      </p:sp>
+      <p:sp>
+        <p:nvSpPr>
+          <p:cNvPr id="211" name="NumT1"/>
+          <p:cNvSpPr txBox="1"/>
+          <p:nvPr/>
+        </p:nvSpPr>
+        <p:spPr>
+          <a:xfrm>
+            <a:off x="2489200" y="1346200"/>
+            <a:ext cx="330200" cy="330200"/>
+          </a:xfrm>
+          <a:prstGeom prst="rect">
+            <a:avLst/>
+          </a:prstGeom>
+          <a:noFill/>
+        </p:spPr>
+        <p:txBody>
+          <a:bodyPr wrap="square" lIns="38100" tIns="25400" rIns="38100" bIns="25400" anchor="ctr">
+            <a:noAutofit/>
+          </a:bodyPr>
+          <a:lstStyle/>
+          <a:p>
+            <a:pPr algn="ctr">
+              <a:buNone/>
+            </a:pPr>
+            <a:r>
+              <a:rPr lang="en-IN" sz="1300" b="1" dirty="0">
+                <a:solidFill>
+                  <a:srgbClr val="1F9D55"/>
+                </a:solidFill>
+                <a:latin typeface="Calibri"/>
+              </a:rPr>
+              <a:t>2</a:t>
+            </a:r>
+          </a:p>
+        </p:txBody>
+      </p:sp>
+      <p:sp>
+        <p:nvSpPr>
+          <p:cNvPr id="212" name="PillT1"/>
+          <p:cNvSpPr txBox="1"/>
+          <p:nvPr/>
+        </p:nvSpPr>
+        <p:spPr>
+          <a:xfrm>
+            <a:off x="2870200" y="1219200"/>
+            <a:ext cx="1219200" cy="584200"/>
+          </a:xfrm>
+          <a:prstGeom prst="rect">
+            <a:avLst/>
+          </a:prstGeom>
+          <a:noFill/>
+        </p:spPr>
+        <p:txBody>
+          <a:bodyPr wrap="square" lIns="38100" tIns="25400" rIns="38100" bIns="25400" anchor="ctr">
+            <a:noAutofit/>
+          </a:bodyPr>
+          <a:lstStyle/>
+          <a:p>
+            <a:pPr algn="l">
+              <a:buNone/>
+            </a:pPr>
+            <a:r>
+              <a:rPr lang="en-IN" sz="1000" b="1" dirty="0">
+                <a:solidFill>
+                  <a:srgbClr val="FFFFFF"/>
+                </a:solidFill>
+                <a:latin typeface="Calibri"/>
+              </a:rPr>
+              <a:t>Mechanical Assembly</a:t>
+            </a:r>
+          </a:p>
+        </p:txBody>
+      </p:sp>
+      <p:sp>
+        <p:nvSpPr>
+          <p:cNvPr id="213" name="Card1"/>
+          <p:cNvSpPr/>
+          <p:nvPr/>
+        </p:nvSpPr>
+        <p:spPr>
+          <a:xfrm>
+            <a:off x="2387600" y="1905000"/>
+            <a:ext cx="1752600" cy="1676400"/>
+          </a:xfrm>
+          <a:prstGeom prst="roundRect">
+            <a:avLst/>
+          </a:prstGeom>
+          <a:solidFill>
+            <a:srgbClr val="FFFFFF"/>
+          </a:solidFill>
+          <a:ln w="9525">
+            <a:solidFill>
+              <a:srgbClr val="D0D7E5"/>
+            </a:solidFill>
+          </a:ln>
+        </p:spPr>
+        <p:txBody>
+          <a:bodyPr/>
+          <a:lstStyle/>
+          <a:p>
+            <a:endParaRPr/>
+          </a:p>
+        </p:txBody>
+      </p:sp>
+      <p:sp>
+        <p:nvSpPr>
+          <p:cNvPr id="214" name="Strip1"/>
+          <p:cNvSpPr/>
+          <p:nvPr/>
+        </p:nvSpPr>
+        <p:spPr>
+          <a:xfrm>
+            <a:off x="2387600" y="1905000"/>
+            <a:ext cx="1752600" cy="38100"/>
+          </a:xfrm>
+          <a:prstGeom prst="rect">
+            <a:avLst/>
+          </a:prstGeom>
+          <a:solidFill>
+            <a:srgbClr val="1F9D55"/>
+          </a:solidFill>
+          <a:ln>
+            <a:noFill/>
+          </a:ln>
+        </p:spPr>
+        <p:txBody>
+          <a:bodyPr/>
+          <a:lstStyle/>
+          <a:p>
+            <a:endParaRPr/>
+          </a:p>
+        </p:txBody>
+      </p:sp>
+      <p:sp>
+        <p:nvSpPr>
+          <p:cNvPr id="215" name="CardT1"/>
+          <p:cNvSpPr txBox="1"/>
+          <p:nvPr/>
+        </p:nvSpPr>
+        <p:spPr>
+          <a:xfrm>
+            <a:off x="2489200" y="2336800"/>
+            <a:ext cx="1549400" cy="1168400"/>
+          </a:xfrm>
+          <a:prstGeom prst="rect">
+            <a:avLst/>
+          </a:prstGeom>
+          <a:noFill/>
+        </p:spPr>
+        <p:txBody>
+          <a:bodyPr wrap="square" lIns="38100" tIns="25400" rIns="38100" bIns="25400" anchor="t">
+            <a:noAutofit/>
+          </a:bodyPr>
+          <a:lstStyle/>
+          <a:p>
+            <a:pPr marL="120000" indent="-120000" algn="l">
+              <a:lnSpc>
+                <a:spcPts val="1180"/>
+              </a:lnSpc>
+              <a:spcAft>
+                <a:spcPts val="400"/>
+              </a:spcAft>
+              <a:buClr>
+                <a:srgbClr val="1F9D55"/>
+              </a:buClr>
+              <a:buFont typeface="Arial"/>
+              <a:buChar char="•"/>
+            </a:pPr>
+            <a:r>
+              <a:rPr lang="en-IN" sz="900" dirty="0">
+                <a:solidFill>
+                  <a:srgbClr val="16223A"/>
+                </a:solidFill>
+                <a:latin typeface="Calibri"/>
+              </a:rPr>
+              <a:t>Assemble complete snake body</a:t>
+            </a:r>
+          </a:p>
+          <a:p>
+            <a:pPr marL="120000" indent="-120000" algn="l">
+              <a:lnSpc>
+                <a:spcPts val="1180"/>
+              </a:lnSpc>
+              <a:spcAft>
+                <a:spcPts val="400"/>
+              </a:spcAft>
+              <a:buClr>
+                <a:srgbClr val="1F9D55"/>
+              </a:buClr>
+              <a:buFont typeface="Arial"/>
+              <a:buChar char="•"/>
+            </a:pPr>
+            <a:r>
+              <a:rPr lang="en-IN" sz="900" dirty="0">
+                <a:solidFill>
+                  <a:srgbClr val="16223A"/>
+                </a:solidFill>
+                <a:latin typeface="Calibri"/>
+              </a:rPr>
+              <a:t>Install Dynamixel actuators</a:t>
+            </a:r>
+          </a:p>
+          <a:p>
+            <a:pPr marL="120000" indent="-120000" algn="l">
+              <a:lnSpc>
+                <a:spcPts val="1180"/>
+              </a:lnSpc>
+              <a:spcAft>
+                <a:spcPts val="400"/>
+              </a:spcAft>
+              <a:buClr>
+                <a:srgbClr val="1F9D55"/>
+              </a:buClr>
+              <a:buFont typeface="Arial"/>
+              <a:buChar char="•"/>
+            </a:pPr>
+            <a:r>
+              <a:rPr lang="en-IN" sz="900" dirty="0">
+                <a:solidFill>
+                  <a:srgbClr val="16223A"/>
+                </a:solidFill>
+                <a:latin typeface="Calibri"/>
+              </a:rPr>
+              <a:t>Route communication cables</a:t>
+            </a:r>
+          </a:p>
+        </p:txBody>
+      </p:sp>
+      <p:sp>
+        <p:nvSpPr>
+          <p:cNvPr id="217" name="Pill2"/>
+          <p:cNvSpPr/>
+          <p:nvPr/>
+        </p:nvSpPr>
+        <p:spPr>
+          <a:xfrm>
+            <a:off x="4241800" y="1219200"/>
+            <a:ext cx="1752600" cy="584200"/>
+          </a:xfrm>
+          <a:prstGeom prst="roundRect">
+            <a:avLst/>
+          </a:prstGeom>
+          <a:solidFill>
+            <a:srgbClr val="1E6FD6"/>
+          </a:solidFill>
+          <a:ln>
+            <a:noFill/>
+          </a:ln>
+        </p:spPr>
+        <p:txBody>
+          <a:bodyPr/>
+          <a:lstStyle/>
+          <a:p>
+            <a:endParaRPr/>
+          </a:p>
+        </p:txBody>
+      </p:sp>
+      <p:sp>
+        <p:nvSpPr>
+          <p:cNvPr id="218" name="Num2"/>
+          <p:cNvSpPr/>
+          <p:nvPr/>
+        </p:nvSpPr>
+        <p:spPr>
+          <a:xfrm>
+            <a:off x="4343400" y="1346200"/>
+            <a:ext cx="330200" cy="330200"/>
+          </a:xfrm>
+          <a:prstGeom prst="ellipse">
+            <a:avLst/>
+          </a:prstGeom>
+          <a:solidFill>
+            <a:srgbClr val="FFFFFF"/>
+          </a:solidFill>
+          <a:ln>
+            <a:noFill/>
+          </a:ln>
+        </p:spPr>
+        <p:txBody>
+          <a:bodyPr/>
+          <a:lstStyle/>
+          <a:p>
+            <a:endParaRPr/>
+          </a:p>
+        </p:txBody>
+      </p:sp>
+      <p:sp>
+        <p:nvSpPr>
+          <p:cNvPr id="219" name="NumT2"/>
+          <p:cNvSpPr txBox="1"/>
+          <p:nvPr/>
+        </p:nvSpPr>
+        <p:spPr>
+          <a:xfrm>
+            <a:off x="4343400" y="1346200"/>
+            <a:ext cx="330200" cy="330200"/>
+          </a:xfrm>
+          <a:prstGeom prst="rect">
+            <a:avLst/>
+          </a:prstGeom>
+          <a:noFill/>
+        </p:spPr>
+        <p:txBody>
+          <a:bodyPr wrap="square" lIns="38100" tIns="25400" rIns="38100" bIns="25400" anchor="ctr">
+            <a:noAutofit/>
+          </a:bodyPr>
+          <a:lstStyle/>
+          <a:p>
+            <a:pPr algn="ctr">
+              <a:buNone/>
+            </a:pPr>
+            <a:r>
+              <a:rPr lang="en-IN" sz="1300" b="1" dirty="0">
+                <a:solidFill>
+                  <a:srgbClr val="1E6FD6"/>
+                </a:solidFill>
+                <a:latin typeface="Calibri"/>
+              </a:rPr>
+              <a:t>3</a:t>
+            </a:r>
+          </a:p>
+        </p:txBody>
+      </p:sp>
+      <p:sp>
+        <p:nvSpPr>
+          <p:cNvPr id="220" name="PillT2"/>
+          <p:cNvSpPr txBox="1"/>
+          <p:nvPr/>
+        </p:nvSpPr>
+        <p:spPr>
+          <a:xfrm>
+            <a:off x="4724400" y="1219200"/>
+            <a:ext cx="1219200" cy="584200"/>
+          </a:xfrm>
+          <a:prstGeom prst="rect">
+            <a:avLst/>
+          </a:prstGeom>
+          <a:noFill/>
+        </p:spPr>
+        <p:txBody>
+          <a:bodyPr wrap="square" lIns="38100" tIns="25400" rIns="38100" bIns="25400" anchor="ctr">
+            <a:noAutofit/>
+          </a:bodyPr>
+          <a:lstStyle/>
+          <a:p>
+            <a:pPr algn="l">
+              <a:buNone/>
+            </a:pPr>
+            <a:r>
+              <a:rPr lang="en-IN" sz="1000" b="1" dirty="0">
+                <a:solidFill>
+                  <a:srgbClr val="FFFFFF"/>
+                </a:solidFill>
+                <a:latin typeface="Calibri"/>
+              </a:rPr>
+              <a:t>Communication Setup</a:t>
+            </a:r>
+          </a:p>
+        </p:txBody>
+      </p:sp>
+      <p:sp>
+        <p:nvSpPr>
+          <p:cNvPr id="221" name="Card2"/>
+          <p:cNvSpPr/>
+          <p:nvPr/>
+        </p:nvSpPr>
+        <p:spPr>
+          <a:xfrm>
+            <a:off x="4241800" y="1905000"/>
+            <a:ext cx="1752600" cy="1676400"/>
+          </a:xfrm>
+          <a:prstGeom prst="roundRect">
+            <a:avLst/>
+          </a:prstGeom>
+          <a:solidFill>
+            <a:srgbClr val="FFFFFF"/>
+          </a:solidFill>
+          <a:ln w="9525">
+            <a:solidFill>
+              <a:srgbClr val="D0D7E5"/>
+            </a:solidFill>
+          </a:ln>
+        </p:spPr>
+        <p:txBody>
+          <a:bodyPr/>
+          <a:lstStyle/>
+          <a:p>
+            <a:endParaRPr/>
+          </a:p>
+        </p:txBody>
+      </p:sp>
+      <p:sp>
+        <p:nvSpPr>
+          <p:cNvPr id="222" name="Strip2"/>
+          <p:cNvSpPr/>
+          <p:nvPr/>
+        </p:nvSpPr>
+        <p:spPr>
+          <a:xfrm>
+            <a:off x="4241800" y="1905000"/>
+            <a:ext cx="1752600" cy="38100"/>
+          </a:xfrm>
+          <a:prstGeom prst="rect">
+            <a:avLst/>
+          </a:prstGeom>
+          <a:solidFill>
+            <a:srgbClr val="1E6FD6"/>
+          </a:solidFill>
+          <a:ln>
+            <a:noFill/>
+          </a:ln>
+        </p:spPr>
+        <p:txBody>
+          <a:bodyPr/>
+          <a:lstStyle/>
+          <a:p>
+            <a:endParaRPr/>
+          </a:p>
+        </p:txBody>
+      </p:sp>
+      <p:sp>
+        <p:nvSpPr>
+          <p:cNvPr id="223" name="CardT2"/>
+          <p:cNvSpPr txBox="1"/>
+          <p:nvPr/>
+        </p:nvSpPr>
+        <p:spPr>
+          <a:xfrm>
+            <a:off x="4343400" y="2336800"/>
+            <a:ext cx="1549400" cy="1168400"/>
+          </a:xfrm>
+          <a:prstGeom prst="rect">
+            <a:avLst/>
+          </a:prstGeom>
+          <a:noFill/>
+        </p:spPr>
+        <p:txBody>
+          <a:bodyPr wrap="square" lIns="38100" tIns="25400" rIns="38100" bIns="25400" anchor="t">
+            <a:noAutofit/>
+          </a:bodyPr>
+          <a:lstStyle/>
+          <a:p>
+            <a:pPr marL="120000" indent="-120000" algn="l">
+              <a:lnSpc>
+                <a:spcPts val="1180"/>
+              </a:lnSpc>
+              <a:spcAft>
+                <a:spcPts val="400"/>
+              </a:spcAft>
+              <a:buClr>
+                <a:srgbClr val="1E6FD6"/>
+              </a:buClr>
+              <a:buFont typeface="Arial"/>
+              <a:buChar char="•"/>
+            </a:pPr>
+            <a:r>
+              <a:rPr lang="en-IN" sz="900" dirty="0">
+                <a:solidFill>
+                  <a:srgbClr val="16223A"/>
+                </a:solidFill>
+                <a:latin typeface="Calibri"/>
+              </a:rPr>
+              <a:t>Configure motor IDs</a:t>
+            </a:r>
+          </a:p>
+          <a:p>
+            <a:pPr marL="120000" indent="-120000" algn="l">
+              <a:lnSpc>
+                <a:spcPts val="1180"/>
+              </a:lnSpc>
+              <a:spcAft>
+                <a:spcPts val="400"/>
+              </a:spcAft>
+              <a:buClr>
+                <a:srgbClr val="1E6FD6"/>
+              </a:buClr>
+              <a:buFont typeface="Arial"/>
+              <a:buChar char="•"/>
+            </a:pPr>
+            <a:r>
+              <a:rPr lang="en-IN" sz="900" dirty="0">
+                <a:solidFill>
+                  <a:srgbClr val="16223A"/>
+                </a:solidFill>
+                <a:latin typeface="Calibri"/>
+              </a:rPr>
+              <a:t>Establish serial communication</a:t>
+            </a:r>
+          </a:p>
+          <a:p>
+            <a:pPr marL="120000" indent="-120000" algn="l">
+              <a:lnSpc>
+                <a:spcPts val="1180"/>
+              </a:lnSpc>
+              <a:spcAft>
+                <a:spcPts val="400"/>
+              </a:spcAft>
+              <a:buClr>
+                <a:srgbClr val="1E6FD6"/>
+              </a:buClr>
+              <a:buFont typeface="Arial"/>
+              <a:buChar char="•"/>
+            </a:pPr>
+            <a:r>
+              <a:rPr lang="en-IN" sz="900" dirty="0">
+                <a:solidFill>
+                  <a:srgbClr val="16223A"/>
+                </a:solidFill>
+                <a:latin typeface="Calibri"/>
+              </a:rPr>
+              <a:t>Validate daisy-chain architecture</a:t>
+            </a:r>
+          </a:p>
+        </p:txBody>
+      </p:sp>
+      <p:sp>
+        <p:nvSpPr>
+          <p:cNvPr id="225" name="Pill3"/>
+          <p:cNvSpPr/>
+          <p:nvPr/>
+        </p:nvSpPr>
+        <p:spPr>
+          <a:xfrm>
+            <a:off x="6096000" y="1219200"/>
+            <a:ext cx="1752600" cy="584200"/>
+          </a:xfrm>
+          <a:prstGeom prst="roundRect">
+            <a:avLst/>
+          </a:prstGeom>
+          <a:solidFill>
+            <a:srgbClr val="1E6FD6"/>
+          </a:solidFill>
+          <a:ln>
+            <a:noFill/>
+          </a:ln>
+        </p:spPr>
+        <p:txBody>
+          <a:bodyPr/>
+          <a:lstStyle/>
+          <a:p>
+            <a:endParaRPr/>
+          </a:p>
+        </p:txBody>
+      </p:sp>
+      <p:sp>
+        <p:nvSpPr>
+          <p:cNvPr id="226" name="Num3"/>
+          <p:cNvSpPr/>
+          <p:nvPr/>
+        </p:nvSpPr>
+        <p:spPr>
+          <a:xfrm>
+            <a:off x="6197600" y="1346200"/>
+            <a:ext cx="330200" cy="330200"/>
+          </a:xfrm>
+          <a:prstGeom prst="ellipse">
+            <a:avLst/>
+          </a:prstGeom>
+          <a:solidFill>
+            <a:srgbClr val="FFFFFF"/>
+          </a:solidFill>
+          <a:ln>
+            <a:noFill/>
+          </a:ln>
+        </p:spPr>
+        <p:txBody>
+          <a:bodyPr/>
+          <a:lstStyle/>
+          <a:p>
+            <a:endParaRPr/>
+          </a:p>
+        </p:txBody>
+      </p:sp>
+      <p:sp>
+        <p:nvSpPr>
+          <p:cNvPr id="227" name="NumT3"/>
+          <p:cNvSpPr txBox="1"/>
+          <p:nvPr/>
+        </p:nvSpPr>
+        <p:spPr>
+          <a:xfrm>
+            <a:off x="6197600" y="1346200"/>
+            <a:ext cx="330200" cy="330200"/>
+          </a:xfrm>
+          <a:prstGeom prst="rect">
+            <a:avLst/>
+          </a:prstGeom>
+          <a:noFill/>
+        </p:spPr>
+        <p:txBody>
+          <a:bodyPr wrap="square" lIns="38100" tIns="25400" rIns="38100" bIns="25400" anchor="ctr">
+            <a:noAutofit/>
+          </a:bodyPr>
+          <a:lstStyle/>
+          <a:p>
+            <a:pPr algn="ctr">
+              <a:buNone/>
+            </a:pPr>
+            <a:r>
+              <a:rPr lang="en-IN" sz="1300" b="1" dirty="0">
+                <a:solidFill>
+                  <a:srgbClr val="1E6FD6"/>
+                </a:solidFill>
+                <a:latin typeface="Calibri"/>
+              </a:rPr>
+              <a:t>4</a:t>
+            </a:r>
+          </a:p>
+        </p:txBody>
+      </p:sp>
+      <p:sp>
+        <p:nvSpPr>
+          <p:cNvPr id="228" name="PillT3"/>
+          <p:cNvSpPr txBox="1"/>
+          <p:nvPr/>
+        </p:nvSpPr>
+        <p:spPr>
+          <a:xfrm>
+            <a:off x="6578600" y="1219200"/>
+            <a:ext cx="1219200" cy="584200"/>
+          </a:xfrm>
+          <a:prstGeom prst="rect">
+            <a:avLst/>
+          </a:prstGeom>
+          <a:noFill/>
+        </p:spPr>
+        <p:txBody>
+          <a:bodyPr wrap="square" lIns="38100" tIns="25400" rIns="38100" bIns="25400" anchor="ctr">
+            <a:noAutofit/>
+          </a:bodyPr>
+          <a:lstStyle/>
+          <a:p>
+            <a:pPr algn="l">
+              <a:buNone/>
+            </a:pPr>
+            <a:r>
+              <a:rPr lang="en-IN" sz="1000" b="1" dirty="0">
+                <a:solidFill>
+                  <a:srgbClr val="FFFFFF"/>
+                </a:solidFill>
+                <a:latin typeface="Calibri"/>
+              </a:rPr>
+              <a:t>Locomotion Development</a:t>
+            </a:r>
+          </a:p>
+        </p:txBody>
+      </p:sp>
+      <p:sp>
+        <p:nvSpPr>
+          <p:cNvPr id="229" name="Card3"/>
+          <p:cNvSpPr/>
+          <p:nvPr/>
+        </p:nvSpPr>
+        <p:spPr>
+          <a:xfrm>
+            <a:off x="6096000" y="1905000"/>
+            <a:ext cx="1752600" cy="1676400"/>
+          </a:xfrm>
+          <a:prstGeom prst="roundRect">
+            <a:avLst/>
+          </a:prstGeom>
+          <a:solidFill>
+            <a:srgbClr val="FFFFFF"/>
+          </a:solidFill>
+          <a:ln w="9525">
+            <a:solidFill>
+              <a:srgbClr val="D0D7E5"/>
+            </a:solidFill>
+          </a:ln>
+        </p:spPr>
+        <p:txBody>
+          <a:bodyPr/>
+          <a:lstStyle/>
+          <a:p>
+            <a:endParaRPr/>
+          </a:p>
+        </p:txBody>
+      </p:sp>
+      <p:sp>
+        <p:nvSpPr>
+          <p:cNvPr id="230" name="Strip3"/>
+          <p:cNvSpPr/>
+          <p:nvPr/>
+        </p:nvSpPr>
+        <p:spPr>
+          <a:xfrm>
+            <a:off x="6096000" y="1905000"/>
+            <a:ext cx="1752600" cy="38100"/>
+          </a:xfrm>
+          <a:prstGeom prst="rect">
+            <a:avLst/>
+          </a:prstGeom>
+          <a:solidFill>
+            <a:srgbClr val="1E6FD6"/>
+          </a:solidFill>
+          <a:ln>
+            <a:noFill/>
+          </a:ln>
+        </p:spPr>
+        <p:txBody>
+          <a:bodyPr/>
+          <a:lstStyle/>
+          <a:p>
+            <a:endParaRPr/>
+          </a:p>
+        </p:txBody>
+      </p:sp>
+      <p:sp>
+        <p:nvSpPr>
+          <p:cNvPr id="231" name="CardT3"/>
+          <p:cNvSpPr txBox="1"/>
+          <p:nvPr/>
+        </p:nvSpPr>
+        <p:spPr>
+          <a:xfrm>
+            <a:off x="6197600" y="2336800"/>
+            <a:ext cx="1549400" cy="1168400"/>
+          </a:xfrm>
+          <a:prstGeom prst="rect">
+            <a:avLst/>
+          </a:prstGeom>
+          <a:noFill/>
+        </p:spPr>
+        <p:txBody>
+          <a:bodyPr wrap="square" lIns="38100" tIns="25400" rIns="38100" bIns="25400" anchor="t">
+            <a:noAutofit/>
+          </a:bodyPr>
+          <a:lstStyle/>
+          <a:p>
+            <a:pPr marL="120000" indent="-120000" algn="l">
+              <a:lnSpc>
+                <a:spcPts val="1180"/>
+              </a:lnSpc>
+              <a:spcAft>
+                <a:spcPts val="400"/>
+              </a:spcAft>
+              <a:buClr>
+                <a:srgbClr val="1E6FD6"/>
+              </a:buClr>
+              <a:buFont typeface="Arial"/>
+              <a:buChar char="•"/>
+            </a:pPr>
+            <a:r>
+              <a:rPr lang="en-IN" sz="900" dirty="0">
+                <a:solidFill>
+                  <a:srgbClr val="16223A"/>
+                </a:solidFill>
+                <a:latin typeface="Calibri"/>
+              </a:rPr>
+              <a:t>Port simulation code to Pi 5</a:t>
+            </a:r>
+          </a:p>
+          <a:p>
+            <a:pPr marL="120000" indent="-120000" algn="l">
+              <a:lnSpc>
+                <a:spcPts val="1180"/>
+              </a:lnSpc>
+              <a:spcAft>
+                <a:spcPts val="400"/>
+              </a:spcAft>
+              <a:buClr>
+                <a:srgbClr val="1E6FD6"/>
+              </a:buClr>
+              <a:buFont typeface="Arial"/>
+              <a:buChar char="•"/>
+            </a:pPr>
+            <a:r>
+              <a:rPr lang="en-IN" sz="900" dirty="0">
+                <a:solidFill>
+                  <a:srgbClr val="16223A"/>
+                </a:solidFill>
+                <a:latin typeface="Calibri"/>
+              </a:rPr>
+              <a:t>Implement serpentine locomotion</a:t>
+            </a:r>
+          </a:p>
+          <a:p>
+            <a:pPr marL="120000" indent="-120000" algn="l">
+              <a:lnSpc>
+                <a:spcPts val="1180"/>
+              </a:lnSpc>
+              <a:spcAft>
+                <a:spcPts val="400"/>
+              </a:spcAft>
+              <a:buClr>
+                <a:srgbClr val="1E6FD6"/>
+              </a:buClr>
+              <a:buFont typeface="Arial"/>
+              <a:buChar char="•"/>
+            </a:pPr>
+            <a:r>
+              <a:rPr lang="en-IN" sz="900" dirty="0">
+                <a:solidFill>
+                  <a:srgbClr val="16223A"/>
+                </a:solidFill>
+                <a:latin typeface="Calibri"/>
+              </a:rPr>
+              <a:t>Synchronize multi-joint movement</a:t>
+            </a:r>
+          </a:p>
+        </p:txBody>
+      </p:sp>
+      <p:sp>
+        <p:nvSpPr>
+          <p:cNvPr id="233" name="Pill4"/>
+          <p:cNvSpPr/>
+          <p:nvPr/>
+        </p:nvSpPr>
+        <p:spPr>
+          <a:xfrm>
+            <a:off x="7950200" y="1219200"/>
+            <a:ext cx="1752600" cy="584200"/>
+          </a:xfrm>
+          <a:prstGeom prst="roundRect">
+            <a:avLst/>
+          </a:prstGeom>
+          <a:solidFill>
+            <a:srgbClr val="E8821E"/>
+          </a:solidFill>
+          <a:ln>
+            <a:noFill/>
+          </a:ln>
+        </p:spPr>
+        <p:txBody>
+          <a:bodyPr/>
+          <a:lstStyle/>
+          <a:p>
+            <a:endParaRPr/>
+          </a:p>
+        </p:txBody>
+      </p:sp>
+      <p:sp>
+        <p:nvSpPr>
+          <p:cNvPr id="234" name="Num4"/>
+          <p:cNvSpPr/>
+          <p:nvPr/>
+        </p:nvSpPr>
+        <p:spPr>
+          <a:xfrm>
+            <a:off x="8051800" y="1346200"/>
+            <a:ext cx="330200" cy="330200"/>
+          </a:xfrm>
+          <a:prstGeom prst="ellipse">
+            <a:avLst/>
+          </a:prstGeom>
+          <a:solidFill>
+            <a:srgbClr val="FFFFFF"/>
+          </a:solidFill>
+          <a:ln>
+            <a:noFill/>
+          </a:ln>
+        </p:spPr>
+        <p:txBody>
+          <a:bodyPr/>
+          <a:lstStyle/>
+          <a:p>
+            <a:endParaRPr/>
+          </a:p>
+        </p:txBody>
+      </p:sp>
+      <p:sp>
+        <p:nvSpPr>
+          <p:cNvPr id="235" name="NumT4"/>
+          <p:cNvSpPr txBox="1"/>
+          <p:nvPr/>
+        </p:nvSpPr>
+        <p:spPr>
+          <a:xfrm>
+            <a:off x="8051800" y="1346200"/>
+            <a:ext cx="330200" cy="330200"/>
+          </a:xfrm>
+          <a:prstGeom prst="rect">
+            <a:avLst/>
+          </a:prstGeom>
+          <a:noFill/>
+        </p:spPr>
+        <p:txBody>
+          <a:bodyPr wrap="square" lIns="38100" tIns="25400" rIns="38100" bIns="25400" anchor="ctr">
+            <a:noAutofit/>
+          </a:bodyPr>
+          <a:lstStyle/>
+          <a:p>
+            <a:pPr algn="ctr">
+              <a:buNone/>
+            </a:pPr>
+            <a:r>
+              <a:rPr lang="en-IN" sz="1300" b="1" dirty="0">
+                <a:solidFill>
+                  <a:srgbClr val="E8821E"/>
+                </a:solidFill>
+                <a:latin typeface="Calibri"/>
+              </a:rPr>
+              <a:t>5</a:t>
+            </a:r>
+          </a:p>
+        </p:txBody>
+      </p:sp>
+      <p:sp>
+        <p:nvSpPr>
+          <p:cNvPr id="236" name="PillT4"/>
+          <p:cNvSpPr txBox="1"/>
+          <p:nvPr/>
+        </p:nvSpPr>
+        <p:spPr>
+          <a:xfrm>
+            <a:off x="8432800" y="1219200"/>
+            <a:ext cx="1219200" cy="584200"/>
+          </a:xfrm>
+          <a:prstGeom prst="rect">
+            <a:avLst/>
+          </a:prstGeom>
+          <a:noFill/>
+        </p:spPr>
+        <p:txBody>
+          <a:bodyPr wrap="square" lIns="38100" tIns="25400" rIns="38100" bIns="25400" anchor="ctr">
+            <a:noAutofit/>
+          </a:bodyPr>
+          <a:lstStyle/>
+          <a:p>
+            <a:pPr algn="l">
+              <a:buNone/>
+            </a:pPr>
+            <a:r>
+              <a:rPr lang="en-IN" sz="1000" b="1" dirty="0">
+                <a:solidFill>
+                  <a:srgbClr val="FFFFFF"/>
+                </a:solidFill>
+                <a:latin typeface="Calibri"/>
+              </a:rPr>
+              <a:t>Sensor Integration</a:t>
+            </a:r>
+          </a:p>
+        </p:txBody>
+      </p:sp>
+      <p:sp>
+        <p:nvSpPr>
+          <p:cNvPr id="237" name="Card4"/>
+          <p:cNvSpPr/>
+          <p:nvPr/>
+        </p:nvSpPr>
+        <p:spPr>
+          <a:xfrm>
+            <a:off x="7950200" y="1905000"/>
+            <a:ext cx="1752600" cy="1676400"/>
+          </a:xfrm>
+          <a:prstGeom prst="roundRect">
+            <a:avLst/>
+          </a:prstGeom>
+          <a:solidFill>
+            <a:srgbClr val="FFFFFF"/>
+          </a:solidFill>
+          <a:ln w="9525">
+            <a:solidFill>
+              <a:srgbClr val="D0D7E5"/>
+            </a:solidFill>
+          </a:ln>
+        </p:spPr>
+        <p:txBody>
+          <a:bodyPr/>
+          <a:lstStyle/>
+          <a:p>
+            <a:endParaRPr/>
+          </a:p>
+        </p:txBody>
+      </p:sp>
+      <p:sp>
+        <p:nvSpPr>
+          <p:cNvPr id="238" name="Strip4"/>
+          <p:cNvSpPr/>
+          <p:nvPr/>
+        </p:nvSpPr>
+        <p:spPr>
+          <a:xfrm>
+            <a:off x="7950200" y="1905000"/>
+            <a:ext cx="1752600" cy="38100"/>
+          </a:xfrm>
+          <a:prstGeom prst="rect">
+            <a:avLst/>
+          </a:prstGeom>
+          <a:solidFill>
+            <a:srgbClr val="E8821E"/>
+          </a:solidFill>
+          <a:ln>
+            <a:noFill/>
+          </a:ln>
+        </p:spPr>
+        <p:txBody>
+          <a:bodyPr/>
+          <a:lstStyle/>
+          <a:p>
+            <a:endParaRPr/>
+          </a:p>
+        </p:txBody>
+      </p:sp>
+      <p:sp>
+        <p:nvSpPr>
+          <p:cNvPr id="239" name="CardT4"/>
+          <p:cNvSpPr txBox="1"/>
+          <p:nvPr/>
+        </p:nvSpPr>
+        <p:spPr>
+          <a:xfrm>
+            <a:off x="8051800" y="2336800"/>
+            <a:ext cx="1549400" cy="1168400"/>
+          </a:xfrm>
+          <a:prstGeom prst="rect">
+            <a:avLst/>
+          </a:prstGeom>
+          <a:noFill/>
+        </p:spPr>
+        <p:txBody>
+          <a:bodyPr wrap="square" lIns="38100" tIns="25400" rIns="38100" bIns="25400" anchor="t">
+            <a:noAutofit/>
+          </a:bodyPr>
+          <a:lstStyle/>
+          <a:p>
+            <a:pPr marL="120000" indent="-120000" algn="l">
+              <a:lnSpc>
+                <a:spcPts val="1180"/>
+              </a:lnSpc>
+              <a:spcAft>
+                <a:spcPts val="400"/>
+              </a:spcAft>
+              <a:buClr>
+                <a:srgbClr val="E8821E"/>
+              </a:buClr>
+              <a:buFont typeface="Arial"/>
+              <a:buChar char="•"/>
+            </a:pPr>
+            <a:r>
+              <a:rPr lang="en-IN" sz="900" dirty="0">
+                <a:solidFill>
+                  <a:srgbClr val="16223A"/>
+                </a:solidFill>
+                <a:latin typeface="Calibri"/>
+              </a:rPr>
+              <a:t>Integrate MPU6050 IMU</a:t>
+            </a:r>
+          </a:p>
+          <a:p>
+            <a:pPr marL="120000" indent="-120000" algn="l">
+              <a:lnSpc>
+                <a:spcPts val="1180"/>
+              </a:lnSpc>
+              <a:spcAft>
+                <a:spcPts val="400"/>
+              </a:spcAft>
+              <a:buClr>
+                <a:srgbClr val="E8821E"/>
+              </a:buClr>
+              <a:buFont typeface="Arial"/>
+              <a:buChar char="•"/>
+            </a:pPr>
+            <a:r>
+              <a:rPr lang="en-IN" sz="900" dirty="0">
+                <a:solidFill>
+                  <a:srgbClr val="16223A"/>
+                </a:solidFill>
+                <a:latin typeface="Calibri"/>
+              </a:rPr>
+              <a:t>Integrate obstacle detection</a:t>
+            </a:r>
+          </a:p>
+          <a:p>
+            <a:pPr marL="120000" indent="-120000" algn="l">
+              <a:lnSpc>
+                <a:spcPts val="1180"/>
+              </a:lnSpc>
+              <a:spcAft>
+                <a:spcPts val="400"/>
+              </a:spcAft>
+              <a:buClr>
+                <a:srgbClr val="E8821E"/>
+              </a:buClr>
+              <a:buFont typeface="Arial"/>
+              <a:buChar char="•"/>
+            </a:pPr>
+            <a:r>
+              <a:rPr lang="en-IN" sz="900" dirty="0">
+                <a:solidFill>
+                  <a:srgbClr val="16223A"/>
+                </a:solidFill>
+                <a:latin typeface="Calibri"/>
+              </a:rPr>
+              <a:t>Implement feedback control</a:t>
+            </a:r>
+          </a:p>
+        </p:txBody>
+      </p:sp>
+      <p:sp>
+        <p:nvSpPr>
+          <p:cNvPr id="240" name="Pill5"/>
+          <p:cNvSpPr/>
+          <p:nvPr/>
+        </p:nvSpPr>
+        <p:spPr>
+          <a:xfrm>
+            <a:off x="9804400" y="1219200"/>
+            <a:ext cx="1752600" cy="584200"/>
+          </a:xfrm>
+          <a:prstGeom prst="roundRect">
+            <a:avLst/>
+          </a:prstGeom>
+          <a:solidFill>
+            <a:srgbClr val="E8821E"/>
+          </a:solidFill>
+          <a:ln>
+            <a:noFill/>
+          </a:ln>
+        </p:spPr>
+        <p:txBody>
+          <a:bodyPr/>
+          <a:lstStyle/>
+          <a:p>
+            <a:endParaRPr/>
+          </a:p>
+        </p:txBody>
+      </p:sp>
+      <p:sp>
+        <p:nvSpPr>
+          <p:cNvPr id="241" name="Num5"/>
+          <p:cNvSpPr/>
+          <p:nvPr/>
+        </p:nvSpPr>
+        <p:spPr>
+          <a:xfrm>
+            <a:off x="9906000" y="1346200"/>
+            <a:ext cx="330200" cy="330200"/>
+          </a:xfrm>
+          <a:prstGeom prst="ellipse">
+            <a:avLst/>
+          </a:prstGeom>
+          <a:solidFill>
+            <a:srgbClr val="FFFFFF"/>
+          </a:solidFill>
+          <a:ln>
+            <a:noFill/>
+          </a:ln>
+        </p:spPr>
+        <p:txBody>
+          <a:bodyPr/>
+          <a:lstStyle/>
+          <a:p>
+            <a:endParaRPr/>
+          </a:p>
+        </p:txBody>
+      </p:sp>
+      <p:sp>
+        <p:nvSpPr>
+          <p:cNvPr id="242" name="NumT5"/>
+          <p:cNvSpPr txBox="1"/>
+          <p:nvPr/>
+        </p:nvSpPr>
+        <p:spPr>
+          <a:xfrm>
+            <a:off x="9906000" y="1346200"/>
+            <a:ext cx="330200" cy="330200"/>
+          </a:xfrm>
+          <a:prstGeom prst="rect">
+            <a:avLst/>
+          </a:prstGeom>
+          <a:noFill/>
+        </p:spPr>
+        <p:txBody>
+          <a:bodyPr wrap="square" lIns="38100" tIns="25400" rIns="38100" bIns="25400" anchor="ctr">
+            <a:noAutofit/>
+          </a:bodyPr>
+          <a:lstStyle/>
+          <a:p>
+            <a:pPr algn="ctr">
+              <a:buNone/>
+            </a:pPr>
+            <a:r>
+              <a:rPr lang="en-IN" sz="1300" b="1" dirty="0">
+                <a:solidFill>
+                  <a:srgbClr val="E8821E"/>
+                </a:solidFill>
+                <a:latin typeface="Calibri"/>
+              </a:rPr>
+              <a:t>6</a:t>
+            </a:r>
+          </a:p>
+        </p:txBody>
+      </p:sp>
+      <p:sp>
+        <p:nvSpPr>
+          <p:cNvPr id="243" name="PillT5"/>
+          <p:cNvSpPr txBox="1"/>
+          <p:nvPr/>
+        </p:nvSpPr>
+        <p:spPr>
+          <a:xfrm>
+            <a:off x="10287000" y="1219200"/>
+            <a:ext cx="1219200" cy="584200"/>
+          </a:xfrm>
+          <a:prstGeom prst="rect">
+            <a:avLst/>
+          </a:prstGeom>
+          <a:noFill/>
+        </p:spPr>
+        <p:txBody>
+          <a:bodyPr wrap="square" lIns="38100" tIns="25400" rIns="38100" bIns="25400" anchor="ctr">
+            <a:noAutofit/>
+          </a:bodyPr>
+          <a:lstStyle/>
+          <a:p>
+            <a:pPr algn="l">
+              <a:buNone/>
+            </a:pPr>
+            <a:r>
+              <a:rPr lang="en-IN" sz="1000" b="1" dirty="0">
+                <a:solidFill>
+                  <a:srgbClr val="FFFFFF"/>
+                </a:solidFill>
+                <a:latin typeface="Calibri"/>
+              </a:rPr>
+              <a:t>Testing &amp; Optimization</a:t>
+            </a:r>
+          </a:p>
+        </p:txBody>
+      </p:sp>
+      <p:sp>
+        <p:nvSpPr>
+          <p:cNvPr id="244" name="Card5"/>
+          <p:cNvSpPr/>
+          <p:nvPr/>
+        </p:nvSpPr>
+        <p:spPr>
+          <a:xfrm>
+            <a:off x="9804400" y="1905000"/>
+            <a:ext cx="1752600" cy="1676400"/>
+          </a:xfrm>
+          <a:prstGeom prst="roundRect">
+            <a:avLst/>
+          </a:prstGeom>
+          <a:solidFill>
+            <a:srgbClr val="FFFFFF"/>
+          </a:solidFill>
+          <a:ln w="9525">
+            <a:solidFill>
+              <a:srgbClr val="D0D7E5"/>
+            </a:solidFill>
+          </a:ln>
+        </p:spPr>
+        <p:txBody>
+          <a:bodyPr/>
+          <a:lstStyle/>
+          <a:p>
+            <a:endParaRPr/>
+          </a:p>
+        </p:txBody>
+      </p:sp>
+      <p:sp>
+        <p:nvSpPr>
+          <p:cNvPr id="245" name="Strip5"/>
+          <p:cNvSpPr/>
+          <p:nvPr/>
+        </p:nvSpPr>
+        <p:spPr>
+          <a:xfrm>
+            <a:off x="9804400" y="1905000"/>
+            <a:ext cx="1752600" cy="38100"/>
+          </a:xfrm>
+          <a:prstGeom prst="rect">
+            <a:avLst/>
+          </a:prstGeom>
+          <a:solidFill>
+            <a:srgbClr val="E8821E"/>
+          </a:solidFill>
+          <a:ln>
+            <a:noFill/>
+          </a:ln>
+        </p:spPr>
+        <p:txBody>
+          <a:bodyPr/>
+          <a:lstStyle/>
+          <a:p>
+            <a:endParaRPr/>
+          </a:p>
+        </p:txBody>
+      </p:sp>
+      <p:sp>
+        <p:nvSpPr>
+          <p:cNvPr id="246" name="CardT5"/>
+          <p:cNvSpPr txBox="1"/>
+          <p:nvPr/>
+        </p:nvSpPr>
+        <p:spPr>
+          <a:xfrm>
+            <a:off x="9906000" y="2336800"/>
+            <a:ext cx="1549400" cy="1168400"/>
+          </a:xfrm>
+          <a:prstGeom prst="rect">
+            <a:avLst/>
+          </a:prstGeom>
+          <a:noFill/>
+        </p:spPr>
+        <p:txBody>
+          <a:bodyPr wrap="square" lIns="38100" tIns="25400" rIns="38100" bIns="25400" anchor="t">
+            <a:noAutofit/>
+          </a:bodyPr>
+          <a:lstStyle/>
+          <a:p>
+            <a:pPr marL="120000" indent="-120000" algn="l">
+              <a:lnSpc>
+                <a:spcPts val="1180"/>
+              </a:lnSpc>
+              <a:spcAft>
+                <a:spcPts val="400"/>
+              </a:spcAft>
+              <a:buClr>
+                <a:srgbClr val="E8821E"/>
+              </a:buClr>
+              <a:buFont typeface="Arial"/>
+              <a:buChar char="•"/>
+            </a:pPr>
+            <a:r>
+              <a:rPr lang="en-IN" sz="900" dirty="0">
+                <a:solidFill>
+                  <a:srgbClr val="16223A"/>
+                </a:solidFill>
+                <a:latin typeface="Calibri"/>
+              </a:rPr>
+              <a:t>Motion performance testing</a:t>
+            </a:r>
+          </a:p>
+          <a:p>
+            <a:pPr marL="120000" indent="-120000" algn="l">
+              <a:lnSpc>
+                <a:spcPts val="1180"/>
+              </a:lnSpc>
+              <a:spcAft>
+                <a:spcPts val="400"/>
+              </a:spcAft>
+              <a:buClr>
+                <a:srgbClr val="E8821E"/>
+              </a:buClr>
+              <a:buFont typeface="Arial"/>
+              <a:buChar char="•"/>
+            </a:pPr>
+            <a:r>
+              <a:rPr lang="en-IN" sz="900" dirty="0">
+                <a:solidFill>
+                  <a:srgbClr val="16223A"/>
+                </a:solidFill>
+                <a:latin typeface="Calibri"/>
+              </a:rPr>
+              <a:t>Power &amp; reliability analysis</a:t>
+            </a:r>
+          </a:p>
+          <a:p>
+            <a:pPr marL="120000" indent="-120000" algn="l">
+              <a:lnSpc>
+                <a:spcPts val="1180"/>
+              </a:lnSpc>
+              <a:spcAft>
+                <a:spcPts val="400"/>
+              </a:spcAft>
+              <a:buClr>
+                <a:srgbClr val="E8821E"/>
+              </a:buClr>
+              <a:buFont typeface="Arial"/>
+              <a:buChar char="•"/>
+            </a:pPr>
+            <a:r>
+              <a:rPr lang="en-IN" sz="900" dirty="0">
+                <a:solidFill>
+                  <a:srgbClr val="16223A"/>
+                </a:solidFill>
+                <a:latin typeface="Calibri"/>
+              </a:rPr>
+              <a:t>System optimization</a:t>
+            </a:r>
+          </a:p>
+        </p:txBody>
+      </p:sp>
+      <p:pic>
+        <p:nvPicPr>
+          <p:cNvPr id="247" name="Graphic 247" descr="Hardware arrival"/>
+          <p:cNvPicPr>
+            <a:picLocks noChangeAspect="1"/>
+          </p:cNvPicPr>
+          <p:nvPr/>
+        </p:nvPicPr>
+        <p:blipFill>
+          <a:blip>
+            <a:extLst>
+              <a:ext uri="{96DAC541-7B7A-43D3-8B79-37D633B846F1}">
+                <asvg:svgBlip xmlns:asvg="http://schemas.microsoft.com/office/drawing/2016/SVG/main" r:embed="rId2"/>
+              </a:ext>
+            </a:extLst>
+          </a:blip>
+          <a:stretch>
+            <a:fillRect/>
+          </a:stretch>
+        </p:blipFill>
+        <p:spPr>
+          <a:xfrm>
+            <a:off x="1930400" y="1993900"/>
+            <a:ext cx="279400" cy="279400"/>
+          </a:xfrm>
+          <a:prstGeom prst="rect">
+            <a:avLst/>
+          </a:prstGeom>
+        </p:spPr>
+      </p:pic>
+      <p:pic>
+        <p:nvPicPr>
+          <p:cNvPr id="248" name="Graphic 248" descr="Mechanical assembly"/>
+          <p:cNvPicPr>
+            <a:picLocks noChangeAspect="1"/>
+          </p:cNvPicPr>
+          <p:nvPr/>
+        </p:nvPicPr>
+        <p:blipFill>
+          <a:blip>
+            <a:extLst>
+              <a:ext uri="{96DAC541-7B7A-43D3-8B79-37D633B846F1}">
+                <asvg:svgBlip xmlns:asvg="http://schemas.microsoft.com/office/drawing/2016/SVG/main" r:embed="rId3"/>
+              </a:ext>
+            </a:extLst>
+          </a:blip>
+          <a:stretch>
+            <a:fillRect/>
+          </a:stretch>
+        </p:blipFill>
+        <p:spPr>
+          <a:xfrm>
+            <a:off x="3784600" y="1993900"/>
+            <a:ext cx="279400" cy="279400"/>
+          </a:xfrm>
+          <a:prstGeom prst="rect">
+            <a:avLst/>
+          </a:prstGeom>
+        </p:spPr>
+      </p:pic>
+      <p:pic>
+        <p:nvPicPr>
+          <p:cNvPr id="249" name="Graphic 249" descr="Communication setup"/>
+          <p:cNvPicPr>
+            <a:picLocks noChangeAspect="1"/>
+          </p:cNvPicPr>
+          <p:nvPr/>
+        </p:nvPicPr>
+        <p:blipFill>
+          <a:blip>
+            <a:extLst>
+              <a:ext uri="{96DAC541-7B7A-43D3-8B79-37D633B846F1}">
+                <asvg:svgBlip xmlns:asvg="http://schemas.microsoft.com/office/drawing/2016/SVG/main" r:embed="rId4"/>
+              </a:ext>
+            </a:extLst>
+          </a:blip>
+          <a:stretch>
+            <a:fillRect/>
+          </a:stretch>
+        </p:blipFill>
+        <p:spPr>
+          <a:xfrm>
+            <a:off x="5638800" y="1993900"/>
+            <a:ext cx="279400" cy="279400"/>
+          </a:xfrm>
+          <a:prstGeom prst="rect">
+            <a:avLst/>
+          </a:prstGeom>
+        </p:spPr>
+      </p:pic>
+      <p:pic>
+        <p:nvPicPr>
+          <p:cNvPr id="250" name="Graphic 250" descr="Locomotion development"/>
+          <p:cNvPicPr>
+            <a:picLocks noChangeAspect="1"/>
+          </p:cNvPicPr>
+          <p:nvPr/>
+        </p:nvPicPr>
+        <p:blipFill>
+          <a:blip>
+            <a:extLst>
+              <a:ext uri="{96DAC541-7B7A-43D3-8B79-37D633B846F1}">
+                <asvg:svgBlip xmlns:asvg="http://schemas.microsoft.com/office/drawing/2016/SVG/main" r:embed="rId5"/>
+              </a:ext>
+            </a:extLst>
+          </a:blip>
+          <a:stretch>
+            <a:fillRect/>
+          </a:stretch>
+        </p:blipFill>
+        <p:spPr>
+          <a:xfrm>
+            <a:off x="7493000" y="1993900"/>
+            <a:ext cx="279400" cy="279400"/>
+          </a:xfrm>
+          <a:prstGeom prst="rect">
+            <a:avLst/>
+          </a:prstGeom>
+        </p:spPr>
+      </p:pic>
+      <p:pic>
+        <p:nvPicPr>
+          <p:cNvPr id="251" name="Graphic 251" descr="Sensor integration"/>
+          <p:cNvPicPr>
+            <a:picLocks noChangeAspect="1"/>
+          </p:cNvPicPr>
+          <p:nvPr/>
+        </p:nvPicPr>
+        <p:blipFill>
+          <a:blip>
+            <a:extLst>
+              <a:ext uri="{96DAC541-7B7A-43D3-8B79-37D633B846F1}">
+                <asvg:svgBlip xmlns:asvg="http://schemas.microsoft.com/office/drawing/2016/SVG/main" r:embed="rId6"/>
+              </a:ext>
+            </a:extLst>
+          </a:blip>
+          <a:stretch>
+            <a:fillRect/>
+          </a:stretch>
+        </p:blipFill>
+        <p:spPr>
+          <a:xfrm>
+            <a:off x="9347200" y="1993900"/>
+            <a:ext cx="279400" cy="279400"/>
+          </a:xfrm>
+          <a:prstGeom prst="rect">
+            <a:avLst/>
+          </a:prstGeom>
+        </p:spPr>
+      </p:pic>
+      <p:pic>
+        <p:nvPicPr>
+          <p:cNvPr id="252" name="Graphic 252" descr="Testing and optimization"/>
+          <p:cNvPicPr>
+            <a:picLocks noChangeAspect="1"/>
+          </p:cNvPicPr>
+          <p:nvPr/>
+        </p:nvPicPr>
+        <p:blipFill>
+          <a:blip>
+            <a:extLst>
+              <a:ext uri="{96DAC541-7B7A-43D3-8B79-37D633B846F1}">
+                <asvg:svgBlip xmlns:asvg="http://schemas.microsoft.com/office/drawing/2016/SVG/main" r:embed="rId7"/>
+              </a:ext>
+            </a:extLst>
+          </a:blip>
+          <a:stretch>
+            <a:fillRect/>
+          </a:stretch>
+        </p:blipFill>
+        <p:spPr>
+          <a:xfrm>
+            <a:off x="11201400" y="1993900"/>
+            <a:ext cx="279400" cy="279400"/>
+          </a:xfrm>
+          <a:prstGeom prst="rect">
+            <a:avLst/>
+          </a:prstGeom>
+        </p:spPr>
+      </p:pic>
+      <p:sp>
+        <p:nvSpPr>
+          <p:cNvPr id="400" name="Lg"/>
+          <p:cNvSpPr/>
+          <p:nvPr/>
+        </p:nvSpPr>
+        <p:spPr>
+          <a:xfrm>
+            <a:off x="533400" y="3759200"/>
+            <a:ext cx="139700" cy="139700"/>
+          </a:xfrm>
+          <a:prstGeom prst="ellipse">
+            <a:avLst/>
+          </a:prstGeom>
+          <a:solidFill>
+            <a:srgbClr val="1F9D55"/>
+          </a:solidFill>
+          <a:ln>
+            <a:noFill/>
+          </a:ln>
+        </p:spPr>
+        <p:txBody>
+          <a:bodyPr/>
+          <a:lstStyle/>
+          <a:p>
+            <a:endParaRPr/>
+          </a:p>
+        </p:txBody>
+      </p:sp>
+      <p:sp>
+        <p:nvSpPr>
+          <p:cNvPr id="401" name="LgT"/>
+          <p:cNvSpPr txBox="1"/>
+          <p:nvPr/>
+        </p:nvSpPr>
+        <p:spPr>
+          <a:xfrm>
+            <a:off x="723900" y="3695700"/>
+            <a:ext cx="1905000" cy="203200"/>
+          </a:xfrm>
+          <a:prstGeom prst="rect">
+            <a:avLst/>
+          </a:prstGeom>
+          <a:noFill/>
+        </p:spPr>
+        <p:txBody>
+          <a:bodyPr wrap="square" lIns="50800" tIns="25400" rIns="50800" bIns="25400" anchor="ctr">
+            <a:noAutofit/>
+          </a:bodyPr>
+          <a:lstStyle/>
+          <a:p>
+            <a:pPr algn="l">
+              <a:buNone/>
+            </a:pPr>
+            <a:r>
+              <a:rPr lang="en-IN" sz="900" b="1" dirty="0">
+                <a:solidFill>
+                  <a:srgbClr val="16223A"/>
+                </a:solidFill>
+                <a:latin typeface="Calibri"/>
+              </a:rPr>
+              <a:t>Completed phase</a:t>
+            </a:r>
+          </a:p>
+        </p:txBody>
+      </p:sp>
+      <p:sp>
+        <p:nvSpPr>
+          <p:cNvPr id="402" name="Lg"/>
+          <p:cNvSpPr/>
+          <p:nvPr/>
+        </p:nvSpPr>
+        <p:spPr>
+          <a:xfrm>
+            <a:off x="2438400" y="3759200"/>
+            <a:ext cx="139700" cy="139700"/>
+          </a:xfrm>
+          <a:prstGeom prst="ellipse">
+            <a:avLst/>
+          </a:prstGeom>
+          <a:solidFill>
+            <a:srgbClr val="1E6FD6"/>
+          </a:solidFill>
+          <a:ln>
+            <a:noFill/>
+          </a:ln>
+        </p:spPr>
+        <p:txBody>
+          <a:bodyPr/>
+          <a:lstStyle/>
+          <a:p>
+            <a:endParaRPr/>
+          </a:p>
+        </p:txBody>
+      </p:sp>
+      <p:sp>
+        <p:nvSpPr>
+          <p:cNvPr id="403" name="LgT"/>
+          <p:cNvSpPr txBox="1"/>
+          <p:nvPr/>
+        </p:nvSpPr>
+        <p:spPr>
+          <a:xfrm>
+            <a:off x="2628900" y="3695700"/>
+            <a:ext cx="1905000" cy="203200"/>
+          </a:xfrm>
+          <a:prstGeom prst="rect">
+            <a:avLst/>
+          </a:prstGeom>
+          <a:noFill/>
+        </p:spPr>
+        <p:txBody>
+          <a:bodyPr wrap="square" lIns="50800" tIns="25400" rIns="50800" bIns="25400" anchor="ctr">
+            <a:noAutofit/>
+          </a:bodyPr>
+          <a:lstStyle/>
+          <a:p>
+            <a:pPr algn="l">
+              <a:buNone/>
+            </a:pPr>
+            <a:r>
+              <a:rPr lang="en-IN" sz="900" b="1" dirty="0">
+                <a:solidFill>
+                  <a:srgbClr val="16223A"/>
+                </a:solidFill>
+                <a:latin typeface="Calibri"/>
+              </a:rPr>
+              <a:t>Ongoing work</a:t>
+            </a:r>
+          </a:p>
+        </p:txBody>
+      </p:sp>
+      <p:sp>
+        <p:nvSpPr>
+          <p:cNvPr id="404" name="Lg"/>
+          <p:cNvSpPr/>
+          <p:nvPr/>
+        </p:nvSpPr>
+        <p:spPr>
+          <a:xfrm>
+            <a:off x="4343400" y="3759200"/>
+            <a:ext cx="139700" cy="139700"/>
+          </a:xfrm>
+          <a:prstGeom prst="ellipse">
+            <a:avLst/>
+          </a:prstGeom>
+          <a:solidFill>
+            <a:srgbClr val="E8821E"/>
+          </a:solidFill>
+          <a:ln>
+            <a:noFill/>
+          </a:ln>
+        </p:spPr>
+        <p:txBody>
+          <a:bodyPr/>
+          <a:lstStyle/>
+          <a:p>
+            <a:endParaRPr/>
+          </a:p>
+        </p:txBody>
+      </p:sp>
+      <p:sp>
+        <p:nvSpPr>
+          <p:cNvPr id="405" name="LgT"/>
+          <p:cNvSpPr txBox="1"/>
+          <p:nvPr/>
+        </p:nvSpPr>
+        <p:spPr>
+          <a:xfrm>
+            <a:off x="4533900" y="3695700"/>
+            <a:ext cx="1905000" cy="203200"/>
+          </a:xfrm>
+          <a:prstGeom prst="rect">
+            <a:avLst/>
+          </a:prstGeom>
+          <a:noFill/>
+        </p:spPr>
+        <p:txBody>
+          <a:bodyPr wrap="square" lIns="50800" tIns="25400" rIns="50800" bIns="25400" anchor="ctr">
+            <a:noAutofit/>
+          </a:bodyPr>
+          <a:lstStyle/>
+          <a:p>
+            <a:pPr algn="l">
+              <a:buNone/>
+            </a:pPr>
+            <a:r>
+              <a:rPr lang="en-IN" sz="900" b="1" dirty="0">
+                <a:solidFill>
+                  <a:srgbClr val="16223A"/>
+                </a:solidFill>
+                <a:latin typeface="Calibri"/>
+              </a:rPr>
+              <a:t>Future milestone</a:t>
+            </a:r>
+          </a:p>
+        </p:txBody>
+      </p:sp>
+      <p:sp>
+        <p:nvSpPr>
+          <p:cNvPr id="406" name="DelCard"/>
+          <p:cNvSpPr/>
+          <p:nvPr/>
+        </p:nvSpPr>
+        <p:spPr>
+          <a:xfrm>
+            <a:off x="533400" y="4064000"/>
+            <a:ext cx="5461000" cy="2489200"/>
+          </a:xfrm>
+          <a:prstGeom prst="roundRect">
+            <a:avLst/>
+          </a:prstGeom>
+          <a:solidFill>
+            <a:srgbClr val="F7F9FC"/>
+          </a:solidFill>
+          <a:ln w="9525">
+            <a:solidFill>
+              <a:srgbClr val="D0D7E5"/>
+            </a:solidFill>
+          </a:ln>
+        </p:spPr>
+        <p:txBody>
+          <a:bodyPr/>
+          <a:lstStyle/>
+          <a:p>
+            <a:endParaRPr/>
+          </a:p>
+        </p:txBody>
+      </p:sp>
+      <p:sp>
+        <p:nvSpPr>
+          <p:cNvPr id="407" name="DelStrip"/>
+          <p:cNvSpPr/>
+          <p:nvPr/>
+        </p:nvSpPr>
+        <p:spPr>
+          <a:xfrm>
+            <a:off x="533400" y="4064000"/>
+            <a:ext cx="63500" cy="2489200"/>
+          </a:xfrm>
+          <a:prstGeom prst="rect">
+            <a:avLst/>
+          </a:prstGeom>
+          <a:solidFill>
+            <a:srgbClr val="0E96AC"/>
+          </a:solidFill>
+          <a:ln>
+            <a:noFill/>
+          </a:ln>
+        </p:spPr>
+        <p:txBody>
+          <a:bodyPr/>
+          <a:lstStyle/>
+          <a:p>
+            <a:endParaRPr/>
+          </a:p>
+        </p:txBody>
+      </p:sp>
+      <p:sp>
+        <p:nvSpPr>
+          <p:cNvPr id="408" name="DelHead"/>
+          <p:cNvSpPr txBox="1"/>
+          <p:nvPr/>
+        </p:nvSpPr>
+        <p:spPr>
+          <a:xfrm>
+            <a:off x="736600" y="4191000"/>
+            <a:ext cx="5130800" cy="279400"/>
+          </a:xfrm>
+          <a:prstGeom prst="rect">
+            <a:avLst/>
+          </a:prstGeom>
+          <a:noFill/>
+        </p:spPr>
+        <p:txBody>
+          <a:bodyPr wrap="square" lIns="50800" tIns="25400" rIns="50800" bIns="25400" anchor="t">
+            <a:noAutofit/>
+          </a:bodyPr>
+          <a:lstStyle/>
+          <a:p>
+            <a:pPr>
+              <a:buNone/>
+            </a:pPr>
+            <a:r>
+              <a:rPr lang="en-IN" sz="1200" b="1" dirty="0">
+                <a:solidFill>
+                  <a:srgbClr val="16223A"/>
+                </a:solidFill>
+                <a:latin typeface="Calibri"/>
+              </a:rPr>
+              <a:t>EXPECTED DELIVERABLES</a:t>
+            </a:r>
+          </a:p>
+        </p:txBody>
+      </p:sp>
+      <p:sp>
+        <p:nvSpPr>
+          <p:cNvPr id="409" name="DelList"/>
+          <p:cNvSpPr txBox="1"/>
+          <p:nvPr/>
+        </p:nvSpPr>
+        <p:spPr>
+          <a:xfrm>
+            <a:off x="736600" y="4546600"/>
+            <a:ext cx="5080000" cy="1905000"/>
+          </a:xfrm>
+          <a:prstGeom prst="rect">
+            <a:avLst/>
+          </a:prstGeom>
+          <a:noFill/>
+        </p:spPr>
+        <p:txBody>
+          <a:bodyPr wrap="square" lIns="50800" tIns="25400" rIns="50800" bIns="25400" anchor="t">
+            <a:noAutofit/>
+          </a:bodyPr>
+          <a:lstStyle/>
+          <a:p>
+            <a:pPr marL="150000" indent="-150000">
+              <a:lnSpc>
+                <a:spcPts val="1300"/>
+              </a:lnSpc>
+              <a:spcAft>
+                <a:spcPts val="300"/>
+              </a:spcAft>
+              <a:buClr>
+                <a:srgbClr val="0E96AC"/>
+              </a:buClr>
+              <a:buFont typeface="Wingdings"/>
+              <a:buChar char="Ø"/>
+            </a:pPr>
+            <a:r>
+              <a:rPr lang="en-IN" sz="1000" dirty="0">
+                <a:solidFill>
+                  <a:srgbClr val="16223A"/>
+                </a:solidFill>
+                <a:latin typeface="Calibri"/>
+              </a:rPr>
+              <a:t>Fully assembled snake robot</a:t>
+            </a:r>
+          </a:p>
+          <a:p>
+            <a:pPr marL="150000" indent="-150000">
+              <a:lnSpc>
+                <a:spcPts val="1300"/>
+              </a:lnSpc>
+              <a:spcAft>
+                <a:spcPts val="300"/>
+              </a:spcAft>
+              <a:buClr>
+                <a:srgbClr val="0E96AC"/>
+              </a:buClr>
+              <a:buFont typeface="Wingdings"/>
+              <a:buChar char="Ø"/>
+            </a:pPr>
+            <a:r>
+              <a:rPr lang="en-IN" sz="1000" dirty="0">
+                <a:solidFill>
+                  <a:srgbClr val="16223A"/>
+                </a:solidFill>
+                <a:latin typeface="Calibri"/>
+              </a:rPr>
+              <a:t>Dynamixel-based locomotion</a:t>
+            </a:r>
+          </a:p>
+          <a:p>
+            <a:pPr marL="150000" indent="-150000">
+              <a:lnSpc>
+                <a:spcPts val="1300"/>
+              </a:lnSpc>
+              <a:spcAft>
+                <a:spcPts val="300"/>
+              </a:spcAft>
+              <a:buClr>
+                <a:srgbClr val="0E96AC"/>
+              </a:buClr>
+              <a:buFont typeface="Wingdings"/>
+              <a:buChar char="Ø"/>
+            </a:pPr>
+            <a:r>
+              <a:rPr lang="en-IN" sz="1000" dirty="0">
+                <a:solidFill>
+                  <a:srgbClr val="16223A"/>
+                </a:solidFill>
+                <a:latin typeface="Calibri"/>
+              </a:rPr>
+              <a:t>Sensor-assisted navigation</a:t>
+            </a:r>
+          </a:p>
+          <a:p>
+            <a:pPr marL="150000" indent="-150000">
+              <a:lnSpc>
+                <a:spcPts val="1300"/>
+              </a:lnSpc>
+              <a:spcAft>
+                <a:spcPts val="300"/>
+              </a:spcAft>
+              <a:buClr>
+                <a:srgbClr val="0E96AC"/>
+              </a:buClr>
+              <a:buFont typeface="Wingdings"/>
+              <a:buChar char="Ø"/>
+            </a:pPr>
+            <a:r>
+              <a:rPr lang="en-IN" sz="1000" dirty="0">
+                <a:solidFill>
+                  <a:srgbClr val="16223A"/>
+                </a:solidFill>
+                <a:latin typeface="Calibri"/>
+              </a:rPr>
+              <a:t>Integrated Raspberry Pi 5 control system</a:t>
+            </a:r>
+          </a:p>
+          <a:p>
+            <a:pPr marL="150000" indent="-150000">
+              <a:lnSpc>
+                <a:spcPts val="1300"/>
+              </a:lnSpc>
+              <a:spcAft>
+                <a:spcPts val="300"/>
+              </a:spcAft>
+              <a:buClr>
+                <a:srgbClr val="0E96AC"/>
+              </a:buClr>
+              <a:buFont typeface="Wingdings"/>
+              <a:buChar char="Ø"/>
+            </a:pPr>
+            <a:r>
+              <a:rPr lang="en-IN" sz="1000" dirty="0">
+                <a:solidFill>
+                  <a:srgbClr val="16223A"/>
+                </a:solidFill>
+                <a:latin typeface="Calibri"/>
+              </a:rPr>
+              <a:t>Demonstration-ready prototype</a:t>
+            </a:r>
+          </a:p>
+          <a:p>
+            <a:pPr marL="150000" indent="-150000">
+              <a:lnSpc>
+                <a:spcPts val="1300"/>
+              </a:lnSpc>
+              <a:spcAft>
+                <a:spcPts val="300"/>
+              </a:spcAft>
+              <a:buClr>
+                <a:srgbClr val="0E96AC"/>
+              </a:buClr>
+              <a:buFont typeface="Wingdings"/>
+              <a:buChar char="Ø"/>
+            </a:pPr>
+            <a:r>
+              <a:rPr lang="en-IN" sz="1000" dirty="0">
+                <a:solidFill>
+                  <a:srgbClr val="16223A"/>
+                </a:solidFill>
+                <a:latin typeface="Calibri"/>
+              </a:rPr>
+              <a:t>Final SURGE project showcase</a:t>
+            </a:r>
+          </a:p>
+        </p:txBody>
+      </p:sp>
+      <p:sp>
+        <p:nvSpPr>
+          <p:cNvPr id="410" name="TgtCard"/>
+          <p:cNvSpPr/>
+          <p:nvPr/>
+        </p:nvSpPr>
+        <p:spPr>
+          <a:xfrm>
+            <a:off x="6197600" y="4064000"/>
+            <a:ext cx="5461000" cy="2489200"/>
+          </a:xfrm>
+          <a:prstGeom prst="roundRect">
+            <a:avLst/>
+          </a:prstGeom>
+          <a:solidFill>
+            <a:srgbClr val="EAF7FA"/>
+          </a:solidFill>
+          <a:ln w="19050">
+            <a:solidFill>
+              <a:srgbClr val="0E96AC"/>
+            </a:solidFill>
+          </a:ln>
+        </p:spPr>
+        <p:txBody>
+          <a:bodyPr/>
+          <a:lstStyle/>
+          <a:p>
+            <a:endParaRPr/>
+          </a:p>
+        </p:txBody>
+      </p:sp>
+      <p:sp>
+        <p:nvSpPr>
+          <p:cNvPr id="411" name="TgtHead"/>
+          <p:cNvSpPr txBox="1"/>
+          <p:nvPr/>
+        </p:nvSpPr>
+        <p:spPr>
+          <a:xfrm>
+            <a:off x="6400800" y="4191000"/>
+            <a:ext cx="5130800" cy="279400"/>
+          </a:xfrm>
+          <a:prstGeom prst="rect">
+            <a:avLst/>
+          </a:prstGeom>
+          <a:noFill/>
+        </p:spPr>
+        <p:txBody>
+          <a:bodyPr wrap="square" lIns="50800" tIns="25400" rIns="50800" bIns="25400" anchor="t">
+            <a:noAutofit/>
+          </a:bodyPr>
+          <a:lstStyle/>
+          <a:p>
+            <a:pPr>
+              <a:buNone/>
+            </a:pPr>
+            <a:r>
+              <a:rPr lang="en-IN" sz="1200" b="1" dirty="0">
+                <a:solidFill>
+                  <a:srgbClr val="0A7A8E"/>
+                </a:solidFill>
+                <a:latin typeface="Calibri"/>
+              </a:rPr>
+              <a:t>TARGET FOR NEXT REVIEW</a:t>
+            </a:r>
+          </a:p>
+        </p:txBody>
+      </p:sp>
+      <p:sp>
+        <p:nvSpPr>
+          <p:cNvPr id="412" name="TgtList"/>
+          <p:cNvSpPr txBox="1"/>
+          <p:nvPr/>
+        </p:nvSpPr>
+        <p:spPr>
+          <a:xfrm>
+            <a:off x="6400800" y="4546600"/>
+            <a:ext cx="5080000" cy="1397000"/>
+          </a:xfrm>
+          <a:prstGeom prst="rect">
+            <a:avLst/>
+          </a:prstGeom>
+          <a:noFill/>
+        </p:spPr>
+        <p:txBody>
+          <a:bodyPr wrap="square" lIns="50800" tIns="25400" rIns="50800" bIns="25400" anchor="t">
+            <a:noAutofit/>
+          </a:bodyPr>
+          <a:lstStyle/>
+          <a:p>
+            <a:pPr marL="150000" indent="-150000">
+              <a:lnSpc>
+                <a:spcPts val="1300"/>
+              </a:lnSpc>
+              <a:spcAft>
+                <a:spcPts val="300"/>
+              </a:spcAft>
+              <a:buClr>
+                <a:srgbClr val="0E96AC"/>
+              </a:buClr>
+              <a:buFont typeface="Arial"/>
+              <a:buChar char="•"/>
+            </a:pPr>
+            <a:r>
+              <a:rPr lang="en-IN" sz="1000" dirty="0">
+                <a:solidFill>
+                  <a:srgbClr val="16223A"/>
+                </a:solidFill>
+                <a:latin typeface="Calibri"/>
+              </a:rPr>
+              <a:t>Complete hardware integration</a:t>
+            </a:r>
+          </a:p>
+          <a:p>
+            <a:pPr marL="150000" indent="-150000">
+              <a:lnSpc>
+                <a:spcPts val="1300"/>
+              </a:lnSpc>
+              <a:spcAft>
+                <a:spcPts val="300"/>
+              </a:spcAft>
+              <a:buClr>
+                <a:srgbClr val="0E96AC"/>
+              </a:buClr>
+              <a:buFont typeface="Arial"/>
+              <a:buChar char="•"/>
+            </a:pPr>
+            <a:r>
+              <a:rPr lang="en-IN" sz="1000" dirty="0">
+                <a:solidFill>
+                  <a:srgbClr val="16223A"/>
+                </a:solidFill>
+                <a:latin typeface="Calibri"/>
+              </a:rPr>
+              <a:t>Demonstrate basic snake locomotion</a:t>
+            </a:r>
+          </a:p>
+          <a:p>
+            <a:pPr marL="150000" indent="-150000">
+              <a:lnSpc>
+                <a:spcPts val="1300"/>
+              </a:lnSpc>
+              <a:spcAft>
+                <a:spcPts val="300"/>
+              </a:spcAft>
+              <a:buClr>
+                <a:srgbClr val="0E96AC"/>
+              </a:buClr>
+              <a:buFont typeface="Arial"/>
+              <a:buChar char="•"/>
+            </a:pPr>
+            <a:r>
+              <a:rPr lang="en-IN" sz="1000" dirty="0">
+                <a:solidFill>
+                  <a:srgbClr val="16223A"/>
+                </a:solidFill>
+                <a:latin typeface="Calibri"/>
+              </a:rPr>
+              <a:t>Validate communication architecture</a:t>
+            </a:r>
+          </a:p>
+          <a:p>
+            <a:pPr marL="150000" indent="-150000">
+              <a:lnSpc>
+                <a:spcPts val="1300"/>
+              </a:lnSpc>
+              <a:spcAft>
+                <a:spcPts val="300"/>
+              </a:spcAft>
+              <a:buClr>
+                <a:srgbClr val="0E96AC"/>
+              </a:buClr>
+              <a:buFont typeface="Arial"/>
+              <a:buChar char="•"/>
+            </a:pPr>
+            <a:r>
+              <a:rPr lang="en-IN" sz="1000" dirty="0">
+                <a:solidFill>
+                  <a:srgbClr val="16223A"/>
+                </a:solidFill>
+                <a:latin typeface="Calibri"/>
+              </a:rPr>
+              <a:t>Validate sensing framework</a:t>
+            </a:r>
+          </a:p>
+        </p:txBody>
+      </p:sp>
+      <p:sp>
+        <p:nvSpPr>
+          <p:cNvPr id="413" name="TgtBadge"/>
+          <p:cNvSpPr/>
+          <p:nvPr/>
+        </p:nvSpPr>
+        <p:spPr>
+          <a:xfrm>
+            <a:off x="6400800" y="5994400"/>
+            <a:ext cx="5054600" cy="406400"/>
+          </a:xfrm>
+          <a:prstGeom prst="roundRect">
+            <a:avLst/>
+          </a:prstGeom>
+          <a:solidFill>
+            <a:srgbClr val="0A7A8E"/>
+          </a:solidFill>
+          <a:ln>
+            <a:noFill/>
+          </a:ln>
+        </p:spPr>
+        <p:txBody>
+          <a:bodyPr/>
+          <a:lstStyle/>
+          <a:p>
+            <a:endParaRPr/>
+          </a:p>
+        </p:txBody>
+      </p:sp>
+      <p:sp>
+        <p:nvSpPr>
+          <p:cNvPr id="414" name="TgtBadgeT"/>
+          <p:cNvSpPr txBox="1"/>
+          <p:nvPr/>
+        </p:nvSpPr>
+        <p:spPr>
+          <a:xfrm>
+            <a:off x="6400800" y="5994400"/>
+            <a:ext cx="5054600" cy="406400"/>
+          </a:xfrm>
+          <a:prstGeom prst="rect">
+            <a:avLst/>
+          </a:prstGeom>
+          <a:noFill/>
+        </p:spPr>
+        <p:txBody>
+          <a:bodyPr wrap="square" lIns="50800" tIns="25400" rIns="50800" bIns="25400" anchor="ctr">
+            <a:noAutofit/>
+          </a:bodyPr>
+          <a:lstStyle/>
+          <a:p>
+            <a:pPr algn="ctr">
+              <a:buNone/>
+            </a:pPr>
+            <a:r>
+              <a:rPr lang="en-IN" sz="1100" b="1" dirty="0">
+                <a:solidFill>
+                  <a:srgbClr val="FFFFFF"/>
+                </a:solidFill>
+                <a:latin typeface="Calibri"/>
+              </a:rPr>
+              <a:t>Goal: ~60–70% project completion</a:t>
+            </a:r>
+          </a:p>
+        </p:txBody>
+      </p:sp>
+      <p:sp>
+        <p:nvSpPr>
+          <p:cNvPr id="600" name="Chev0"/>
+          <p:cNvSpPr/>
+          <p:nvPr/>
+        </p:nvSpPr>
+        <p:spPr>
+          <a:xfrm>
+            <a:off x="2222500" y="1397000"/>
+            <a:ext cx="228600" cy="228600"/>
+          </a:xfrm>
+          <a:prstGeom prst="chevron">
+            <a:avLst/>
+          </a:prstGeom>
+          <a:solidFill>
+            <a:srgbClr val="16223A"/>
+          </a:solidFill>
+          <a:ln>
+            <a:noFill/>
+          </a:ln>
+        </p:spPr>
+        <p:txBody>
+          <a:bodyPr/>
+          <a:lstStyle/>
+          <a:p>
+            <a:endParaRPr/>
+          </a:p>
+        </p:txBody>
+      </p:sp>
+      <p:sp>
+        <p:nvSpPr>
+          <p:cNvPr id="601" name="Chev1"/>
+          <p:cNvSpPr/>
+          <p:nvPr/>
+        </p:nvSpPr>
+        <p:spPr>
+          <a:xfrm>
+            <a:off x="4076700" y="1397000"/>
+            <a:ext cx="228600" cy="228600"/>
+          </a:xfrm>
+          <a:prstGeom prst="chevron">
+            <a:avLst/>
+          </a:prstGeom>
+          <a:solidFill>
+            <a:srgbClr val="16223A"/>
+          </a:solidFill>
+          <a:ln>
+            <a:noFill/>
+          </a:ln>
+        </p:spPr>
+        <p:txBody>
+          <a:bodyPr/>
+          <a:lstStyle/>
+          <a:p>
+            <a:endParaRPr/>
+          </a:p>
+        </p:txBody>
+      </p:sp>
+      <p:sp>
+        <p:nvSpPr>
+          <p:cNvPr id="602" name="Chev2"/>
+          <p:cNvSpPr/>
+          <p:nvPr/>
+        </p:nvSpPr>
+        <p:spPr>
+          <a:xfrm>
+            <a:off x="5930900" y="1397000"/>
+            <a:ext cx="228600" cy="228600"/>
+          </a:xfrm>
+          <a:prstGeom prst="chevron">
+            <a:avLst/>
+          </a:prstGeom>
+          <a:solidFill>
+            <a:srgbClr val="16223A"/>
+          </a:solidFill>
+          <a:ln>
+            <a:noFill/>
+          </a:ln>
+        </p:spPr>
+        <p:txBody>
+          <a:bodyPr/>
+          <a:lstStyle/>
+          <a:p>
+            <a:endParaRPr/>
+          </a:p>
+        </p:txBody>
+      </p:sp>
+      <p:sp>
+        <p:nvSpPr>
+          <p:cNvPr id="603" name="Chev3"/>
+          <p:cNvSpPr/>
+          <p:nvPr/>
+        </p:nvSpPr>
+        <p:spPr>
+          <a:xfrm>
+            <a:off x="7785100" y="1397000"/>
+            <a:ext cx="228600" cy="228600"/>
+          </a:xfrm>
+          <a:prstGeom prst="chevron">
+            <a:avLst/>
+          </a:prstGeom>
+          <a:solidFill>
+            <a:srgbClr val="16223A"/>
+          </a:solidFill>
+          <a:ln>
+            <a:noFill/>
+          </a:ln>
+        </p:spPr>
+        <p:txBody>
+          <a:bodyPr/>
+          <a:lstStyle/>
+          <a:p>
+            <a:endParaRPr/>
+          </a:p>
+        </p:txBody>
+      </p:sp>
+      <p:sp>
+        <p:nvSpPr>
+          <p:cNvPr id="604" name="Chev4"/>
+          <p:cNvSpPr/>
+          <p:nvPr/>
+        </p:nvSpPr>
+        <p:spPr>
+          <a:xfrm>
+            <a:off x="9639300" y="1397000"/>
+            <a:ext cx="228600" cy="228600"/>
+          </a:xfrm>
+          <a:prstGeom prst="chevron">
+            <a:avLst/>
+          </a:prstGeom>
+          <a:solidFill>
+            <a:srgbClr val="16223A"/>
+          </a:solidFill>
+          <a:ln>
+            <a:noFill/>
+          </a:ln>
+        </p:spPr>
+        <p:txBody>
+          <a:bodyPr/>
+          <a:lstStyle/>
+          <a:p>
+            <a:endParaRPr/>
+          </a:p>
+        </p:txBody>
+      </p:sp>
     </p:spTree>
     <p:extLst>
       <p:ext uri="{BB962C8B-B14F-4D97-AF65-F5344CB8AC3E}">
-        <p14:creationId xmlns:p14="http://schemas.microsoft.com/office/powerpoint/2010/main" val="3975997946"/>
+        <p14:creationId xmlns:p14="http://schemas.microsoft.com/office/powerpoint/2010/main" val="3269739527"/>
       </p:ext>
     </p:extLst>
   </p:cSld>
